--- a/Solon_Roadmap_SteerCo_2026.pptx
+++ b/Solon_Roadmap_SteerCo_2026.pptx
@@ -12,10 +12,9 @@
     <p:sldId id="260" r:id="rId6"/>
     <p:sldId id="261" r:id="rId7"/>
     <p:sldId id="262" r:id="rId8"/>
-    <p:sldId id="263" r:id="rId9"/>
   </p:sldIdLst>
   <p:notesMasterIdLst>
-    <p:notesMasterId r:id="rId10"/>
+    <p:notesMasterId r:id="rId9"/>
   </p:notesMasterIdLst>
   <p:sldSz cx="9144000" cy="5143500"/>
   <p:notesSz cx="5143500" cy="9144000"/>
@@ -115,238 +114,6 @@
 </file>
 
 <file path=ppt/charts/chart1.xml><?xml version="1.0" encoding="utf-8"?>
-<c:chartSpace xmlns:c="http://schemas.openxmlformats.org/drawingml/2006/chart" xmlns:a="http://schemas.openxmlformats.org/drawingml/2006/main" xmlns:r="http://schemas.openxmlformats.org/officeDocument/2006/relationships">
-  <c:date1904 val="0"/>
-  <c:roundedCorners val="1"/>
-  <c:chart>
-    <c:autoTitleDeleted val="1"/>
-    <c:plotArea>
-      <c:layout/>
-      <c:doughnutChart>
-        <c:varyColors val="1"/>
-        <c:ser>
-          <c:idx val="0"/>
-          <c:order val="0"/>
-          <c:tx>
-            <c:strRef>
-              <c:f>Sheet1!$B$1</c:f>
-              <c:strCache>
-                <c:ptCount val="1"/>
-                <c:pt idx="0">
-                  <c:v>Status</c:v>
-                </c:pt>
-              </c:strCache>
-            </c:strRef>
-          </c:tx>
-          <c:spPr>
-            <a:solidFill>
-              <a:schemeClr val="accent1"/>
-            </a:solidFill>
-            <a:ln w="9525" cap="flat">
-              <a:solidFill>
-                <a:srgbClr val="F9F9F9"/>
-              </a:solidFill>
-              <a:prstDash val="solid"/>
-              <a:round/>
-            </a:ln>
-            <a:effectLst/>
-          </c:spPr>
-          <c:dPt>
-            <c:idx val="0"/>
-            <c:bubble3D val="0"/>
-            <c:spPr>
-              <a:solidFill>
-                <a:srgbClr val="FF6359"/>
-              </a:solidFill>
-              <a:effectLst/>
-            </c:spPr>
-          </c:dPt>
-          <c:dPt>
-            <c:idx val="1"/>
-            <c:bubble3D val="0"/>
-            <c:spPr>
-              <a:solidFill>
-                <a:srgbClr val="FFD282"/>
-              </a:solidFill>
-              <a:effectLst/>
-            </c:spPr>
-          </c:dPt>
-          <c:dPt>
-            <c:idx val="2"/>
-            <c:bubble3D val="0"/>
-            <c:spPr>
-              <a:solidFill>
-                <a:srgbClr val="73AA87"/>
-              </a:solidFill>
-              <a:effectLst/>
-            </c:spPr>
-          </c:dPt>
-          <c:dLbls>
-            <c:dLbl>
-              <c:idx val="0"/>
-              <c:numFmt formatCode="0%" sourceLinked="0"/>
-              <c:spPr/>
-              <c:txPr>
-                <a:bodyPr/>
-                <a:lstStyle/>
-                <a:p>
-                  <a:pPr>
-                    <a:defRPr sz="1200" b="0" i="0" u="none" strike="noStrike">
-                      <a:solidFill>
-                        <a:srgbClr val="000000"/>
-                      </a:solidFill>
-                      <a:latin typeface="Arial"/>
-                    </a:defRPr>
-                  </a:pPr>
-                </a:p>
-              </c:txPr>
-              <c:showLegendKey val="0"/>
-              <c:showVal val="0"/>
-              <c:showCatName val="0"/>
-              <c:showSerName val="0"/>
-              <c:showPercent val="1"/>
-              <c:showBubbleSize val="0"/>
-            </c:dLbl>
-            <c:dLbl>
-              <c:idx val="1"/>
-              <c:numFmt formatCode="0%" sourceLinked="0"/>
-              <c:spPr/>
-              <c:txPr>
-                <a:bodyPr/>
-                <a:lstStyle/>
-                <a:p>
-                  <a:pPr>
-                    <a:defRPr sz="1200" b="0" i="0" u="none" strike="noStrike">
-                      <a:solidFill>
-                        <a:srgbClr val="000000"/>
-                      </a:solidFill>
-                      <a:latin typeface="Arial"/>
-                    </a:defRPr>
-                  </a:pPr>
-                </a:p>
-              </c:txPr>
-              <c:showLegendKey val="0"/>
-              <c:showVal val="0"/>
-              <c:showCatName val="0"/>
-              <c:showSerName val="0"/>
-              <c:showPercent val="1"/>
-              <c:showBubbleSize val="0"/>
-            </c:dLbl>
-            <c:dLbl>
-              <c:idx val="2"/>
-              <c:numFmt formatCode="0%" sourceLinked="0"/>
-              <c:spPr/>
-              <c:txPr>
-                <a:bodyPr/>
-                <a:lstStyle/>
-                <a:p>
-                  <a:pPr>
-                    <a:defRPr sz="1200" b="0" i="0" u="none" strike="noStrike">
-                      <a:solidFill>
-                        <a:srgbClr val="000000"/>
-                      </a:solidFill>
-                      <a:latin typeface="Arial"/>
-                    </a:defRPr>
-                  </a:pPr>
-                </a:p>
-              </c:txPr>
-              <c:showLegendKey val="0"/>
-              <c:showVal val="0"/>
-              <c:showCatName val="0"/>
-              <c:showSerName val="0"/>
-              <c:showPercent val="1"/>
-              <c:showBubbleSize val="0"/>
-            </c:dLbl>
-            <c:numFmt formatCode="0%" sourceLinked="0"/>
-            <c:txPr>
-              <a:bodyPr/>
-              <a:lstStyle/>
-              <a:p>
-                <a:pPr>
-                  <a:defRPr sz="1800" b="0" i="0" u="none" strike="noStrike">
-                    <a:solidFill>
-                      <a:srgbClr val="000000"/>
-                    </a:solidFill>
-                    <a:latin typeface="Arial"/>
-                  </a:defRPr>
-                </a:pPr>
-              </a:p>
-            </c:txPr>
-            <c:showLegendKey val="0"/>
-            <c:showVal val="0"/>
-            <c:showCatName val="1"/>
-            <c:showSerName val="0"/>
-            <c:showPercent val="1"/>
-            <c:showBubbleSize val="0"/>
-            <c:showLeaderLines val="0"/>
-          </c:dLbls>
-          <c:cat>
-            <c:strRef>
-              <c:f>Sheet1!$A$2:$A$4</c:f>
-              <c:strCache>
-                <c:ptCount val="3"/>
-                <c:pt idx="0">
-                  <c:v>To Do</c:v>
-                </c:pt>
-                <c:pt idx="1">
-                  <c:v>In Progress</c:v>
-                </c:pt>
-                <c:pt idx="2">
-                  <c:v>Done</c:v>
-                </c:pt>
-              </c:strCache>
-            </c:strRef>
-          </c:cat>
-          <c:val>
-            <c:numRef>
-              <c:f>Sheet1!$B$2:$B$4</c:f>
-              <c:numCache>
-                <c:ptCount val="3"/>
-                <c:pt idx="0">
-                  <c:v>85</c:v>
-                </c:pt>
-                <c:pt idx="1">
-                  <c:v>10</c:v>
-                </c:pt>
-                <c:pt idx="2">
-                  <c:v>5</c:v>
-                </c:pt>
-              </c:numCache>
-            </c:numRef>
-          </c:val>
-        </c:ser>
-        <c:firstSliceAng val="0"/>
-        <c:holeSize val="55"/>
-      </c:doughnutChart>
-      <c:spPr>
-        <a:noFill/>
-        <a:ln>
-          <a:noFill/>
-        </a:ln>
-        <a:effectLst/>
-      </c:spPr>
-    </c:plotArea>
-    <c:legend>
-      <c:legendPos val="b"/>
-      <c:overlay val="0"/>
-    </c:legend>
-    <c:plotVisOnly val="1"/>
-    <c:dispBlanksAs val="span"/>
-  </c:chart>
-  <c:spPr>
-    <a:noFill/>
-    <a:ln>
-      <a:noFill/>
-    </a:ln>
-    <a:effectLst/>
-  </c:spPr>
-  <c:externalData r:id="rId1">
-    <c:autoUpdate val="0"/>
-  </c:externalData>
-</c:chartSpace>
-</file>
-
-<file path=ppt/charts/chart2.xml><?xml version="1.0" encoding="utf-8"?>
 <c:chartSpace xmlns:c="http://schemas.openxmlformats.org/drawingml/2006/chart" xmlns:a="http://schemas.openxmlformats.org/drawingml/2006/main" xmlns:r="http://schemas.openxmlformats.org/officeDocument/2006/relationships">
   <c:date1904 val="0"/>
   <c:roundedCorners val="1"/>
@@ -604,7 +371,7 @@
 </c:chartSpace>
 </file>
 
-<file path=ppt/charts/chart3.xml><?xml version="1.0" encoding="utf-8"?>
+<file path=ppt/charts/chart2.xml><?xml version="1.0" encoding="utf-8"?>
 <c:chartSpace xmlns:c="http://schemas.openxmlformats.org/drawingml/2006/chart" xmlns:a="http://schemas.openxmlformats.org/drawingml/2006/main" xmlns:r="http://schemas.openxmlformats.org/officeDocument/2006/relationships">
   <c:date1904 val="0"/>
   <c:roundedCorners val="1"/>
@@ -623,7 +390,7 @@
               <c:strCache>
                 <c:ptCount val="1"/>
                 <c:pt idx="0">
-                  <c:v>Priority</c:v>
+                  <c:v>Series</c:v>
                 </c:pt>
               </c:strCache>
             </c:strRef>
@@ -674,7 +441,7 @@
           <c:dLbls>
             <c:dLbl>
               <c:idx val="0"/>
-              <c:numFmt formatCode="General" sourceLinked="0"/>
+              <c:numFmt formatCode="0%" sourceLinked="0"/>
               <c:spPr/>
               <c:txPr>
                 <a:bodyPr/>
@@ -694,12 +461,12 @@
               <c:showVal val="0"/>
               <c:showCatName val="0"/>
               <c:showSerName val="0"/>
-              <c:showPercent val="0"/>
+              <c:showPercent val="1"/>
               <c:showBubbleSize val="0"/>
             </c:dLbl>
             <c:dLbl>
               <c:idx val="1"/>
-              <c:numFmt formatCode="General" sourceLinked="0"/>
+              <c:numFmt formatCode="0%" sourceLinked="0"/>
               <c:spPr/>
               <c:txPr>
                 <a:bodyPr/>
@@ -719,12 +486,12 @@
               <c:showVal val="0"/>
               <c:showCatName val="0"/>
               <c:showSerName val="0"/>
-              <c:showPercent val="0"/>
+              <c:showPercent val="1"/>
               <c:showBubbleSize val="0"/>
             </c:dLbl>
             <c:dLbl>
               <c:idx val="2"/>
-              <c:numFmt formatCode="General" sourceLinked="0"/>
+              <c:numFmt formatCode="0%" sourceLinked="0"/>
               <c:spPr/>
               <c:txPr>
                 <a:bodyPr/>
@@ -744,10 +511,10 @@
               <c:showVal val="0"/>
               <c:showCatName val="0"/>
               <c:showSerName val="0"/>
-              <c:showPercent val="0"/>
+              <c:showPercent val="1"/>
               <c:showBubbleSize val="0"/>
             </c:dLbl>
-            <c:numFmt formatCode="General" sourceLinked="0"/>
+            <c:numFmt formatCode="0%" sourceLinked="0"/>
             <c:txPr>
               <a:bodyPr/>
               <a:lstStyle/>
@@ -836,7 +603,7 @@
 </c:chartSpace>
 </file>
 
-<file path=ppt/charts/chart4.xml><?xml version="1.0" encoding="utf-8"?>
+<file path=ppt/charts/chart3.xml><?xml version="1.0" encoding="utf-8"?>
 <c:chartSpace xmlns:c="http://schemas.openxmlformats.org/drawingml/2006/chart" xmlns:a="http://schemas.openxmlformats.org/drawingml/2006/main" xmlns:r="http://schemas.openxmlformats.org/officeDocument/2006/relationships">
   <c:date1904 val="0"/>
   <c:roundedCorners val="1"/>
@@ -1082,7 +849,7 @@
 </c:chartSpace>
 </file>
 
-<file path=ppt/charts/chart5.xml><?xml version="1.0" encoding="utf-8"?>
+<file path=ppt/charts/chart4.xml><?xml version="1.0" encoding="utf-8"?>
 <c:chartSpace xmlns:c="http://schemas.openxmlformats.org/drawingml/2006/chart" xmlns:a="http://schemas.openxmlformats.org/drawingml/2006/main" xmlns:r="http://schemas.openxmlformats.org/officeDocument/2006/relationships">
   <c:date1904 val="0"/>
   <c:roundedCorners val="1"/>
@@ -1101,7 +868,7 @@
               <c:strCache>
                 <c:ptCount val="1"/>
                 <c:pt idx="0">
-                  <c:v>Priority</c:v>
+                  <c:v>Series</c:v>
                 </c:pt>
               </c:strCache>
             </c:strRef>
@@ -1142,7 +909,7 @@
           <c:dLbls>
             <c:dLbl>
               <c:idx val="0"/>
-              <c:numFmt formatCode="General" sourceLinked="0"/>
+              <c:numFmt formatCode="0%" sourceLinked="0"/>
               <c:spPr/>
               <c:txPr>
                 <a:bodyPr/>
@@ -1162,12 +929,12 @@
               <c:showVal val="0"/>
               <c:showCatName val="0"/>
               <c:showSerName val="0"/>
-              <c:showPercent val="0"/>
+              <c:showPercent val="1"/>
               <c:showBubbleSize val="0"/>
             </c:dLbl>
             <c:dLbl>
               <c:idx val="1"/>
-              <c:numFmt formatCode="General" sourceLinked="0"/>
+              <c:numFmt formatCode="0%" sourceLinked="0"/>
               <c:spPr/>
               <c:txPr>
                 <a:bodyPr/>
@@ -1187,10 +954,10 @@
               <c:showVal val="0"/>
               <c:showCatName val="0"/>
               <c:showSerName val="0"/>
-              <c:showPercent val="0"/>
+              <c:showPercent val="1"/>
               <c:showBubbleSize val="0"/>
             </c:dLbl>
-            <c:numFmt formatCode="General" sourceLinked="0"/>
+            <c:numFmt formatCode="0%" sourceLinked="0"/>
             <c:txPr>
               <a:bodyPr/>
               <a:lstStyle/>
@@ -1273,228 +1040,7 @@
 </c:chartSpace>
 </file>
 
-<file path=ppt/charts/chart6.xml><?xml version="1.0" encoding="utf-8"?>
-<c:chartSpace xmlns:c="http://schemas.openxmlformats.org/drawingml/2006/chart" xmlns:a="http://schemas.openxmlformats.org/drawingml/2006/main" xmlns:r="http://schemas.openxmlformats.org/officeDocument/2006/relationships">
-  <c:date1904 val="0"/>
-  <c:roundedCorners val="1"/>
-  <c:chart>
-    <c:autoTitleDeleted val="1"/>
-    <c:plotArea>
-      <c:layout/>
-      <c:barChart>
-        <c:barDir val="bar"/>
-        <c:grouping val="clustered"/>
-        <c:varyColors val="0"/>
-        <c:ser>
-          <c:idx val="0"/>
-          <c:order val="0"/>
-          <c:tx>
-            <c:strRef>
-              <c:f>Sheet1!$B$1</c:f>
-              <c:strCache>
-                <c:ptCount val="1"/>
-                <c:pt idx="0">
-                  <c:v>Hours</c:v>
-                </c:pt>
-              </c:strCache>
-            </c:strRef>
-          </c:tx>
-          <c:spPr>
-            <a:solidFill>
-              <a:srgbClr val="1B5E52"/>
-            </a:solidFill>
-            <a:effectLst/>
-          </c:spPr>
-          <c:invertIfNegative val="0"/>
-          <c:dLbls>
-            <c:numFmt formatCode="#,##0" sourceLinked="0"/>
-            <c:txPr>
-              <a:bodyPr/>
-              <a:lstStyle/>
-              <a:p>
-                <a:pPr>
-                  <a:defRPr b="0" i="0" strike="noStrike" sz="700" u="none">
-                    <a:solidFill>
-                      <a:srgbClr val="000000"/>
-                    </a:solidFill>
-                    <a:latin typeface="Arial"/>
-                  </a:defRPr>
-                </a:pPr>
-              </a:p>
-            </c:txPr>
-            <c:showLegendKey val="0"/>
-            <c:showVal val="1"/>
-            <c:showCatName val="0"/>
-            <c:showSerName val="0"/>
-            <c:showPercent val="0"/>
-            <c:showBubbleSize val="0"/>
-            <c:showLeaderLines val="0"/>
-          </c:dLbls>
-          <c:cat>
-            <c:multiLvlStrRef>
-              <c:f>Sheet1!$A$2:$A$1</c:f>
-              <c:multiLvlStrCache>
-                <c:ptCount val="0"/>
-                <c:lvl/>
-              </c:multiLvlStrCache>
-            </c:multiLvlStrRef>
-          </c:cat>
-          <c:val>
-            <c:numRef>
-              <c:f>Sheet1!$B$2:$B$1</c:f>
-              <c:numCache>
-                <c:formatCode>General</c:formatCode>
-                <c:ptCount val="0"/>
-              </c:numCache>
-            </c:numRef>
-          </c:val>
-        </c:ser>
-        <c:dLbls>
-          <c:numFmt formatCode="#,##0" sourceLinked="0"/>
-          <c:txPr>
-            <a:bodyPr/>
-            <a:lstStyle/>
-            <a:p>
-              <a:pPr>
-                <a:defRPr b="0" i="0" strike="noStrike" sz="700" u="none">
-                  <a:solidFill>
-                    <a:srgbClr val="000000"/>
-                  </a:solidFill>
-                  <a:latin typeface="Arial"/>
-                </a:defRPr>
-              </a:pPr>
-            </a:p>
-          </c:txPr>
-          <c:showLegendKey val="0"/>
-          <c:showVal val="1"/>
-          <c:showCatName val="0"/>
-          <c:showSerName val="0"/>
-          <c:showPercent val="0"/>
-          <c:showBubbleSize val="0"/>
-          <c:showLeaderLines val="0"/>
-        </c:dLbls>
-        <c:gapWidth val="150"/>
-        <c:overlap val="0"/>
-        <c:axId val="2094734554"/>
-        <c:axId val="2094734552"/>
-        <c:axId val="2094734556"/>
-      </c:barChart>
-      <c:catAx>
-        <c:axId val="2094734554"/>
-        <c:scaling>
-          <c:orientation val="minMax"/>
-        </c:scaling>
-        <c:delete val="0"/>
-        <c:axPos val="l"/>
-        <c:numFmt formatCode="General" sourceLinked="1"/>
-        <c:majorTickMark val="out"/>
-        <c:minorTickMark val="none"/>
-        <c:tickLblPos val="nextTo"/>
-        <c:spPr>
-          <a:ln w="12700" cap="flat">
-            <a:solidFill>
-              <a:srgbClr val="888888"/>
-            </a:solidFill>
-            <a:prstDash val="solid"/>
-            <a:round/>
-          </a:ln>
-        </c:spPr>
-        <c:txPr>
-          <a:bodyPr/>
-          <a:lstStyle/>
-          <a:p>
-            <a:pPr>
-              <a:defRPr sz="1200" b="0" i="0" u="none" strike="noStrike">
-                <a:solidFill>
-                  <a:srgbClr val="000000"/>
-                </a:solidFill>
-                <a:latin typeface="Arial"/>
-              </a:defRPr>
-            </a:pPr>
-            <a:endParaRPr lang="en-US"/>
-          </a:p>
-        </c:txPr>
-        <c:crossAx val="2094734552"/>
-        <c:crosses val="autoZero"/>
-        <c:auto val="1"/>
-        <c:lblAlgn val="ctr"/>
-        <c:noMultiLvlLbl val="1"/>
-      </c:catAx>
-      <c:valAx>
-        <c:axId val="2094734552"/>
-        <c:scaling>
-          <c:orientation val="minMax"/>
-        </c:scaling>
-        <c:delete val="0"/>
-        <c:axPos val="b"/>
-        <c:majorGridlines>
-          <c:spPr>
-            <a:ln w="12700" cap="flat">
-              <a:solidFill>
-                <a:srgbClr val="888888"/>
-              </a:solidFill>
-              <a:prstDash val="solid"/>
-              <a:round/>
-            </a:ln>
-          </c:spPr>
-        </c:majorGridlines>
-        <c:numFmt formatCode="General" sourceLinked="0"/>
-        <c:majorTickMark val="out"/>
-        <c:minorTickMark val="none"/>
-        <c:tickLblPos val="low"/>
-        <c:spPr>
-          <a:ln w="12700" cap="flat">
-            <a:solidFill>
-              <a:srgbClr val="888888"/>
-            </a:solidFill>
-            <a:prstDash val="solid"/>
-            <a:round/>
-          </a:ln>
-        </c:spPr>
-        <c:txPr>
-          <a:bodyPr/>
-          <a:lstStyle/>
-          <a:p>
-            <a:pPr>
-              <a:defRPr sz="1200" b="0" i="0" u="none" strike="noStrike">
-                <a:solidFill>
-                  <a:srgbClr val="000000"/>
-                </a:solidFill>
-                <a:latin typeface="Arial"/>
-              </a:defRPr>
-            </a:pPr>
-            <a:endParaRPr lang="en-US"/>
-          </a:p>
-        </c:txPr>
-        <c:crossAx val="2094734554"/>
-        <c:crosses val="autoZero"/>
-        <c:crossBetween val="between"/>
-      </c:valAx>
-      <c:spPr>
-        <a:noFill/>
-        <a:ln>
-          <a:noFill/>
-        </a:ln>
-        <a:effectLst/>
-      </c:spPr>
-    </c:plotArea>
-    <c:plotVisOnly val="1"/>
-    <c:dispBlanksAs val="span"/>
-  </c:chart>
-  <c:spPr>
-    <a:noFill/>
-    <a:ln>
-      <a:noFill/>
-    </a:ln>
-    <a:effectLst/>
-  </c:spPr>
-  <c:externalData r:id="rId1">
-    <c:autoUpdate val="0"/>
-  </c:externalData>
-</c:chartSpace>
-</file>
-
-<file path=ppt/charts/chart7.xml><?xml version="1.0" encoding="utf-8"?>
+<file path=ppt/charts/chart5.xml><?xml version="1.0" encoding="utf-8"?>
 <c:chartSpace xmlns:c="http://schemas.openxmlformats.org/drawingml/2006/chart" xmlns:a="http://schemas.openxmlformats.org/drawingml/2006/main" xmlns:r="http://schemas.openxmlformats.org/officeDocument/2006/relationships">
   <c:date1904 val="0"/>
   <c:roundedCorners val="1"/>
@@ -1513,7 +1059,7 @@
               <c:strCache>
                 <c:ptCount val="1"/>
                 <c:pt idx="0">
-                  <c:v>Priority</c:v>
+                  <c:v>Series</c:v>
                 </c:pt>
               </c:strCache>
             </c:strRef>
@@ -1554,7 +1100,7 @@
           <c:dLbls>
             <c:dLbl>
               <c:idx val="0"/>
-              <c:numFmt formatCode="General" sourceLinked="0"/>
+              <c:numFmt formatCode="0%" sourceLinked="0"/>
               <c:spPr/>
               <c:txPr>
                 <a:bodyPr/>
@@ -1574,12 +1120,12 @@
               <c:showVal val="0"/>
               <c:showCatName val="0"/>
               <c:showSerName val="0"/>
-              <c:showPercent val="0"/>
+              <c:showPercent val="1"/>
               <c:showBubbleSize val="0"/>
             </c:dLbl>
             <c:dLbl>
               <c:idx val="1"/>
-              <c:numFmt formatCode="General" sourceLinked="0"/>
+              <c:numFmt formatCode="0%" sourceLinked="0"/>
               <c:spPr/>
               <c:txPr>
                 <a:bodyPr/>
@@ -1599,10 +1145,10 @@
               <c:showVal val="0"/>
               <c:showCatName val="0"/>
               <c:showSerName val="0"/>
-              <c:showPercent val="0"/>
+              <c:showPercent val="1"/>
               <c:showBubbleSize val="0"/>
             </c:dLbl>
-            <c:numFmt formatCode="General" sourceLinked="0"/>
+            <c:numFmt formatCode="0%" sourceLinked="0"/>
             <c:txPr>
               <a:bodyPr/>
               <a:lstStyle/>
@@ -2632,94 +2178,6 @@
             <a:fld id="{F7021451-1387-4CA6-816F-3879F97B5CBC}" type="slidenum">
               <a:rPr lang="en-US"/>
               <a:t>7</a:t>
-            </a:fld>
-            <a:endParaRPr lang="en-US"/>
-          </a:p>
-        </p:txBody>
-      </p:sp>
-    </p:spTree>
-    <p:extLst>
-      <p:ext uri="{BB962C8B-B14F-4D97-AF65-F5344CB8AC3E}">
-        <p14:creationId xmlns:p14="http://schemas.microsoft.com/office/powerpoint/2010/main" val="1024086991"/>
-      </p:ext>
-    </p:extLst>
-  </p:cSld>
-  <p:clrMapOvr>
-    <a:masterClrMapping/>
-  </p:clrMapOvr>
-</p:notes>
-</file>
-
-<file path=ppt/notesSlides/notesSlide8.xml><?xml version="1.0" encoding="utf-8"?>
-<p:notes xmlns:a="http://schemas.openxmlformats.org/drawingml/2006/main" xmlns:r="http://schemas.openxmlformats.org/officeDocument/2006/relationships" xmlns:p="http://schemas.openxmlformats.org/presentationml/2006/main">
-  <p:cSld>
-    <p:spTree>
-      <p:nvGrpSpPr>
-        <p:cNvPr id="1" name=""/>
-        <p:cNvGrpSpPr/>
-        <p:nvPr/>
-      </p:nvGrpSpPr>
-      <p:grpSpPr>
-        <a:xfrm>
-          <a:off x="0" y="0"/>
-          <a:ext cx="0" cy="0"/>
-          <a:chOff x="0" y="0"/>
-          <a:chExt cx="0" cy="0"/>
-        </a:xfrm>
-      </p:grpSpPr>
-      <p:sp>
-        <p:nvSpPr>
-          <p:cNvPr id="2" name="Slide Image Placeholder 1"/>
-          <p:cNvSpPr>
-            <a:spLocks noGrp="1" noRot="1" noChangeAspect="1"/>
-          </p:cNvSpPr>
-          <p:nvPr>
-            <p:ph type="sldImg"/>
-          </p:nvPr>
-        </p:nvSpPr>
-        <p:spPr/>
-      </p:sp>
-      <p:sp>
-        <p:nvSpPr>
-          <p:cNvPr id="3" name="Notes Placeholder 2"/>
-          <p:cNvSpPr>
-            <a:spLocks noGrp="1"/>
-          </p:cNvSpPr>
-          <p:nvPr>
-            <p:ph type="body" idx="1"/>
-          </p:nvPr>
-        </p:nvSpPr>
-        <p:spPr/>
-        <p:txBody>
-          <a:bodyPr/>
-          <a:lstStyle/>
-          <a:p>
-            <a:r>
-              <a:rPr lang="en-US" dirty="0"/>
-              <a:t/>
-            </a:r>
-            <a:endParaRPr lang="en-US" dirty="0"/>
-          </a:p>
-        </p:txBody>
-      </p:sp>
-      <p:sp>
-        <p:nvSpPr>
-          <p:cNvPr id="4" name="Slide Number Placeholder 3"/>
-          <p:cNvSpPr>
-            <a:spLocks noGrp="1"/>
-          </p:cNvSpPr>
-          <p:nvPr>
-            <p:ph type="sldNum" sz="quarter" idx="10"/>
-          </p:nvPr>
-        </p:nvSpPr>
-        <p:spPr/>
-        <p:txBody>
-          <a:bodyPr/>
-          <a:lstStyle/>
-          <a:p>
-            <a:fld id="{F7021451-1387-4CA6-816F-3879F97B5CBC}" type="slidenum">
-              <a:rPr lang="en-US"/>
-              <a:t>8</a:t>
             </a:fld>
             <a:endParaRPr lang="en-US"/>
           </a:p>
@@ -3294,6 +2752,9 @@
                 <a:solidFill>
                   <a:srgbClr val="73AA87"/>
                 </a:solidFill>
+                <a:latin typeface="Calibri" pitchFamily="34" charset="0"/>
+                <a:ea typeface="Calibri" pitchFamily="34" charset="-122"/>
+                <a:cs typeface="Calibri" pitchFamily="34" charset="-120"/>
               </a:rPr>
               <a:t>Netcompany</a:t>
             </a:r>
@@ -3330,6 +2791,9 @@
                 <a:solidFill>
                   <a:srgbClr val="718886"/>
                 </a:solidFill>
+                <a:latin typeface="Calibri" pitchFamily="34" charset="0"/>
+                <a:ea typeface="Calibri" pitchFamily="34" charset="-122"/>
+                <a:cs typeface="Calibri" pitchFamily="34" charset="-120"/>
               </a:rPr>
               <a:t>netcompany.com</a:t>
             </a:r>
@@ -3534,104 +2998,6 @@
         </p:nvSpPr>
         <p:spPr>
           <a:xfrm>
-            <a:off x="0" y="4983480"/>
-            <a:ext cx="9144000" cy="160020"/>
-          </a:xfrm>
-          <a:prstGeom prst="rect">
-            <a:avLst/>
-          </a:prstGeom>
-          <a:solidFill>
-            <a:srgbClr val="123836"/>
-          </a:solidFill>
-          <a:ln/>
-        </p:spPr>
-      </p:sp>
-      <p:sp>
-        <p:nvSpPr>
-          <p:cNvPr id="8" name="Text 6"/>
-          <p:cNvSpPr/>
-          <p:nvPr/>
-        </p:nvSpPr>
-        <p:spPr>
-          <a:xfrm>
-            <a:off x="137160" y="4974336"/>
-            <a:ext cx="6400800" cy="164592"/>
-          </a:xfrm>
-          <a:prstGeom prst="rect">
-            <a:avLst/>
-          </a:prstGeom>
-          <a:noFill/>
-          <a:ln/>
-        </p:spPr>
-        <p:txBody>
-          <a:bodyPr wrap="square" rtlCol="0" anchor="ctr"/>
-          <a:lstStyle/>
-          <a:p>
-            <a:pPr indent="0" marL="0">
-              <a:buNone/>
-            </a:pPr>
-            <a:r>
-              <a:rPr lang="en-US" sz="800" dirty="0">
-                <a:solidFill>
-                  <a:srgbClr val="D0D7D7"/>
-                </a:solidFill>
-                <a:latin typeface="Calibri" pitchFamily="34" charset="0"/>
-                <a:ea typeface="Calibri" pitchFamily="34" charset="-122"/>
-                <a:cs typeface="Calibri" pitchFamily="34" charset="-120"/>
-              </a:rPr>
-              <a:t>Solon Tax Product Roadmap 2026 | SteerCo</a:t>
-            </a:r>
-            <a:endParaRPr lang="en-US" sz="800" dirty="0"/>
-          </a:p>
-        </p:txBody>
-      </p:sp>
-      <p:sp>
-        <p:nvSpPr>
-          <p:cNvPr id="9" name="Text 7"/>
-          <p:cNvSpPr/>
-          <p:nvPr/>
-        </p:nvSpPr>
-        <p:spPr>
-          <a:xfrm>
-            <a:off x="8686800" y="4974336"/>
-            <a:ext cx="365760" cy="164592"/>
-          </a:xfrm>
-          <a:prstGeom prst="rect">
-            <a:avLst/>
-          </a:prstGeom>
-          <a:noFill/>
-          <a:ln/>
-        </p:spPr>
-        <p:txBody>
-          <a:bodyPr wrap="square" rtlCol="0" anchor="ctr"/>
-          <a:lstStyle/>
-          <a:p>
-            <a:pPr algn="r" indent="0" marL="0">
-              <a:buNone/>
-            </a:pPr>
-            <a:r>
-              <a:rPr lang="en-US" sz="800" dirty="0">
-                <a:solidFill>
-                  <a:srgbClr val="D0D7D7"/>
-                </a:solidFill>
-                <a:latin typeface="Calibri" pitchFamily="34" charset="0"/>
-                <a:ea typeface="Calibri" pitchFamily="34" charset="-122"/>
-                <a:cs typeface="Calibri" pitchFamily="34" charset="-120"/>
-              </a:rPr>
-              <a:t>2</a:t>
-            </a:r>
-            <a:endParaRPr lang="en-US" sz="800" dirty="0"/>
-          </a:p>
-        </p:txBody>
-      </p:sp>
-      <p:sp>
-        <p:nvSpPr>
-          <p:cNvPr id="10" name="Shape 8"/>
-          <p:cNvSpPr/>
-          <p:nvPr/>
-        </p:nvSpPr>
-        <p:spPr>
-          <a:xfrm>
             <a:off x="228600" y="1051560"/>
             <a:ext cx="4297680" cy="1097280"/>
           </a:xfrm>
@@ -3658,7 +3024,7 @@
       </p:sp>
       <p:sp>
         <p:nvSpPr>
-          <p:cNvPr id="11" name="Shape 9"/>
+          <p:cNvPr id="8" name="Shape 6"/>
           <p:cNvSpPr/>
           <p:nvPr/>
         </p:nvSpPr>
@@ -3678,7 +3044,7 @@
       </p:sp>
       <p:sp>
         <p:nvSpPr>
-          <p:cNvPr id="12" name="Text 10"/>
+          <p:cNvPr id="9" name="Text 7"/>
           <p:cNvSpPr/>
           <p:nvPr/>
         </p:nvSpPr>
@@ -3714,14 +3080,14 @@
       </p:sp>
       <p:sp>
         <p:nvSpPr>
-          <p:cNvPr id="13" name="Text 11"/>
+          <p:cNvPr id="10" name="Text 8"/>
           <p:cNvSpPr/>
           <p:nvPr/>
         </p:nvSpPr>
         <p:spPr>
           <a:xfrm>
             <a:off x="338328" y="1435608"/>
-            <a:ext cx="4069080" cy="347472"/>
+            <a:ext cx="4078224" cy="347472"/>
           </a:xfrm>
           <a:prstGeom prst="rect">
             <a:avLst/>
@@ -3750,14 +3116,14 @@
       </p:sp>
       <p:sp>
         <p:nvSpPr>
-          <p:cNvPr id="14" name="Text 12"/>
+          <p:cNvPr id="11" name="Text 9"/>
           <p:cNvSpPr/>
           <p:nvPr/>
         </p:nvSpPr>
         <p:spPr>
           <a:xfrm>
             <a:off x="338328" y="1764792"/>
-            <a:ext cx="4069080" cy="320040"/>
+            <a:ext cx="4078224" cy="320040"/>
           </a:xfrm>
           <a:prstGeom prst="rect">
             <a:avLst/>
@@ -3786,13 +3152,13 @@
       </p:sp>
       <p:sp>
         <p:nvSpPr>
-          <p:cNvPr id="15" name="Shape 13"/>
-          <p:cNvSpPr/>
-          <p:nvPr/>
-        </p:nvSpPr>
-        <p:spPr>
-          <a:xfrm>
-            <a:off x="4800600" y="1051560"/>
+          <p:cNvPr id="12" name="Shape 10"/>
+          <p:cNvSpPr/>
+          <p:nvPr/>
+        </p:nvSpPr>
+        <p:spPr>
+          <a:xfrm>
+            <a:off x="5074920" y="1051560"/>
             <a:ext cx="4297680" cy="1097280"/>
           </a:xfrm>
           <a:prstGeom prst="rect">
@@ -3818,13 +3184,13 @@
       </p:sp>
       <p:sp>
         <p:nvSpPr>
-          <p:cNvPr id="16" name="Shape 14"/>
-          <p:cNvSpPr/>
-          <p:nvPr/>
-        </p:nvSpPr>
-        <p:spPr>
-          <a:xfrm>
-            <a:off x="4800600" y="1051560"/>
+          <p:cNvPr id="13" name="Shape 11"/>
+          <p:cNvSpPr/>
+          <p:nvPr/>
+        </p:nvSpPr>
+        <p:spPr>
+          <a:xfrm>
+            <a:off x="5074920" y="1051560"/>
             <a:ext cx="54864" cy="1097280"/>
           </a:xfrm>
           <a:prstGeom prst="rect">
@@ -3838,13 +3204,13 @@
       </p:sp>
       <p:sp>
         <p:nvSpPr>
-          <p:cNvPr id="17" name="Text 15"/>
-          <p:cNvSpPr/>
-          <p:nvPr/>
-        </p:nvSpPr>
-        <p:spPr>
-          <a:xfrm>
-            <a:off x="4910328" y="1124712"/>
+          <p:cNvPr id="14" name="Text 12"/>
+          <p:cNvSpPr/>
+          <p:nvPr/>
+        </p:nvSpPr>
+        <p:spPr>
+          <a:xfrm>
+            <a:off x="5184648" y="1124712"/>
             <a:ext cx="457200" cy="365760"/>
           </a:xfrm>
           <a:prstGeom prst="rect">
@@ -3874,14 +3240,14 @@
       </p:sp>
       <p:sp>
         <p:nvSpPr>
-          <p:cNvPr id="18" name="Text 16"/>
-          <p:cNvSpPr/>
-          <p:nvPr/>
-        </p:nvSpPr>
-        <p:spPr>
-          <a:xfrm>
-            <a:off x="4910328" y="1435608"/>
-            <a:ext cx="4069080" cy="347472"/>
+          <p:cNvPr id="15" name="Text 13"/>
+          <p:cNvSpPr/>
+          <p:nvPr/>
+        </p:nvSpPr>
+        <p:spPr>
+          <a:xfrm>
+            <a:off x="5184648" y="1435608"/>
+            <a:ext cx="4078224" cy="347472"/>
           </a:xfrm>
           <a:prstGeom prst="rect">
             <a:avLst/>
@@ -3910,14 +3276,14 @@
       </p:sp>
       <p:sp>
         <p:nvSpPr>
-          <p:cNvPr id="19" name="Text 17"/>
-          <p:cNvSpPr/>
-          <p:nvPr/>
-        </p:nvSpPr>
-        <p:spPr>
-          <a:xfrm>
-            <a:off x="4910328" y="1764792"/>
-            <a:ext cx="4069080" cy="320040"/>
+          <p:cNvPr id="16" name="Text 14"/>
+          <p:cNvSpPr/>
+          <p:nvPr/>
+        </p:nvSpPr>
+        <p:spPr>
+          <a:xfrm>
+            <a:off x="5184648" y="1764792"/>
+            <a:ext cx="4078224" cy="320040"/>
           </a:xfrm>
           <a:prstGeom prst="rect">
             <a:avLst/>
@@ -3946,7 +3312,7 @@
       </p:sp>
       <p:sp>
         <p:nvSpPr>
-          <p:cNvPr id="20" name="Shape 18"/>
+          <p:cNvPr id="17" name="Shape 15"/>
           <p:cNvSpPr/>
           <p:nvPr/>
         </p:nvSpPr>
@@ -3978,7 +3344,7 @@
       </p:sp>
       <p:sp>
         <p:nvSpPr>
-          <p:cNvPr id="21" name="Shape 19"/>
+          <p:cNvPr id="18" name="Shape 16"/>
           <p:cNvSpPr/>
           <p:nvPr/>
         </p:nvSpPr>
@@ -3998,7 +3364,7 @@
       </p:sp>
       <p:sp>
         <p:nvSpPr>
-          <p:cNvPr id="22" name="Text 20"/>
+          <p:cNvPr id="19" name="Text 17"/>
           <p:cNvSpPr/>
           <p:nvPr/>
         </p:nvSpPr>
@@ -4034,14 +3400,14 @@
       </p:sp>
       <p:sp>
         <p:nvSpPr>
-          <p:cNvPr id="23" name="Text 21"/>
+          <p:cNvPr id="20" name="Text 18"/>
           <p:cNvSpPr/>
           <p:nvPr/>
         </p:nvSpPr>
         <p:spPr>
           <a:xfrm>
             <a:off x="338328" y="2670048"/>
-            <a:ext cx="4069080" cy="347472"/>
+            <a:ext cx="4078224" cy="347472"/>
           </a:xfrm>
           <a:prstGeom prst="rect">
             <a:avLst/>
@@ -4070,14 +3436,14 @@
       </p:sp>
       <p:sp>
         <p:nvSpPr>
-          <p:cNvPr id="24" name="Text 22"/>
+          <p:cNvPr id="21" name="Text 19"/>
           <p:cNvSpPr/>
           <p:nvPr/>
         </p:nvSpPr>
         <p:spPr>
           <a:xfrm>
             <a:off x="338328" y="2999232"/>
-            <a:ext cx="4069080" cy="320040"/>
+            <a:ext cx="4078224" cy="320040"/>
           </a:xfrm>
           <a:prstGeom prst="rect">
             <a:avLst/>
@@ -4106,13 +3472,13 @@
       </p:sp>
       <p:sp>
         <p:nvSpPr>
-          <p:cNvPr id="25" name="Shape 23"/>
-          <p:cNvSpPr/>
-          <p:nvPr/>
-        </p:nvSpPr>
-        <p:spPr>
-          <a:xfrm>
-            <a:off x="4800600" y="2286000"/>
+          <p:cNvPr id="22" name="Shape 20"/>
+          <p:cNvSpPr/>
+          <p:nvPr/>
+        </p:nvSpPr>
+        <p:spPr>
+          <a:xfrm>
+            <a:off x="5074920" y="2286000"/>
             <a:ext cx="4297680" cy="1097280"/>
           </a:xfrm>
           <a:prstGeom prst="rect">
@@ -4138,13 +3504,13 @@
       </p:sp>
       <p:sp>
         <p:nvSpPr>
-          <p:cNvPr id="26" name="Shape 24"/>
-          <p:cNvSpPr/>
-          <p:nvPr/>
-        </p:nvSpPr>
-        <p:spPr>
-          <a:xfrm>
-            <a:off x="4800600" y="2286000"/>
+          <p:cNvPr id="23" name="Shape 21"/>
+          <p:cNvSpPr/>
+          <p:nvPr/>
+        </p:nvSpPr>
+        <p:spPr>
+          <a:xfrm>
+            <a:off x="5074920" y="2286000"/>
             <a:ext cx="54864" cy="1097280"/>
           </a:xfrm>
           <a:prstGeom prst="rect">
@@ -4158,13 +3524,13 @@
       </p:sp>
       <p:sp>
         <p:nvSpPr>
-          <p:cNvPr id="27" name="Text 25"/>
-          <p:cNvSpPr/>
-          <p:nvPr/>
-        </p:nvSpPr>
-        <p:spPr>
-          <a:xfrm>
-            <a:off x="4910328" y="2359152"/>
+          <p:cNvPr id="24" name="Text 22"/>
+          <p:cNvSpPr/>
+          <p:nvPr/>
+        </p:nvSpPr>
+        <p:spPr>
+          <a:xfrm>
+            <a:off x="5184648" y="2359152"/>
             <a:ext cx="457200" cy="365760"/>
           </a:xfrm>
           <a:prstGeom prst="rect">
@@ -4194,14 +3560,14 @@
       </p:sp>
       <p:sp>
         <p:nvSpPr>
-          <p:cNvPr id="28" name="Text 26"/>
-          <p:cNvSpPr/>
-          <p:nvPr/>
-        </p:nvSpPr>
-        <p:spPr>
-          <a:xfrm>
-            <a:off x="4910328" y="2670048"/>
-            <a:ext cx="4069080" cy="347472"/>
+          <p:cNvPr id="25" name="Text 23"/>
+          <p:cNvSpPr/>
+          <p:nvPr/>
+        </p:nvSpPr>
+        <p:spPr>
+          <a:xfrm>
+            <a:off x="5184648" y="2670048"/>
+            <a:ext cx="4078224" cy="347472"/>
           </a:xfrm>
           <a:prstGeom prst="rect">
             <a:avLst/>
@@ -4230,14 +3596,14 @@
       </p:sp>
       <p:sp>
         <p:nvSpPr>
-          <p:cNvPr id="29" name="Text 27"/>
-          <p:cNvSpPr/>
-          <p:nvPr/>
-        </p:nvSpPr>
-        <p:spPr>
-          <a:xfrm>
-            <a:off x="4910328" y="2999232"/>
-            <a:ext cx="4069080" cy="320040"/>
+          <p:cNvPr id="26" name="Text 24"/>
+          <p:cNvSpPr/>
+          <p:nvPr/>
+        </p:nvSpPr>
+        <p:spPr>
+          <a:xfrm>
+            <a:off x="5184648" y="2999232"/>
+            <a:ext cx="4078224" cy="320040"/>
           </a:xfrm>
           <a:prstGeom prst="rect">
             <a:avLst/>
@@ -4266,7 +3632,7 @@
       </p:sp>
       <p:sp>
         <p:nvSpPr>
-          <p:cNvPr id="30" name="Shape 28"/>
+          <p:cNvPr id="27" name="Shape 25"/>
           <p:cNvSpPr/>
           <p:nvPr/>
         </p:nvSpPr>
@@ -4298,7 +3664,7 @@
       </p:sp>
       <p:sp>
         <p:nvSpPr>
-          <p:cNvPr id="31" name="Shape 29"/>
+          <p:cNvPr id="28" name="Shape 26"/>
           <p:cNvSpPr/>
           <p:nvPr/>
         </p:nvSpPr>
@@ -4318,7 +3684,7 @@
       </p:sp>
       <p:sp>
         <p:nvSpPr>
-          <p:cNvPr id="32" name="Text 30"/>
+          <p:cNvPr id="29" name="Text 27"/>
           <p:cNvSpPr/>
           <p:nvPr/>
         </p:nvSpPr>
@@ -4354,14 +3720,14 @@
       </p:sp>
       <p:sp>
         <p:nvSpPr>
-          <p:cNvPr id="33" name="Text 31"/>
+          <p:cNvPr id="30" name="Text 28"/>
           <p:cNvSpPr/>
           <p:nvPr/>
         </p:nvSpPr>
         <p:spPr>
           <a:xfrm>
             <a:off x="338328" y="3904488"/>
-            <a:ext cx="4069080" cy="347472"/>
+            <a:ext cx="4078224" cy="347472"/>
           </a:xfrm>
           <a:prstGeom prst="rect">
             <a:avLst/>
@@ -4390,14 +3756,14 @@
       </p:sp>
       <p:sp>
         <p:nvSpPr>
-          <p:cNvPr id="34" name="Text 32"/>
+          <p:cNvPr id="31" name="Text 29"/>
           <p:cNvSpPr/>
           <p:nvPr/>
         </p:nvSpPr>
         <p:spPr>
           <a:xfrm>
             <a:off x="338328" y="4233672"/>
-            <a:ext cx="4069080" cy="320040"/>
+            <a:ext cx="4078224" cy="320040"/>
           </a:xfrm>
           <a:prstGeom prst="rect">
             <a:avLst/>
@@ -4426,13 +3792,13 @@
       </p:sp>
       <p:sp>
         <p:nvSpPr>
-          <p:cNvPr id="35" name="Shape 33"/>
-          <p:cNvSpPr/>
-          <p:nvPr/>
-        </p:nvSpPr>
-        <p:spPr>
-          <a:xfrm>
-            <a:off x="4800600" y="3520440"/>
+          <p:cNvPr id="32" name="Shape 30"/>
+          <p:cNvSpPr/>
+          <p:nvPr/>
+        </p:nvSpPr>
+        <p:spPr>
+          <a:xfrm>
+            <a:off x="5074920" y="3520440"/>
             <a:ext cx="4297680" cy="1097280"/>
           </a:xfrm>
           <a:prstGeom prst="rect">
@@ -4458,13 +3824,13 @@
       </p:sp>
       <p:sp>
         <p:nvSpPr>
-          <p:cNvPr id="36" name="Shape 34"/>
-          <p:cNvSpPr/>
-          <p:nvPr/>
-        </p:nvSpPr>
-        <p:spPr>
-          <a:xfrm>
-            <a:off x="4800600" y="3520440"/>
+          <p:cNvPr id="33" name="Shape 31"/>
+          <p:cNvSpPr/>
+          <p:nvPr/>
+        </p:nvSpPr>
+        <p:spPr>
+          <a:xfrm>
+            <a:off x="5074920" y="3520440"/>
             <a:ext cx="54864" cy="1097280"/>
           </a:xfrm>
           <a:prstGeom prst="rect">
@@ -4478,13 +3844,13 @@
       </p:sp>
       <p:sp>
         <p:nvSpPr>
-          <p:cNvPr id="37" name="Text 35"/>
-          <p:cNvSpPr/>
-          <p:nvPr/>
-        </p:nvSpPr>
-        <p:spPr>
-          <a:xfrm>
-            <a:off x="4910328" y="3593592"/>
+          <p:cNvPr id="34" name="Text 32"/>
+          <p:cNvSpPr/>
+          <p:nvPr/>
+        </p:nvSpPr>
+        <p:spPr>
+          <a:xfrm>
+            <a:off x="5184648" y="3593592"/>
             <a:ext cx="457200" cy="365760"/>
           </a:xfrm>
           <a:prstGeom prst="rect">
@@ -4514,14 +3880,106 @@
       </p:sp>
       <p:sp>
         <p:nvSpPr>
+          <p:cNvPr id="35" name="Text 33"/>
+          <p:cNvSpPr/>
+          <p:nvPr/>
+        </p:nvSpPr>
+        <p:spPr>
+          <a:xfrm>
+            <a:off x="5184648" y="3904488"/>
+            <a:ext cx="4078224" cy="347472"/>
+          </a:xfrm>
+          <a:prstGeom prst="rect">
+            <a:avLst/>
+          </a:prstGeom>
+          <a:noFill/>
+          <a:ln/>
+        </p:spPr>
+        <p:txBody>
+          <a:bodyPr wrap="square" rtlCol="0" anchor="ctr"/>
+          <a:lstStyle/>
+          <a:p>
+            <a:pPr indent="0" marL="0">
+              <a:buNone/>
+            </a:pPr>
+            <a:r>
+              <a:rPr lang="en-US" sz="1100" b="1" dirty="0">
+                <a:solidFill>
+                  <a:srgbClr val="123836"/>
+                </a:solidFill>
+              </a:rPr>
+              <a:t>Core Data Hub Capabilities</a:t>
+            </a:r>
+            <a:endParaRPr lang="en-US" sz="1100" dirty="0"/>
+          </a:p>
+        </p:txBody>
+      </p:sp>
+      <p:sp>
+        <p:nvSpPr>
+          <p:cNvPr id="36" name="Text 34"/>
+          <p:cNvSpPr/>
+          <p:nvPr/>
+        </p:nvSpPr>
+        <p:spPr>
+          <a:xfrm>
+            <a:off x="5184648" y="4233672"/>
+            <a:ext cx="4078224" cy="320040"/>
+          </a:xfrm>
+          <a:prstGeom prst="rect">
+            <a:avLst/>
+          </a:prstGeom>
+          <a:noFill/>
+          <a:ln/>
+        </p:spPr>
+        <p:txBody>
+          <a:bodyPr wrap="square" rtlCol="0" anchor="ctr"/>
+          <a:lstStyle/>
+          <a:p>
+            <a:pPr indent="0" marL="0">
+              <a:buNone/>
+            </a:pPr>
+            <a:r>
+              <a:rPr lang="en-US" sz="850" dirty="0">
+                <a:solidFill>
+                  <a:srgbClr val="718886"/>
+                </a:solidFill>
+              </a:rPr>
+              <a:t>Data integration, analytics and reporting infrastructure</a:t>
+            </a:r>
+            <a:endParaRPr lang="en-US" sz="850" dirty="0"/>
+          </a:p>
+        </p:txBody>
+      </p:sp>
+      <p:sp>
+        <p:nvSpPr>
+          <p:cNvPr id="37" name="Shape 35"/>
+          <p:cNvSpPr/>
+          <p:nvPr/>
+        </p:nvSpPr>
+        <p:spPr>
+          <a:xfrm>
+            <a:off x="0" y="4983480"/>
+            <a:ext cx="9144000" cy="160020"/>
+          </a:xfrm>
+          <a:prstGeom prst="rect">
+            <a:avLst/>
+          </a:prstGeom>
+          <a:solidFill>
+            <a:srgbClr val="123836"/>
+          </a:solidFill>
+          <a:ln/>
+        </p:spPr>
+      </p:sp>
+      <p:sp>
+        <p:nvSpPr>
           <p:cNvPr id="38" name="Text 36"/>
           <p:cNvSpPr/>
           <p:nvPr/>
         </p:nvSpPr>
         <p:spPr>
           <a:xfrm>
-            <a:off x="4910328" y="3904488"/>
-            <a:ext cx="4069080" cy="347472"/>
+            <a:off x="137160" y="4974336"/>
+            <a:ext cx="6400800" cy="164592"/>
           </a:xfrm>
           <a:prstGeom prst="rect">
             <a:avLst/>
@@ -4537,14 +3995,17 @@
               <a:buNone/>
             </a:pPr>
             <a:r>
-              <a:rPr lang="en-US" sz="1100" b="1" dirty="0">
-                <a:solidFill>
-                  <a:srgbClr val="123836"/>
-                </a:solidFill>
-              </a:rPr>
-              <a:t>Core Data Hub Capabilities</a:t>
-            </a:r>
-            <a:endParaRPr lang="en-US" sz="1100" dirty="0"/>
+              <a:rPr lang="en-US" sz="800" dirty="0">
+                <a:solidFill>
+                  <a:srgbClr val="D0D7D7"/>
+                </a:solidFill>
+                <a:latin typeface="Calibri" pitchFamily="34" charset="0"/>
+                <a:ea typeface="Calibri" pitchFamily="34" charset="-122"/>
+                <a:cs typeface="Calibri" pitchFamily="34" charset="-120"/>
+              </a:rPr>
+              <a:t>Solon Tax Product Roadmap 2026 | SteerCo</a:t>
+            </a:r>
+            <a:endParaRPr lang="en-US" sz="800" dirty="0"/>
           </a:p>
         </p:txBody>
       </p:sp>
@@ -4556,31 +4017,34 @@
         </p:nvSpPr>
         <p:spPr>
           <a:xfrm>
-            <a:off x="4910328" y="4233672"/>
-            <a:ext cx="4069080" cy="320040"/>
-          </a:xfrm>
-          <a:prstGeom prst="rect">
-            <a:avLst/>
-          </a:prstGeom>
-          <a:noFill/>
-          <a:ln/>
-        </p:spPr>
-        <p:txBody>
-          <a:bodyPr wrap="square" rtlCol="0" anchor="ctr"/>
-          <a:lstStyle/>
-          <a:p>
-            <a:pPr indent="0" marL="0">
-              <a:buNone/>
-            </a:pPr>
-            <a:r>
-              <a:rPr lang="en-US" sz="850" dirty="0">
-                <a:solidFill>
-                  <a:srgbClr val="718886"/>
-                </a:solidFill>
-              </a:rPr>
-              <a:t>Data integration, analytics and reporting infrastructure</a:t>
-            </a:r>
-            <a:endParaRPr lang="en-US" sz="850" dirty="0"/>
+            <a:off x="8686800" y="4974336"/>
+            <a:ext cx="365760" cy="164592"/>
+          </a:xfrm>
+          <a:prstGeom prst="rect">
+            <a:avLst/>
+          </a:prstGeom>
+          <a:noFill/>
+          <a:ln/>
+        </p:spPr>
+        <p:txBody>
+          <a:bodyPr wrap="square" rtlCol="0" anchor="ctr"/>
+          <a:lstStyle/>
+          <a:p>
+            <a:pPr algn="r" indent="0" marL="0">
+              <a:buNone/>
+            </a:pPr>
+            <a:r>
+              <a:rPr lang="en-US" sz="800" dirty="0">
+                <a:solidFill>
+                  <a:srgbClr val="D0D7D7"/>
+                </a:solidFill>
+                <a:latin typeface="Calibri" pitchFamily="34" charset="0"/>
+                <a:ea typeface="Calibri" pitchFamily="34" charset="-122"/>
+                <a:cs typeface="Calibri" pitchFamily="34" charset="-120"/>
+              </a:rPr>
+              <a:t>2</a:t>
+            </a:r>
+            <a:endParaRPr lang="en-US" sz="800" dirty="0"/>
           </a:p>
         </p:txBody>
       </p:sp>
@@ -4781,104 +4245,6 @@
         </p:nvSpPr>
         <p:spPr>
           <a:xfrm>
-            <a:off x="0" y="4983480"/>
-            <a:ext cx="9144000" cy="160020"/>
-          </a:xfrm>
-          <a:prstGeom prst="rect">
-            <a:avLst/>
-          </a:prstGeom>
-          <a:solidFill>
-            <a:srgbClr val="123836"/>
-          </a:solidFill>
-          <a:ln/>
-        </p:spPr>
-      </p:sp>
-      <p:sp>
-        <p:nvSpPr>
-          <p:cNvPr id="8" name="Text 6"/>
-          <p:cNvSpPr/>
-          <p:nvPr/>
-        </p:nvSpPr>
-        <p:spPr>
-          <a:xfrm>
-            <a:off x="137160" y="4974336"/>
-            <a:ext cx="6400800" cy="164592"/>
-          </a:xfrm>
-          <a:prstGeom prst="rect">
-            <a:avLst/>
-          </a:prstGeom>
-          <a:noFill/>
-          <a:ln/>
-        </p:spPr>
-        <p:txBody>
-          <a:bodyPr wrap="square" rtlCol="0" anchor="ctr"/>
-          <a:lstStyle/>
-          <a:p>
-            <a:pPr indent="0" marL="0">
-              <a:buNone/>
-            </a:pPr>
-            <a:r>
-              <a:rPr lang="en-US" sz="800" dirty="0">
-                <a:solidFill>
-                  <a:srgbClr val="D0D7D7"/>
-                </a:solidFill>
-                <a:latin typeface="Calibri" pitchFamily="34" charset="0"/>
-                <a:ea typeface="Calibri" pitchFamily="34" charset="-122"/>
-                <a:cs typeface="Calibri" pitchFamily="34" charset="-120"/>
-              </a:rPr>
-              <a:t>Solon Tax Product Roadmap 2026 | SteerCo</a:t>
-            </a:r>
-            <a:endParaRPr lang="en-US" sz="800" dirty="0"/>
-          </a:p>
-        </p:txBody>
-      </p:sp>
-      <p:sp>
-        <p:nvSpPr>
-          <p:cNvPr id="9" name="Text 7"/>
-          <p:cNvSpPr/>
-          <p:nvPr/>
-        </p:nvSpPr>
-        <p:spPr>
-          <a:xfrm>
-            <a:off x="8686800" y="4974336"/>
-            <a:ext cx="365760" cy="164592"/>
-          </a:xfrm>
-          <a:prstGeom prst="rect">
-            <a:avLst/>
-          </a:prstGeom>
-          <a:noFill/>
-          <a:ln/>
-        </p:spPr>
-        <p:txBody>
-          <a:bodyPr wrap="square" rtlCol="0" anchor="ctr"/>
-          <a:lstStyle/>
-          <a:p>
-            <a:pPr algn="r" indent="0" marL="0">
-              <a:buNone/>
-            </a:pPr>
-            <a:r>
-              <a:rPr lang="en-US" sz="800" dirty="0">
-                <a:solidFill>
-                  <a:srgbClr val="D0D7D7"/>
-                </a:solidFill>
-                <a:latin typeface="Calibri" pitchFamily="34" charset="0"/>
-                <a:ea typeface="Calibri" pitchFamily="34" charset="-122"/>
-                <a:cs typeface="Calibri" pitchFamily="34" charset="-120"/>
-              </a:rPr>
-              <a:t>3</a:t>
-            </a:r>
-            <a:endParaRPr lang="en-US" sz="800" dirty="0"/>
-          </a:p>
-        </p:txBody>
-      </p:sp>
-      <p:sp>
-        <p:nvSpPr>
-          <p:cNvPr id="10" name="Shape 8"/>
-          <p:cNvSpPr/>
-          <p:nvPr/>
-        </p:nvSpPr>
-        <p:spPr>
-          <a:xfrm>
             <a:off x="228600" y="1005840"/>
             <a:ext cx="2011680" cy="960120"/>
           </a:xfrm>
@@ -4905,14 +4271,14 @@
       </p:sp>
       <p:sp>
         <p:nvSpPr>
-          <p:cNvPr id="11" name="Shape 9"/>
+          <p:cNvPr id="8" name="Shape 6"/>
           <p:cNvSpPr/>
           <p:nvPr/>
         </p:nvSpPr>
         <p:spPr>
           <a:xfrm>
             <a:off x="228600" y="1005840"/>
-            <a:ext cx="2011680" cy="54864"/>
+            <a:ext cx="54864" cy="960120"/>
           </a:xfrm>
           <a:prstGeom prst="rect">
             <a:avLst/>
@@ -4925,7 +4291,7 @@
       </p:sp>
       <p:sp>
         <p:nvSpPr>
-          <p:cNvPr id="12" name="Text 10"/>
+          <p:cNvPr id="9" name="Text 7"/>
           <p:cNvSpPr/>
           <p:nvPr/>
         </p:nvSpPr>
@@ -4964,7 +4330,7 @@
       </p:sp>
       <p:sp>
         <p:nvSpPr>
-          <p:cNvPr id="13" name="Text 11"/>
+          <p:cNvPr id="10" name="Text 8"/>
           <p:cNvSpPr/>
           <p:nvPr/>
         </p:nvSpPr>
@@ -5003,7 +4369,7 @@
       </p:sp>
       <p:sp>
         <p:nvSpPr>
-          <p:cNvPr id="14" name="Text 12"/>
+          <p:cNvPr id="11" name="Text 9"/>
           <p:cNvSpPr/>
           <p:nvPr/>
         </p:nvSpPr>
@@ -5042,7 +4408,7 @@
       </p:sp>
       <p:sp>
         <p:nvSpPr>
-          <p:cNvPr id="15" name="Shape 13"/>
+          <p:cNvPr id="12" name="Shape 10"/>
           <p:cNvSpPr/>
           <p:nvPr/>
         </p:nvSpPr>
@@ -5074,14 +4440,14 @@
       </p:sp>
       <p:sp>
         <p:nvSpPr>
-          <p:cNvPr id="16" name="Shape 14"/>
+          <p:cNvPr id="13" name="Shape 11"/>
           <p:cNvSpPr/>
           <p:nvPr/>
         </p:nvSpPr>
         <p:spPr>
           <a:xfrm>
             <a:off x="2414016" y="1005840"/>
-            <a:ext cx="2011680" cy="54864"/>
+            <a:ext cx="54864" cy="960120"/>
           </a:xfrm>
           <a:prstGeom prst="rect">
             <a:avLst/>
@@ -5094,7 +4460,7 @@
       </p:sp>
       <p:sp>
         <p:nvSpPr>
-          <p:cNvPr id="17" name="Text 15"/>
+          <p:cNvPr id="14" name="Text 12"/>
           <p:cNvSpPr/>
           <p:nvPr/>
         </p:nvSpPr>
@@ -5133,7 +4499,7 @@
       </p:sp>
       <p:sp>
         <p:nvSpPr>
-          <p:cNvPr id="18" name="Text 16"/>
+          <p:cNvPr id="15" name="Text 13"/>
           <p:cNvSpPr/>
           <p:nvPr/>
         </p:nvSpPr>
@@ -5172,7 +4538,7 @@
       </p:sp>
       <p:sp>
         <p:nvSpPr>
-          <p:cNvPr id="19" name="Text 17"/>
+          <p:cNvPr id="16" name="Text 14"/>
           <p:cNvSpPr/>
           <p:nvPr/>
         </p:nvSpPr>
@@ -5211,7 +4577,7 @@
       </p:sp>
       <p:sp>
         <p:nvSpPr>
-          <p:cNvPr id="20" name="Shape 18"/>
+          <p:cNvPr id="17" name="Shape 15"/>
           <p:cNvSpPr/>
           <p:nvPr/>
         </p:nvSpPr>
@@ -5243,14 +4609,14 @@
       </p:sp>
       <p:sp>
         <p:nvSpPr>
-          <p:cNvPr id="21" name="Shape 19"/>
+          <p:cNvPr id="18" name="Shape 16"/>
           <p:cNvSpPr/>
           <p:nvPr/>
         </p:nvSpPr>
         <p:spPr>
           <a:xfrm>
             <a:off x="4599432" y="1005840"/>
-            <a:ext cx="2011680" cy="54864"/>
+            <a:ext cx="54864" cy="960120"/>
           </a:xfrm>
           <a:prstGeom prst="rect">
             <a:avLst/>
@@ -5263,7 +4629,7 @@
       </p:sp>
       <p:sp>
         <p:nvSpPr>
-          <p:cNvPr id="22" name="Text 20"/>
+          <p:cNvPr id="19" name="Text 17"/>
           <p:cNvSpPr/>
           <p:nvPr/>
         </p:nvSpPr>
@@ -5302,7 +4668,7 @@
       </p:sp>
       <p:sp>
         <p:nvSpPr>
-          <p:cNvPr id="23" name="Text 21"/>
+          <p:cNvPr id="20" name="Text 18"/>
           <p:cNvSpPr/>
           <p:nvPr/>
         </p:nvSpPr>
@@ -5341,7 +4707,7 @@
       </p:sp>
       <p:sp>
         <p:nvSpPr>
-          <p:cNvPr id="24" name="Text 22"/>
+          <p:cNvPr id="21" name="Text 19"/>
           <p:cNvSpPr/>
           <p:nvPr/>
         </p:nvSpPr>
@@ -5380,7 +4746,7 @@
       </p:sp>
       <p:sp>
         <p:nvSpPr>
-          <p:cNvPr id="25" name="Shape 23"/>
+          <p:cNvPr id="22" name="Shape 20"/>
           <p:cNvSpPr/>
           <p:nvPr/>
         </p:nvSpPr>
@@ -5412,14 +4778,14 @@
       </p:sp>
       <p:sp>
         <p:nvSpPr>
-          <p:cNvPr id="26" name="Shape 24"/>
+          <p:cNvPr id="23" name="Shape 21"/>
           <p:cNvSpPr/>
           <p:nvPr/>
         </p:nvSpPr>
         <p:spPr>
           <a:xfrm>
             <a:off x="6784848" y="1005840"/>
-            <a:ext cx="2011680" cy="54864"/>
+            <a:ext cx="54864" cy="960120"/>
           </a:xfrm>
           <a:prstGeom prst="rect">
             <a:avLst/>
@@ -5432,7 +4798,7 @@
       </p:sp>
       <p:sp>
         <p:nvSpPr>
-          <p:cNvPr id="27" name="Text 25"/>
+          <p:cNvPr id="24" name="Text 22"/>
           <p:cNvSpPr/>
           <p:nvPr/>
         </p:nvSpPr>
@@ -5471,7 +4837,7 @@
       </p:sp>
       <p:sp>
         <p:nvSpPr>
-          <p:cNvPr id="28" name="Text 26"/>
+          <p:cNvPr id="25" name="Text 23"/>
           <p:cNvSpPr/>
           <p:nvPr/>
         </p:nvSpPr>
@@ -5510,7 +4876,7 @@
       </p:sp>
       <p:sp>
         <p:nvSpPr>
-          <p:cNvPr id="29" name="Text 27"/>
+          <p:cNvPr id="26" name="Text 24"/>
           <p:cNvSpPr/>
           <p:nvPr/>
         </p:nvSpPr>
@@ -5549,7 +4915,46 @@
       </p:sp>
       <p:sp>
         <p:nvSpPr>
-          <p:cNvPr id="30" name="Text 28"/>
+          <p:cNvPr id="27" name="Text 25"/>
+          <p:cNvSpPr/>
+          <p:nvPr/>
+        </p:nvSpPr>
+        <p:spPr>
+          <a:xfrm>
+            <a:off x="228600" y="2103120"/>
+            <a:ext cx="3291840" cy="777240"/>
+          </a:xfrm>
+          <a:prstGeom prst="rect">
+            <a:avLst/>
+          </a:prstGeom>
+          <a:noFill/>
+          <a:ln/>
+        </p:spPr>
+        <p:txBody>
+          <a:bodyPr wrap="square" rtlCol="0" anchor="ctr"/>
+          <a:lstStyle/>
+          <a:p>
+            <a:pPr indent="0" marL="0">
+              <a:buNone/>
+            </a:pPr>
+            <a:r>
+              <a:rPr lang="en-US" sz="1000" dirty="0">
+                <a:solidFill>
+                  <a:srgbClr val="141E1E"/>
+                </a:solidFill>
+                <a:latin typeface="Calibri" pitchFamily="34" charset="0"/>
+                <a:ea typeface="Calibri" pitchFamily="34" charset="-122"/>
+                <a:cs typeface="Calibri" pitchFamily="34" charset="-120"/>
+              </a:rPr>
+              <a:t>Covers the foundational tax administration functions enabling tax authorities to manage the full lifecycle of taxpayer obligations — from registration and filing through billing, assessment, accounting, and penalty management.</a:t>
+            </a:r>
+            <a:endParaRPr lang="en-US" sz="1000" dirty="0"/>
+          </a:p>
+        </p:txBody>
+      </p:sp>
+      <p:sp>
+        <p:nvSpPr>
+          <p:cNvPr id="28" name="Text 26"/>
           <p:cNvSpPr/>
           <p:nvPr/>
         </p:nvSpPr>
@@ -5576,6 +4981,9 @@
                 <a:solidFill>
                   <a:srgbClr val="FF6359"/>
                 </a:solidFill>
+                <a:latin typeface="Calibri" pitchFamily="34" charset="0"/>
+                <a:ea typeface="Calibri" pitchFamily="34" charset="-122"/>
+                <a:cs typeface="Calibri" pitchFamily="34" charset="-120"/>
               </a:rPr>
               <a:t>Business Scope</a:t>
             </a:r>
@@ -5585,43 +4993,7 @@
       </p:sp>
       <p:sp>
         <p:nvSpPr>
-          <p:cNvPr id="31" name="Text 29"/>
-          <p:cNvSpPr/>
-          <p:nvPr/>
-        </p:nvSpPr>
-        <p:spPr>
-          <a:xfrm>
-            <a:off x="228600" y="2377440"/>
-            <a:ext cx="3291840" cy="777240"/>
-          </a:xfrm>
-          <a:prstGeom prst="rect">
-            <a:avLst/>
-          </a:prstGeom>
-          <a:noFill/>
-          <a:ln/>
-        </p:spPr>
-        <p:txBody>
-          <a:bodyPr wrap="square" rtlCol="0" anchor="ctr"/>
-          <a:lstStyle/>
-          <a:p>
-            <a:pPr indent="0" marL="0">
-              <a:buNone/>
-            </a:pPr>
-            <a:r>
-              <a:rPr lang="en-US" sz="1000" dirty="0">
-                <a:solidFill>
-                  <a:srgbClr val="141E1E"/>
-                </a:solidFill>
-              </a:rPr>
-              <a:t>Covers the foundational tax administration functions enabling tax authorities to manage the full lifecycle of taxpayer obligations — from registration and filing through billing, assessment, accounting, and penalty management.</a:t>
-            </a:r>
-            <a:endParaRPr lang="en-US" sz="1000" dirty="0"/>
-          </a:p>
-        </p:txBody>
-      </p:sp>
-      <p:sp>
-        <p:nvSpPr>
-          <p:cNvPr id="32" name="Text 30"/>
+          <p:cNvPr id="29" name="Text 27"/>
           <p:cNvSpPr/>
           <p:nvPr/>
         </p:nvSpPr>
@@ -5648,6 +5020,9 @@
                 <a:solidFill>
                   <a:srgbClr val="FF6359"/>
                 </a:solidFill>
+                <a:latin typeface="Calibri" pitchFamily="34" charset="0"/>
+                <a:ea typeface="Calibri" pitchFamily="34" charset="-122"/>
+                <a:cs typeface="Calibri" pitchFamily="34" charset="-120"/>
               </a:rPr>
               <a:t>Market Needs &amp; Investment Benefits</a:t>
             </a:r>
@@ -5657,7 +5032,7 @@
       </p:sp>
       <p:sp>
         <p:nvSpPr>
-          <p:cNvPr id="33" name="Text 31"/>
+          <p:cNvPr id="30" name="Text 28"/>
           <p:cNvSpPr/>
           <p:nvPr/>
         </p:nvSpPr>
@@ -5685,6 +5060,9 @@
                 <a:solidFill>
                   <a:srgbClr val="4A5C5A"/>
                 </a:solidFill>
+                <a:latin typeface="Calibri" pitchFamily="34" charset="0"/>
+                <a:ea typeface="Calibri" pitchFamily="34" charset="-122"/>
+                <a:cs typeface="Calibri" pitchFamily="34" charset="-120"/>
               </a:rPr>
               <a:t>End-to-end taxpayer lifecycle management reduces administrative burden and manual errors</a:t>
             </a:r>
@@ -5700,6 +5078,9 @@
                 <a:solidFill>
                   <a:srgbClr val="4A5C5A"/>
                 </a:solidFill>
+                <a:latin typeface="Calibri" pitchFamily="34" charset="0"/>
+                <a:ea typeface="Calibri" pitchFamily="34" charset="-122"/>
+                <a:cs typeface="Calibri" pitchFamily="34" charset="-120"/>
               </a:rPr>
               <a:t>Automated penalty and interest calculations improve collection rates and reduce revenue leakage</a:t>
             </a:r>
@@ -5715,6 +5096,9 @@
                 <a:solidFill>
                   <a:srgbClr val="4A5C5A"/>
                 </a:solidFill>
+                <a:latin typeface="Calibri" pitchFamily="34" charset="0"/>
+                <a:ea typeface="Calibri" pitchFamily="34" charset="-122"/>
+                <a:cs typeface="Calibri" pitchFamily="34" charset="-120"/>
               </a:rPr>
               <a:t>Modular capability design allows onboarding of new tax types with minimal reconfiguration</a:t>
             </a:r>
@@ -5730,6 +5114,9 @@
                 <a:solidFill>
                   <a:srgbClr val="4A5C5A"/>
                 </a:solidFill>
+                <a:latin typeface="Calibri" pitchFamily="34" charset="0"/>
+                <a:ea typeface="Calibri" pitchFamily="34" charset="-122"/>
+                <a:cs typeface="Calibri" pitchFamily="34" charset="-120"/>
               </a:rPr>
               <a:t>Streamlined registration and billing processes reduce case handling time for tax officers</a:t>
             </a:r>
@@ -5745,6 +5132,9 @@
                 <a:solidFill>
                   <a:srgbClr val="4A5C5A"/>
                 </a:solidFill>
+                <a:latin typeface="Calibri" pitchFamily="34" charset="0"/>
+                <a:ea typeface="Calibri" pitchFamily="34" charset="-122"/>
+                <a:cs typeface="Calibri" pitchFamily="34" charset="-120"/>
               </a:rPr>
               <a:t>Supports regulatory compliance including audit trails and operational reporting</a:t>
             </a:r>
@@ -5754,14 +5144,14 @@
       </p:sp>
       <p:sp>
         <p:nvSpPr>
-          <p:cNvPr id="34" name="Text 32"/>
+          <p:cNvPr id="31" name="Text 29"/>
           <p:cNvSpPr/>
           <p:nvPr/>
         </p:nvSpPr>
         <p:spPr>
           <a:xfrm>
             <a:off x="3611880" y="2103120"/>
-            <a:ext cx="2468880" cy="256032"/>
+            <a:ext cx="4937760" cy="256032"/>
           </a:xfrm>
           <a:prstGeom prst="rect">
             <a:avLst/>
@@ -5777,66 +5167,17 @@
               <a:buNone/>
             </a:pPr>
             <a:r>
-              <a:rPr lang="en-US" sz="1000" b="1" dirty="0">
+              <a:rPr lang="en-US" sz="900" b="1" dirty="0">
                 <a:solidFill>
                   <a:srgbClr val="FF6359"/>
                 </a:solidFill>
-              </a:rPr>
-              <a:t>Status Distribution</a:t>
-            </a:r>
-            <a:endParaRPr lang="en-US" sz="1000" dirty="0"/>
-          </a:p>
-        </p:txBody>
-      </p:sp>
-      <p:graphicFrame>
-        <p:nvGraphicFramePr>
-          <p:cNvPr id="35" name="Chart 0" descr=""/>
-          <p:cNvGraphicFramePr/>
-          <p:nvPr/>
-        </p:nvGraphicFramePr>
-        <p:xfrm>
-          <a:off x="3611880" y="2377440"/>
-          <a:ext cx="2468880" cy="1554480"/>
-        </p:xfrm>
-        <a:graphic xmlns:a="http://schemas.openxmlformats.org/drawingml/2006/main">
-          <a:graphicData uri="http://schemas.openxmlformats.org/drawingml/2006/chart">
-            <c:chart xmlns:c="http://schemas.openxmlformats.org/drawingml/2006/chart" r:id="rId1"/>
-          </a:graphicData>
-        </a:graphic>
-      </p:graphicFrame>
-      <p:sp>
-        <p:nvSpPr>
-          <p:cNvPr id="36" name="Text 33"/>
-          <p:cNvSpPr/>
-          <p:nvPr/>
-        </p:nvSpPr>
-        <p:spPr>
-          <a:xfrm>
-            <a:off x="6172200" y="2103120"/>
-            <a:ext cx="2743200" cy="256032"/>
-          </a:xfrm>
-          <a:prstGeom prst="rect">
-            <a:avLst/>
-          </a:prstGeom>
-          <a:noFill/>
-          <a:ln/>
-        </p:spPr>
-        <p:txBody>
-          <a:bodyPr wrap="square" rtlCol="0" anchor="ctr"/>
-          <a:lstStyle/>
-          <a:p>
-            <a:pPr indent="0" marL="0">
-              <a:buNone/>
-            </a:pPr>
-            <a:r>
-              <a:rPr lang="en-US" sz="1000" b="1" dirty="0">
-                <a:solidFill>
-                  <a:srgbClr val="FF6359"/>
-                </a:solidFill>
+                <a:latin typeface="Calibri" pitchFamily="34" charset="0"/>
+                <a:ea typeface="Calibri" pitchFamily="34" charset="-122"/>
+                <a:cs typeface="Calibri" pitchFamily="34" charset="-120"/>
               </a:rPr>
               <a:t>Roadmap Initiatives at a Glance</a:t>
             </a:r>
-            <a:endParaRPr lang="en-US" sz="1000" dirty="0"/>
+            <a:endParaRPr lang="en-US" sz="900" dirty="0"/>
           </a:p>
         </p:txBody>
       </p:sp>
@@ -5855,38 +5196,38 @@
           </p:nvPr>
         </p:nvGraphicFramePr>
         <p:xfrm>
-          <a:off x="6172200" y="2395728"/>
-          <a:ext cx="2743200" cy="2651760"/>
+          <a:off x="3611880" y="2395728"/>
+          <a:ext cx="4937760" cy="2386584"/>
         </p:xfrm>
         <a:graphic>
           <a:graphicData uri="http://schemas.openxmlformats.org/drawingml/2006/table">
             <a:tbl>
               <a:tblPr/>
               <a:tblGrid>
-                <a:gridCol w="1143000"/>
-                <a:gridCol w="566928"/>
-                <a:gridCol w="347472"/>
-                <a:gridCol w="384048"/>
-                <a:gridCol w="301752"/>
+                <a:gridCol w="2057400"/>
+                <a:gridCol w="1020470"/>
+                <a:gridCol w="625450"/>
+                <a:gridCol w="691286"/>
+                <a:gridCol w="543154"/>
               </a:tblGrid>
-              <a:tr h="378823">
+              <a:tr h="340941">
                 <a:tc>
                   <a:txBody>
                     <a:bodyPr/>
                     <a:lstStyle/>
                     <a:p>
-                      <a:pPr indent="0" marL="0">
+                      <a:pPr algn="l" indent="0" marL="0">
                         <a:buNone/>
                       </a:pPr>
                       <a:r>
-                        <a:rPr lang="en-US" sz="1200" b="1" dirty="0">
+                        <a:rPr lang="en-US" sz="900" b="1" dirty="0">
                           <a:solidFill>
                             <a:srgbClr val="FFFFFF"/>
                           </a:solidFill>
                         </a:rPr>
                         <a:t>Initiative</a:t>
                       </a:r>
-                      <a:endParaRPr lang="en-US" sz="1200" dirty="0"/>
+                      <a:endParaRPr lang="en-US" sz="900" dirty="0"/>
                     </a:p>
                   </a:txBody>
                   <a:tcPr marL="91440" marR="91440" marT="45720" marB="45720">
@@ -5940,14 +5281,14 @@
                         <a:buNone/>
                       </a:pPr>
                       <a:r>
-                        <a:rPr lang="en-US" sz="1200" b="1" dirty="0">
+                        <a:rPr lang="en-US" sz="900" b="1" dirty="0">
                           <a:solidFill>
                             <a:srgbClr val="FFFFFF"/>
                           </a:solidFill>
                         </a:rPr>
                         <a:t>Effort (H)</a:t>
                       </a:r>
-                      <a:endParaRPr lang="en-US" sz="1200" dirty="0"/>
+                      <a:endParaRPr lang="en-US" sz="900" dirty="0"/>
                     </a:p>
                   </a:txBody>
                   <a:tcPr marL="91440" marR="91440" marT="45720" marB="45720">
@@ -6001,14 +5342,14 @@
                         <a:buNone/>
                       </a:pPr>
                       <a:r>
-                        <a:rPr lang="en-US" sz="1200" b="1" dirty="0">
+                        <a:rPr lang="en-US" sz="900" b="1" dirty="0">
                           <a:solidFill>
                             <a:srgbClr val="FFFFFF"/>
                           </a:solidFill>
                         </a:rPr>
                         <a:t>Feats</a:t>
                       </a:r>
-                      <a:endParaRPr lang="en-US" sz="1200" dirty="0"/>
+                      <a:endParaRPr lang="en-US" sz="900" dirty="0"/>
                     </a:p>
                   </a:txBody>
                   <a:tcPr marL="91440" marR="91440" marT="45720" marB="45720">
@@ -6062,14 +5403,14 @@
                         <a:buNone/>
                       </a:pPr>
                       <a:r>
-                        <a:rPr lang="en-US" sz="1200" b="1" dirty="0">
+                        <a:rPr lang="en-US" sz="900" b="1" dirty="0">
                           <a:solidFill>
                             <a:srgbClr val="FFFFFF"/>
                           </a:solidFill>
                         </a:rPr>
                         <a:t>PI</a:t>
                       </a:r>
-                      <a:endParaRPr lang="en-US" sz="1200" dirty="0"/>
+                      <a:endParaRPr lang="en-US" sz="900" dirty="0"/>
                     </a:p>
                   </a:txBody>
                   <a:tcPr marL="91440" marR="91440" marT="45720" marB="45720">
@@ -6123,14 +5464,14 @@
                         <a:buNone/>
                       </a:pPr>
                       <a:r>
-                        <a:rPr lang="en-US" sz="1200" b="1" dirty="0">
+                        <a:rPr lang="en-US" sz="900" b="1" dirty="0">
                           <a:solidFill>
                             <a:srgbClr val="FFFFFF"/>
                           </a:solidFill>
                         </a:rPr>
                         <a:t>Prio</a:t>
                       </a:r>
-                      <a:endParaRPr lang="en-US" sz="1200" dirty="0"/>
+                      <a:endParaRPr lang="en-US" sz="900" dirty="0"/>
                     </a:p>
                   </a:txBody>
                   <a:tcPr marL="91440" marR="91440" marT="45720" marB="45720">
@@ -6176,24 +5517,24 @@
                   </a:tcPr>
                 </a:tc>
               </a:tr>
-              <a:tr h="378823">
+              <a:tr h="340941">
                 <a:tc>
                   <a:txBody>
                     <a:bodyPr/>
                     <a:lstStyle/>
                     <a:p>
-                      <a:pPr indent="0" marL="0">
+                      <a:pPr algn="l" indent="0" marL="0">
                         <a:buNone/>
                       </a:pPr>
                       <a:r>
-                        <a:rPr lang="en-US" sz="1200" dirty="0">
+                        <a:rPr lang="en-US" sz="900" dirty="0">
                           <a:solidFill>
                             <a:srgbClr val="000000"/>
                           </a:solidFill>
                         </a:rPr>
                         <a:t>Registration</a:t>
                       </a:r>
-                      <a:endParaRPr lang="en-US" sz="1200" dirty="0"/>
+                      <a:endParaRPr lang="en-US" sz="900" dirty="0"/>
                     </a:p>
                   </a:txBody>
                   <a:tcPr marL="91440" marR="91440" marT="45720" marB="45720">
@@ -6244,14 +5585,14 @@
                         <a:buNone/>
                       </a:pPr>
                       <a:r>
-                        <a:rPr lang="en-US" sz="1200" dirty="0">
+                        <a:rPr lang="en-US" sz="900" dirty="0">
                           <a:solidFill>
                             <a:srgbClr val="000000"/>
                           </a:solidFill>
                         </a:rPr>
                         <a:t>11,866</a:t>
                       </a:r>
-                      <a:endParaRPr lang="en-US" sz="1200" dirty="0"/>
+                      <a:endParaRPr lang="en-US" sz="900" dirty="0"/>
                     </a:p>
                   </a:txBody>
                   <a:tcPr marL="91440" marR="91440" marT="45720" marB="45720">
@@ -6302,14 +5643,14 @@
                         <a:buNone/>
                       </a:pPr>
                       <a:r>
-                        <a:rPr lang="en-US" sz="1200" dirty="0">
+                        <a:rPr lang="en-US" sz="900" dirty="0">
                           <a:solidFill>
                             <a:srgbClr val="000000"/>
                           </a:solidFill>
                         </a:rPr>
                         <a:t>6</a:t>
                       </a:r>
-                      <a:endParaRPr lang="en-US" sz="1200" dirty="0"/>
+                      <a:endParaRPr lang="en-US" sz="900" dirty="0"/>
                     </a:p>
                   </a:txBody>
                   <a:tcPr marL="91440" marR="91440" marT="45720" marB="45720">
@@ -6360,14 +5701,14 @@
                         <a:buNone/>
                       </a:pPr>
                       <a:r>
-                        <a:rPr lang="en-US" sz="1200" dirty="0">
+                        <a:rPr lang="en-US" sz="900" dirty="0">
                           <a:solidFill>
                             <a:srgbClr val="000000"/>
                           </a:solidFill>
                         </a:rPr>
                         <a:t>PI27-29</a:t>
                       </a:r>
-                      <a:endParaRPr lang="en-US" sz="1200" dirty="0"/>
+                      <a:endParaRPr lang="en-US" sz="900" dirty="0"/>
                     </a:p>
                   </a:txBody>
                   <a:tcPr marL="91440" marR="91440" marT="45720" marB="45720">
@@ -6418,14 +5759,14 @@
                         <a:buNone/>
                       </a:pPr>
                       <a:r>
-                        <a:rPr lang="en-US" sz="1200" dirty="0">
+                        <a:rPr lang="en-US" sz="900" dirty="0">
                           <a:solidFill>
                             <a:srgbClr val="000000"/>
                           </a:solidFill>
                         </a:rPr>
                         <a:t>P1</a:t>
                       </a:r>
-                      <a:endParaRPr lang="en-US" sz="1200" dirty="0"/>
+                      <a:endParaRPr lang="en-US" sz="900" dirty="0"/>
                     </a:p>
                   </a:txBody>
                   <a:tcPr marL="91440" marR="91440" marT="45720" marB="45720">
@@ -6468,24 +5809,24 @@
                   </a:tcPr>
                 </a:tc>
               </a:tr>
-              <a:tr h="378823">
+              <a:tr h="340941">
                 <a:tc>
                   <a:txBody>
                     <a:bodyPr/>
                     <a:lstStyle/>
                     <a:p>
-                      <a:pPr indent="0" marL="0">
+                      <a:pPr algn="l" indent="0" marL="0">
                         <a:buNone/>
                       </a:pPr>
                       <a:r>
-                        <a:rPr lang="en-US" sz="1200" dirty="0">
+                        <a:rPr lang="en-US" sz="900" dirty="0">
                           <a:solidFill>
                             <a:srgbClr val="000000"/>
                           </a:solidFill>
                         </a:rPr>
                         <a:t>Taxpayer Accounting</a:t>
                       </a:r>
-                      <a:endParaRPr lang="en-US" sz="1200" dirty="0"/>
+                      <a:endParaRPr lang="en-US" sz="900" dirty="0"/>
                     </a:p>
                   </a:txBody>
                   <a:tcPr marL="91440" marR="91440" marT="45720" marB="45720">
@@ -6536,14 +5877,14 @@
                         <a:buNone/>
                       </a:pPr>
                       <a:r>
-                        <a:rPr lang="en-US" sz="1200" dirty="0">
+                        <a:rPr lang="en-US" sz="900" dirty="0">
                           <a:solidFill>
                             <a:srgbClr val="000000"/>
                           </a:solidFill>
                         </a:rPr>
                         <a:t>8,064</a:t>
                       </a:r>
-                      <a:endParaRPr lang="en-US" sz="1200" dirty="0"/>
+                      <a:endParaRPr lang="en-US" sz="900" dirty="0"/>
                     </a:p>
                   </a:txBody>
                   <a:tcPr marL="91440" marR="91440" marT="45720" marB="45720">
@@ -6594,14 +5935,14 @@
                         <a:buNone/>
                       </a:pPr>
                       <a:r>
-                        <a:rPr lang="en-US" sz="1200" dirty="0">
+                        <a:rPr lang="en-US" sz="900" dirty="0">
                           <a:solidFill>
                             <a:srgbClr val="000000"/>
                           </a:solidFill>
                         </a:rPr>
                         <a:t>4</a:t>
                       </a:r>
-                      <a:endParaRPr lang="en-US" sz="1200" dirty="0"/>
+                      <a:endParaRPr lang="en-US" sz="900" dirty="0"/>
                     </a:p>
                   </a:txBody>
                   <a:tcPr marL="91440" marR="91440" marT="45720" marB="45720">
@@ -6652,14 +5993,14 @@
                         <a:buNone/>
                       </a:pPr>
                       <a:r>
-                        <a:rPr lang="en-US" sz="1200" dirty="0">
+                        <a:rPr lang="en-US" sz="900" dirty="0">
                           <a:solidFill>
                             <a:srgbClr val="000000"/>
                           </a:solidFill>
                         </a:rPr>
                         <a:t>PI28-29</a:t>
                       </a:r>
-                      <a:endParaRPr lang="en-US" sz="1200" dirty="0"/>
+                      <a:endParaRPr lang="en-US" sz="900" dirty="0"/>
                     </a:p>
                   </a:txBody>
                   <a:tcPr marL="91440" marR="91440" marT="45720" marB="45720">
@@ -6710,14 +6051,14 @@
                         <a:buNone/>
                       </a:pPr>
                       <a:r>
-                        <a:rPr lang="en-US" sz="1200" dirty="0">
+                        <a:rPr lang="en-US" sz="900" dirty="0">
                           <a:solidFill>
                             <a:srgbClr val="000000"/>
                           </a:solidFill>
                         </a:rPr>
                         <a:t>P1</a:t>
                       </a:r>
-                      <a:endParaRPr lang="en-US" sz="1200" dirty="0"/>
+                      <a:endParaRPr lang="en-US" sz="900" dirty="0"/>
                     </a:p>
                   </a:txBody>
                   <a:tcPr marL="91440" marR="91440" marT="45720" marB="45720">
@@ -6760,24 +6101,24 @@
                   </a:tcPr>
                 </a:tc>
               </a:tr>
-              <a:tr h="378823">
+              <a:tr h="340941">
                 <a:tc>
                   <a:txBody>
                     <a:bodyPr/>
                     <a:lstStyle/>
                     <a:p>
-                      <a:pPr indent="0" marL="0">
+                      <a:pPr algn="l" indent="0" marL="0">
                         <a:buNone/>
                       </a:pPr>
                       <a:r>
-                        <a:rPr lang="en-US" sz="1200" dirty="0">
+                        <a:rPr lang="en-US" sz="900" dirty="0">
                           <a:solidFill>
                             <a:srgbClr val="000000"/>
                           </a:solidFill>
                         </a:rPr>
                         <a:t>Billing &amp; Assessments</a:t>
                       </a:r>
-                      <a:endParaRPr lang="en-US" sz="1200" dirty="0"/>
+                      <a:endParaRPr lang="en-US" sz="900" dirty="0"/>
                     </a:p>
                   </a:txBody>
                   <a:tcPr marL="91440" marR="91440" marT="45720" marB="45720">
@@ -6828,14 +6169,14 @@
                         <a:buNone/>
                       </a:pPr>
                       <a:r>
-                        <a:rPr lang="en-US" sz="1200" dirty="0">
+                        <a:rPr lang="en-US" sz="900" dirty="0">
                           <a:solidFill>
                             <a:srgbClr val="000000"/>
                           </a:solidFill>
                         </a:rPr>
                         <a:t>2,880</a:t>
                       </a:r>
-                      <a:endParaRPr lang="en-US" sz="1200" dirty="0"/>
+                      <a:endParaRPr lang="en-US" sz="900" dirty="0"/>
                     </a:p>
                   </a:txBody>
                   <a:tcPr marL="91440" marR="91440" marT="45720" marB="45720">
@@ -6886,14 +6227,14 @@
                         <a:buNone/>
                       </a:pPr>
                       <a:r>
-                        <a:rPr lang="en-US" sz="1200" dirty="0">
+                        <a:rPr lang="en-US" sz="900" dirty="0">
                           <a:solidFill>
                             <a:srgbClr val="000000"/>
                           </a:solidFill>
                         </a:rPr>
                         <a:t>3</a:t>
                       </a:r>
-                      <a:endParaRPr lang="en-US" sz="1200" dirty="0"/>
+                      <a:endParaRPr lang="en-US" sz="900" dirty="0"/>
                     </a:p>
                   </a:txBody>
                   <a:tcPr marL="91440" marR="91440" marT="45720" marB="45720">
@@ -6944,14 +6285,14 @@
                         <a:buNone/>
                       </a:pPr>
                       <a:r>
-                        <a:rPr lang="en-US" sz="1200" dirty="0">
+                        <a:rPr lang="en-US" sz="900" dirty="0">
                           <a:solidFill>
                             <a:srgbClr val="000000"/>
                           </a:solidFill>
                         </a:rPr>
                         <a:t>PI28-29</a:t>
                       </a:r>
-                      <a:endParaRPr lang="en-US" sz="1200" dirty="0"/>
+                      <a:endParaRPr lang="en-US" sz="900" dirty="0"/>
                     </a:p>
                   </a:txBody>
                   <a:tcPr marL="91440" marR="91440" marT="45720" marB="45720">
@@ -7002,14 +6343,14 @@
                         <a:buNone/>
                       </a:pPr>
                       <a:r>
-                        <a:rPr lang="en-US" sz="1200" dirty="0">
+                        <a:rPr lang="en-US" sz="900" dirty="0">
                           <a:solidFill>
                             <a:srgbClr val="000000"/>
                           </a:solidFill>
                         </a:rPr>
                         <a:t>P1-2</a:t>
                       </a:r>
-                      <a:endParaRPr lang="en-US" sz="1200" dirty="0"/>
+                      <a:endParaRPr lang="en-US" sz="900" dirty="0"/>
                     </a:p>
                   </a:txBody>
                   <a:tcPr marL="91440" marR="91440" marT="45720" marB="45720">
@@ -7052,24 +6393,24 @@
                   </a:tcPr>
                 </a:tc>
               </a:tr>
-              <a:tr h="378823">
+              <a:tr h="340941">
                 <a:tc>
                   <a:txBody>
                     <a:bodyPr/>
                     <a:lstStyle/>
                     <a:p>
-                      <a:pPr indent="0" marL="0">
+                      <a:pPr algn="l" indent="0" marL="0">
                         <a:buNone/>
                       </a:pPr>
                       <a:r>
-                        <a:rPr lang="en-US" sz="1200" dirty="0">
+                        <a:rPr lang="en-US" sz="900" dirty="0">
                           <a:solidFill>
                             <a:srgbClr val="000000"/>
                           </a:solidFill>
                         </a:rPr>
                         <a:t>Exemptions</a:t>
                       </a:r>
-                      <a:endParaRPr lang="en-US" sz="1200" dirty="0"/>
+                      <a:endParaRPr lang="en-US" sz="900" dirty="0"/>
                     </a:p>
                   </a:txBody>
                   <a:tcPr marL="91440" marR="91440" marT="45720" marB="45720">
@@ -7120,14 +6461,14 @@
                         <a:buNone/>
                       </a:pPr>
                       <a:r>
-                        <a:rPr lang="en-US" sz="1200" dirty="0">
+                        <a:rPr lang="en-US" sz="900" dirty="0">
                           <a:solidFill>
                             <a:srgbClr val="000000"/>
                           </a:solidFill>
                         </a:rPr>
                         <a:t>390</a:t>
                       </a:r>
-                      <a:endParaRPr lang="en-US" sz="1200" dirty="0"/>
+                      <a:endParaRPr lang="en-US" sz="900" dirty="0"/>
                     </a:p>
                   </a:txBody>
                   <a:tcPr marL="91440" marR="91440" marT="45720" marB="45720">
@@ -7178,14 +6519,14 @@
                         <a:buNone/>
                       </a:pPr>
                       <a:r>
-                        <a:rPr lang="en-US" sz="1200" dirty="0">
+                        <a:rPr lang="en-US" sz="900" dirty="0">
                           <a:solidFill>
                             <a:srgbClr val="000000"/>
                           </a:solidFill>
                         </a:rPr>
                         <a:t>1</a:t>
                       </a:r>
-                      <a:endParaRPr lang="en-US" sz="1200" dirty="0"/>
+                      <a:endParaRPr lang="en-US" sz="900" dirty="0"/>
                     </a:p>
                   </a:txBody>
                   <a:tcPr marL="91440" marR="91440" marT="45720" marB="45720">
@@ -7236,14 +6577,14 @@
                         <a:buNone/>
                       </a:pPr>
                       <a:r>
-                        <a:rPr lang="en-US" sz="1200" dirty="0">
+                        <a:rPr lang="en-US" sz="900" dirty="0">
                           <a:solidFill>
                             <a:srgbClr val="000000"/>
                           </a:solidFill>
                         </a:rPr>
                         <a:t>PI28</a:t>
                       </a:r>
-                      <a:endParaRPr lang="en-US" sz="1200" dirty="0"/>
+                      <a:endParaRPr lang="en-US" sz="900" dirty="0"/>
                     </a:p>
                   </a:txBody>
                   <a:tcPr marL="91440" marR="91440" marT="45720" marB="45720">
@@ -7294,14 +6635,14 @@
                         <a:buNone/>
                       </a:pPr>
                       <a:r>
-                        <a:rPr lang="en-US" sz="1200" dirty="0">
+                        <a:rPr lang="en-US" sz="900" dirty="0">
                           <a:solidFill>
                             <a:srgbClr val="000000"/>
                           </a:solidFill>
                         </a:rPr>
                         <a:t>P2</a:t>
                       </a:r>
-                      <a:endParaRPr lang="en-US" sz="1200" dirty="0"/>
+                      <a:endParaRPr lang="en-US" sz="900" dirty="0"/>
                     </a:p>
                   </a:txBody>
                   <a:tcPr marL="91440" marR="91440" marT="45720" marB="45720">
@@ -7344,24 +6685,24 @@
                   </a:tcPr>
                 </a:tc>
               </a:tr>
-              <a:tr h="378823">
+              <a:tr h="340941">
                 <a:tc>
                   <a:txBody>
                     <a:bodyPr/>
                     <a:lstStyle/>
                     <a:p>
-                      <a:pPr indent="0" marL="0">
+                      <a:pPr algn="l" indent="0" marL="0">
                         <a:buNone/>
                       </a:pPr>
                       <a:r>
-                        <a:rPr lang="en-US" sz="1200" dirty="0">
+                        <a:rPr lang="en-US" sz="900" dirty="0">
                           <a:solidFill>
                             <a:srgbClr val="000000"/>
                           </a:solidFill>
                         </a:rPr>
                         <a:t>Penalty &amp; Interest</a:t>
                       </a:r>
-                      <a:endParaRPr lang="en-US" sz="1200" dirty="0"/>
+                      <a:endParaRPr lang="en-US" sz="900" dirty="0"/>
                     </a:p>
                   </a:txBody>
                   <a:tcPr marL="91440" marR="91440" marT="45720" marB="45720">
@@ -7412,14 +6753,14 @@
                         <a:buNone/>
                       </a:pPr>
                       <a:r>
-                        <a:rPr lang="en-US" sz="1200" dirty="0">
+                        <a:rPr lang="en-US" sz="900" dirty="0">
                           <a:solidFill>
                             <a:srgbClr val="000000"/>
                           </a:solidFill>
                         </a:rPr>
                         <a:t>TBD</a:t>
                       </a:r>
-                      <a:endParaRPr lang="en-US" sz="1200" dirty="0"/>
+                      <a:endParaRPr lang="en-US" sz="900" dirty="0"/>
                     </a:p>
                   </a:txBody>
                   <a:tcPr marL="91440" marR="91440" marT="45720" marB="45720">
@@ -7470,14 +6811,14 @@
                         <a:buNone/>
                       </a:pPr>
                       <a:r>
-                        <a:rPr lang="en-US" sz="1200" dirty="0">
+                        <a:rPr lang="en-US" sz="900" dirty="0">
                           <a:solidFill>
                             <a:srgbClr val="000000"/>
                           </a:solidFill>
                         </a:rPr>
                         <a:t>1</a:t>
                       </a:r>
-                      <a:endParaRPr lang="en-US" sz="1200" dirty="0"/>
+                      <a:endParaRPr lang="en-US" sz="900" dirty="0"/>
                     </a:p>
                   </a:txBody>
                   <a:tcPr marL="91440" marR="91440" marT="45720" marB="45720">
@@ -7528,14 +6869,14 @@
                         <a:buNone/>
                       </a:pPr>
                       <a:r>
-                        <a:rPr lang="en-US" sz="1200" dirty="0">
+                        <a:rPr lang="en-US" sz="900" dirty="0">
                           <a:solidFill>
                             <a:srgbClr val="000000"/>
                           </a:solidFill>
                         </a:rPr>
                         <a:t>PI28-29</a:t>
                       </a:r>
-                      <a:endParaRPr lang="en-US" sz="1200" dirty="0"/>
+                      <a:endParaRPr lang="en-US" sz="900" dirty="0"/>
                     </a:p>
                   </a:txBody>
                   <a:tcPr marL="91440" marR="91440" marT="45720" marB="45720">
@@ -7586,14 +6927,14 @@
                         <a:buNone/>
                       </a:pPr>
                       <a:r>
-                        <a:rPr lang="en-US" sz="1200" dirty="0">
+                        <a:rPr lang="en-US" sz="900" dirty="0">
                           <a:solidFill>
                             <a:srgbClr val="000000"/>
                           </a:solidFill>
                         </a:rPr>
                         <a:t>P2</a:t>
                       </a:r>
-                      <a:endParaRPr lang="en-US" sz="1200" dirty="0"/>
+                      <a:endParaRPr lang="en-US" sz="900" dirty="0"/>
                     </a:p>
                   </a:txBody>
                   <a:tcPr marL="91440" marR="91440" marT="45720" marB="45720">
@@ -7636,24 +6977,24 @@
                   </a:tcPr>
                 </a:tc>
               </a:tr>
-              <a:tr h="378823">
+              <a:tr h="340941">
                 <a:tc>
                   <a:txBody>
                     <a:bodyPr/>
                     <a:lstStyle/>
                     <a:p>
-                      <a:pPr indent="0" marL="0">
+                      <a:pPr algn="l" indent="0" marL="0">
                         <a:buNone/>
                       </a:pPr>
                       <a:r>
-                        <a:rPr lang="en-US" sz="1200" dirty="0">
+                        <a:rPr lang="en-US" sz="900" dirty="0">
                           <a:solidFill>
                             <a:srgbClr val="000000"/>
                           </a:solidFill>
                         </a:rPr>
                         <a:t>Tax Accounts</a:t>
                       </a:r>
-                      <a:endParaRPr lang="en-US" sz="1200" dirty="0"/>
+                      <a:endParaRPr lang="en-US" sz="900" dirty="0"/>
                     </a:p>
                   </a:txBody>
                   <a:tcPr marL="91440" marR="91440" marT="45720" marB="45720">
@@ -7704,14 +7045,14 @@
                         <a:buNone/>
                       </a:pPr>
                       <a:r>
-                        <a:rPr lang="en-US" sz="1200" dirty="0">
+                        <a:rPr lang="en-US" sz="900" dirty="0">
                           <a:solidFill>
                             <a:srgbClr val="000000"/>
                           </a:solidFill>
                         </a:rPr>
                         <a:t>TBD</a:t>
                       </a:r>
-                      <a:endParaRPr lang="en-US" sz="1200" dirty="0"/>
+                      <a:endParaRPr lang="en-US" sz="900" dirty="0"/>
                     </a:p>
                   </a:txBody>
                   <a:tcPr marL="91440" marR="91440" marT="45720" marB="45720">
@@ -7762,14 +7103,14 @@
                         <a:buNone/>
                       </a:pPr>
                       <a:r>
-                        <a:rPr lang="en-US" sz="1200" dirty="0">
+                        <a:rPr lang="en-US" sz="900" dirty="0">
                           <a:solidFill>
                             <a:srgbClr val="000000"/>
                           </a:solidFill>
                         </a:rPr>
                         <a:t>1</a:t>
                       </a:r>
-                      <a:endParaRPr lang="en-US" sz="1200" dirty="0"/>
+                      <a:endParaRPr lang="en-US" sz="900" dirty="0"/>
                     </a:p>
                   </a:txBody>
                   <a:tcPr marL="91440" marR="91440" marT="45720" marB="45720">
@@ -7820,14 +7161,14 @@
                         <a:buNone/>
                       </a:pPr>
                       <a:r>
-                        <a:rPr lang="en-US" sz="1200" dirty="0">
+                        <a:rPr lang="en-US" sz="900" dirty="0">
                           <a:solidFill>
                             <a:srgbClr val="000000"/>
                           </a:solidFill>
                         </a:rPr>
                         <a:t>PI28-29</a:t>
                       </a:r>
-                      <a:endParaRPr lang="en-US" sz="1200" dirty="0"/>
+                      <a:endParaRPr lang="en-US" sz="900" dirty="0"/>
                     </a:p>
                   </a:txBody>
                   <a:tcPr marL="91440" marR="91440" marT="45720" marB="45720">
@@ -7878,14 +7219,14 @@
                         <a:buNone/>
                       </a:pPr>
                       <a:r>
-                        <a:rPr lang="en-US" sz="1200" dirty="0">
+                        <a:rPr lang="en-US" sz="900" dirty="0">
                           <a:solidFill>
                             <a:srgbClr val="000000"/>
                           </a:solidFill>
                         </a:rPr>
                         <a:t>P1</a:t>
                       </a:r>
-                      <a:endParaRPr lang="en-US" sz="1200" dirty="0"/>
+                      <a:endParaRPr lang="en-US" sz="900" dirty="0"/>
                     </a:p>
                   </a:txBody>
                   <a:tcPr marL="91440" marR="91440" marT="45720" marB="45720">
@@ -7932,6 +7273,104 @@
           </a:graphicData>
         </a:graphic>
       </p:graphicFrame>
+      <p:sp>
+        <p:nvSpPr>
+          <p:cNvPr id="33" name="Shape 30"/>
+          <p:cNvSpPr/>
+          <p:nvPr/>
+        </p:nvSpPr>
+        <p:spPr>
+          <a:xfrm>
+            <a:off x="0" y="4983480"/>
+            <a:ext cx="9144000" cy="160020"/>
+          </a:xfrm>
+          <a:prstGeom prst="rect">
+            <a:avLst/>
+          </a:prstGeom>
+          <a:solidFill>
+            <a:srgbClr val="123836"/>
+          </a:solidFill>
+          <a:ln/>
+        </p:spPr>
+      </p:sp>
+      <p:sp>
+        <p:nvSpPr>
+          <p:cNvPr id="34" name="Text 31"/>
+          <p:cNvSpPr/>
+          <p:nvPr/>
+        </p:nvSpPr>
+        <p:spPr>
+          <a:xfrm>
+            <a:off x="137160" y="4974336"/>
+            <a:ext cx="6400800" cy="164592"/>
+          </a:xfrm>
+          <a:prstGeom prst="rect">
+            <a:avLst/>
+          </a:prstGeom>
+          <a:noFill/>
+          <a:ln/>
+        </p:spPr>
+        <p:txBody>
+          <a:bodyPr wrap="square" rtlCol="0" anchor="ctr"/>
+          <a:lstStyle/>
+          <a:p>
+            <a:pPr indent="0" marL="0">
+              <a:buNone/>
+            </a:pPr>
+            <a:r>
+              <a:rPr lang="en-US" sz="800" dirty="0">
+                <a:solidFill>
+                  <a:srgbClr val="D0D7D7"/>
+                </a:solidFill>
+                <a:latin typeface="Calibri" pitchFamily="34" charset="0"/>
+                <a:ea typeface="Calibri" pitchFamily="34" charset="-122"/>
+                <a:cs typeface="Calibri" pitchFamily="34" charset="-120"/>
+              </a:rPr>
+              <a:t>Solon Tax Product Roadmap 2026 | SteerCo</a:t>
+            </a:r>
+            <a:endParaRPr lang="en-US" sz="800" dirty="0"/>
+          </a:p>
+        </p:txBody>
+      </p:sp>
+      <p:sp>
+        <p:nvSpPr>
+          <p:cNvPr id="35" name="Text 32"/>
+          <p:cNvSpPr/>
+          <p:nvPr/>
+        </p:nvSpPr>
+        <p:spPr>
+          <a:xfrm>
+            <a:off x="8686800" y="4974336"/>
+            <a:ext cx="365760" cy="164592"/>
+          </a:xfrm>
+          <a:prstGeom prst="rect">
+            <a:avLst/>
+          </a:prstGeom>
+          <a:noFill/>
+          <a:ln/>
+        </p:spPr>
+        <p:txBody>
+          <a:bodyPr wrap="square" rtlCol="0" anchor="ctr"/>
+          <a:lstStyle/>
+          <a:p>
+            <a:pPr algn="r" indent="0" marL="0">
+              <a:buNone/>
+            </a:pPr>
+            <a:r>
+              <a:rPr lang="en-US" sz="800" dirty="0">
+                <a:solidFill>
+                  <a:srgbClr val="D0D7D7"/>
+                </a:solidFill>
+                <a:latin typeface="Calibri" pitchFamily="34" charset="0"/>
+                <a:ea typeface="Calibri" pitchFamily="34" charset="-122"/>
+                <a:cs typeface="Calibri" pitchFamily="34" charset="-120"/>
+              </a:rPr>
+              <a:t>3</a:t>
+            </a:r>
+            <a:endParaRPr lang="en-US" sz="800" dirty="0"/>
+          </a:p>
+        </p:txBody>
+      </p:sp>
     </p:spTree>
   </p:cSld>
   <p:clrMapOvr>
@@ -8129,104 +7568,6 @@
         </p:nvSpPr>
         <p:spPr>
           <a:xfrm>
-            <a:off x="0" y="4983480"/>
-            <a:ext cx="9144000" cy="160020"/>
-          </a:xfrm>
-          <a:prstGeom prst="rect">
-            <a:avLst/>
-          </a:prstGeom>
-          <a:solidFill>
-            <a:srgbClr val="123836"/>
-          </a:solidFill>
-          <a:ln/>
-        </p:spPr>
-      </p:sp>
-      <p:sp>
-        <p:nvSpPr>
-          <p:cNvPr id="8" name="Text 6"/>
-          <p:cNvSpPr/>
-          <p:nvPr/>
-        </p:nvSpPr>
-        <p:spPr>
-          <a:xfrm>
-            <a:off x="137160" y="4974336"/>
-            <a:ext cx="6400800" cy="164592"/>
-          </a:xfrm>
-          <a:prstGeom prst="rect">
-            <a:avLst/>
-          </a:prstGeom>
-          <a:noFill/>
-          <a:ln/>
-        </p:spPr>
-        <p:txBody>
-          <a:bodyPr wrap="square" rtlCol="0" anchor="ctr"/>
-          <a:lstStyle/>
-          <a:p>
-            <a:pPr indent="0" marL="0">
-              <a:buNone/>
-            </a:pPr>
-            <a:r>
-              <a:rPr lang="en-US" sz="800" dirty="0">
-                <a:solidFill>
-                  <a:srgbClr val="D0D7D7"/>
-                </a:solidFill>
-                <a:latin typeface="Calibri" pitchFamily="34" charset="0"/>
-                <a:ea typeface="Calibri" pitchFamily="34" charset="-122"/>
-                <a:cs typeface="Calibri" pitchFamily="34" charset="-120"/>
-              </a:rPr>
-              <a:t>Solon Tax Product Roadmap 2026 | SteerCo</a:t>
-            </a:r>
-            <a:endParaRPr lang="en-US" sz="800" dirty="0"/>
-          </a:p>
-        </p:txBody>
-      </p:sp>
-      <p:sp>
-        <p:nvSpPr>
-          <p:cNvPr id="9" name="Text 7"/>
-          <p:cNvSpPr/>
-          <p:nvPr/>
-        </p:nvSpPr>
-        <p:spPr>
-          <a:xfrm>
-            <a:off x="8686800" y="4974336"/>
-            <a:ext cx="365760" cy="164592"/>
-          </a:xfrm>
-          <a:prstGeom prst="rect">
-            <a:avLst/>
-          </a:prstGeom>
-          <a:noFill/>
-          <a:ln/>
-        </p:spPr>
-        <p:txBody>
-          <a:bodyPr wrap="square" rtlCol="0" anchor="ctr"/>
-          <a:lstStyle/>
-          <a:p>
-            <a:pPr algn="r" indent="0" marL="0">
-              <a:buNone/>
-            </a:pPr>
-            <a:r>
-              <a:rPr lang="en-US" sz="800" dirty="0">
-                <a:solidFill>
-                  <a:srgbClr val="D0D7D7"/>
-                </a:solidFill>
-                <a:latin typeface="Calibri" pitchFamily="34" charset="0"/>
-                <a:ea typeface="Calibri" pitchFamily="34" charset="-122"/>
-                <a:cs typeface="Calibri" pitchFamily="34" charset="-120"/>
-              </a:rPr>
-              <a:t>4</a:t>
-            </a:r>
-            <a:endParaRPr lang="en-US" sz="800" dirty="0"/>
-          </a:p>
-        </p:txBody>
-      </p:sp>
-      <p:sp>
-        <p:nvSpPr>
-          <p:cNvPr id="10" name="Shape 8"/>
-          <p:cNvSpPr/>
-          <p:nvPr/>
-        </p:nvSpPr>
-        <p:spPr>
-          <a:xfrm>
             <a:off x="228600" y="1005840"/>
             <a:ext cx="2011680" cy="914400"/>
           </a:xfrm>
@@ -8253,14 +7594,14 @@
       </p:sp>
       <p:sp>
         <p:nvSpPr>
-          <p:cNvPr id="11" name="Shape 9"/>
+          <p:cNvPr id="8" name="Shape 6"/>
           <p:cNvSpPr/>
           <p:nvPr/>
         </p:nvSpPr>
         <p:spPr>
           <a:xfrm>
             <a:off x="228600" y="1005840"/>
-            <a:ext cx="2011680" cy="54864"/>
+            <a:ext cx="54864" cy="914400"/>
           </a:xfrm>
           <a:prstGeom prst="rect">
             <a:avLst/>
@@ -8273,7 +7614,7 @@
       </p:sp>
       <p:sp>
         <p:nvSpPr>
-          <p:cNvPr id="12" name="Text 10"/>
+          <p:cNvPr id="9" name="Text 7"/>
           <p:cNvSpPr/>
           <p:nvPr/>
         </p:nvSpPr>
@@ -8312,7 +7653,7 @@
       </p:sp>
       <p:sp>
         <p:nvSpPr>
-          <p:cNvPr id="13" name="Text 11"/>
+          <p:cNvPr id="10" name="Text 8"/>
           <p:cNvSpPr/>
           <p:nvPr/>
         </p:nvSpPr>
@@ -8351,7 +7692,7 @@
       </p:sp>
       <p:sp>
         <p:nvSpPr>
-          <p:cNvPr id="14" name="Text 12"/>
+          <p:cNvPr id="11" name="Text 9"/>
           <p:cNvSpPr/>
           <p:nvPr/>
         </p:nvSpPr>
@@ -8390,7 +7731,7 @@
       </p:sp>
       <p:sp>
         <p:nvSpPr>
-          <p:cNvPr id="15" name="Shape 13"/>
+          <p:cNvPr id="12" name="Shape 10"/>
           <p:cNvSpPr/>
           <p:nvPr/>
         </p:nvSpPr>
@@ -8422,14 +7763,14 @@
       </p:sp>
       <p:sp>
         <p:nvSpPr>
-          <p:cNvPr id="16" name="Shape 14"/>
+          <p:cNvPr id="13" name="Shape 11"/>
           <p:cNvSpPr/>
           <p:nvPr/>
         </p:nvSpPr>
         <p:spPr>
           <a:xfrm>
             <a:off x="2414016" y="1005840"/>
-            <a:ext cx="2011680" cy="54864"/>
+            <a:ext cx="54864" cy="914400"/>
           </a:xfrm>
           <a:prstGeom prst="rect">
             <a:avLst/>
@@ -8442,7 +7783,7 @@
       </p:sp>
       <p:sp>
         <p:nvSpPr>
-          <p:cNvPr id="17" name="Text 15"/>
+          <p:cNvPr id="14" name="Text 12"/>
           <p:cNvSpPr/>
           <p:nvPr/>
         </p:nvSpPr>
@@ -8481,7 +7822,7 @@
       </p:sp>
       <p:sp>
         <p:nvSpPr>
-          <p:cNvPr id="18" name="Text 16"/>
+          <p:cNvPr id="15" name="Text 13"/>
           <p:cNvSpPr/>
           <p:nvPr/>
         </p:nvSpPr>
@@ -8520,7 +7861,7 @@
       </p:sp>
       <p:sp>
         <p:nvSpPr>
-          <p:cNvPr id="19" name="Text 17"/>
+          <p:cNvPr id="16" name="Text 14"/>
           <p:cNvSpPr/>
           <p:nvPr/>
         </p:nvSpPr>
@@ -8559,7 +7900,7 @@
       </p:sp>
       <p:sp>
         <p:nvSpPr>
-          <p:cNvPr id="20" name="Shape 18"/>
+          <p:cNvPr id="17" name="Shape 15"/>
           <p:cNvSpPr/>
           <p:nvPr/>
         </p:nvSpPr>
@@ -8591,14 +7932,14 @@
       </p:sp>
       <p:sp>
         <p:nvSpPr>
-          <p:cNvPr id="21" name="Shape 19"/>
+          <p:cNvPr id="18" name="Shape 16"/>
           <p:cNvSpPr/>
           <p:nvPr/>
         </p:nvSpPr>
         <p:spPr>
           <a:xfrm>
             <a:off x="4599432" y="1005840"/>
-            <a:ext cx="2011680" cy="54864"/>
+            <a:ext cx="54864" cy="914400"/>
           </a:xfrm>
           <a:prstGeom prst="rect">
             <a:avLst/>
@@ -8611,7 +7952,7 @@
       </p:sp>
       <p:sp>
         <p:nvSpPr>
-          <p:cNvPr id="22" name="Text 20"/>
+          <p:cNvPr id="19" name="Text 17"/>
           <p:cNvSpPr/>
           <p:nvPr/>
         </p:nvSpPr>
@@ -8650,7 +7991,7 @@
       </p:sp>
       <p:sp>
         <p:nvSpPr>
-          <p:cNvPr id="23" name="Text 21"/>
+          <p:cNvPr id="20" name="Text 18"/>
           <p:cNvSpPr/>
           <p:nvPr/>
         </p:nvSpPr>
@@ -8689,7 +8030,7 @@
       </p:sp>
       <p:sp>
         <p:nvSpPr>
-          <p:cNvPr id="24" name="Text 22"/>
+          <p:cNvPr id="21" name="Text 19"/>
           <p:cNvSpPr/>
           <p:nvPr/>
         </p:nvSpPr>
@@ -8728,7 +8069,7 @@
       </p:sp>
       <p:sp>
         <p:nvSpPr>
-          <p:cNvPr id="25" name="Shape 23"/>
+          <p:cNvPr id="22" name="Shape 20"/>
           <p:cNvSpPr/>
           <p:nvPr/>
         </p:nvSpPr>
@@ -8760,14 +8101,14 @@
       </p:sp>
       <p:sp>
         <p:nvSpPr>
-          <p:cNvPr id="26" name="Shape 24"/>
+          <p:cNvPr id="23" name="Shape 21"/>
           <p:cNvSpPr/>
           <p:nvPr/>
         </p:nvSpPr>
         <p:spPr>
           <a:xfrm>
             <a:off x="6784848" y="1005840"/>
-            <a:ext cx="2011680" cy="54864"/>
+            <a:ext cx="54864" cy="914400"/>
           </a:xfrm>
           <a:prstGeom prst="rect">
             <a:avLst/>
@@ -8780,7 +8121,7 @@
       </p:sp>
       <p:sp>
         <p:nvSpPr>
-          <p:cNvPr id="27" name="Text 25"/>
+          <p:cNvPr id="24" name="Text 22"/>
           <p:cNvSpPr/>
           <p:nvPr/>
         </p:nvSpPr>
@@ -8819,7 +8160,7 @@
       </p:sp>
       <p:sp>
         <p:nvSpPr>
-          <p:cNvPr id="28" name="Text 26"/>
+          <p:cNvPr id="25" name="Text 23"/>
           <p:cNvSpPr/>
           <p:nvPr/>
         </p:nvSpPr>
@@ -8858,7 +8199,7 @@
       </p:sp>
       <p:sp>
         <p:nvSpPr>
-          <p:cNvPr id="29" name="Text 27"/>
+          <p:cNvPr id="26" name="Text 24"/>
           <p:cNvSpPr/>
           <p:nvPr/>
         </p:nvSpPr>
@@ -8897,7 +8238,7 @@
       </p:sp>
       <p:sp>
         <p:nvSpPr>
-          <p:cNvPr id="30" name="Text 28"/>
+          <p:cNvPr id="27" name="Text 25"/>
           <p:cNvSpPr/>
           <p:nvPr/>
         </p:nvSpPr>
@@ -8924,6 +8265,9 @@
                 <a:solidFill>
                   <a:srgbClr val="FF6359"/>
                 </a:solidFill>
+                <a:latin typeface="Calibri" pitchFamily="34" charset="0"/>
+                <a:ea typeface="Calibri" pitchFamily="34" charset="-122"/>
+                <a:cs typeface="Calibri" pitchFamily="34" charset="-120"/>
               </a:rPr>
               <a:t>Business Scope</a:t>
             </a:r>
@@ -8933,7 +8277,7 @@
       </p:sp>
       <p:sp>
         <p:nvSpPr>
-          <p:cNvPr id="31" name="Text 29"/>
+          <p:cNvPr id="28" name="Text 26"/>
           <p:cNvSpPr/>
           <p:nvPr/>
         </p:nvSpPr>
@@ -8960,6 +8304,9 @@
                 <a:solidFill>
                   <a:srgbClr val="141E1E"/>
                 </a:solidFill>
+                <a:latin typeface="Calibri" pitchFamily="34" charset="0"/>
+                <a:ea typeface="Calibri" pitchFamily="34" charset="-122"/>
+                <a:cs typeface="Calibri" pitchFamily="34" charset="-120"/>
               </a:rPr>
               <a:t>Enables tax authorities to manage the complete registration lifecycle — including party creation, identifier management, historical data tracking, and organisational hierarchy. Supports natural persons and legal entities with full audit traceability.</a:t>
             </a:r>
@@ -8969,13 +8316,13 @@
       </p:sp>
       <p:sp>
         <p:nvSpPr>
-          <p:cNvPr id="32" name="Text 30"/>
-          <p:cNvSpPr/>
-          <p:nvPr/>
-        </p:nvSpPr>
-        <p:spPr>
-          <a:xfrm>
-            <a:off x="228600" y="2944368"/>
+          <p:cNvPr id="29" name="Text 27"/>
+          <p:cNvSpPr/>
+          <p:nvPr/>
+        </p:nvSpPr>
+        <p:spPr>
+          <a:xfrm>
+            <a:off x="228600" y="2990088"/>
             <a:ext cx="2743200" cy="201168"/>
           </a:xfrm>
           <a:prstGeom prst="rect">
@@ -8996,6 +8343,9 @@
                 <a:solidFill>
                   <a:srgbClr val="FF6359"/>
                 </a:solidFill>
+                <a:latin typeface="Calibri" pitchFamily="34" charset="0"/>
+                <a:ea typeface="Calibri" pitchFamily="34" charset="-122"/>
+                <a:cs typeface="Calibri" pitchFamily="34" charset="-120"/>
               </a:rPr>
               <a:t>Key Investment Benefits</a:t>
             </a:r>
@@ -9005,13 +8355,13 @@
       </p:sp>
       <p:sp>
         <p:nvSpPr>
-          <p:cNvPr id="33" name="Text 31"/>
-          <p:cNvSpPr/>
-          <p:nvPr/>
-        </p:nvSpPr>
-        <p:spPr>
-          <a:xfrm>
-            <a:off x="228600" y="3172968"/>
+          <p:cNvPr id="30" name="Text 28"/>
+          <p:cNvSpPr/>
+          <p:nvPr/>
+        </p:nvSpPr>
+        <p:spPr>
+          <a:xfrm>
+            <a:off x="228600" y="3218688"/>
             <a:ext cx="2743200" cy="749808"/>
           </a:xfrm>
           <a:prstGeom prst="rect">
@@ -9033,6 +8383,9 @@
                 <a:solidFill>
                   <a:srgbClr val="4A5C5A"/>
                 </a:solidFill>
+                <a:latin typeface="Calibri" pitchFamily="34" charset="0"/>
+                <a:ea typeface="Calibri" pitchFamily="34" charset="-122"/>
+                <a:cs typeface="Calibri" pitchFamily="34" charset="-120"/>
               </a:rPr>
               <a:t>Faster taxpayer onboarding reduces overhead and improves service delivery</a:t>
             </a:r>
@@ -9048,6 +8401,9 @@
                 <a:solidFill>
                   <a:srgbClr val="4A5C5A"/>
                 </a:solidFill>
+                <a:latin typeface="Calibri" pitchFamily="34" charset="0"/>
+                <a:ea typeface="Calibri" pitchFamily="34" charset="-122"/>
+                <a:cs typeface="Calibri" pitchFamily="34" charset="-120"/>
               </a:rPr>
               <a:t>Flexible party model supports VAT, CIT, and PAYE with full audit traceability</a:t>
             </a:r>
@@ -9063,6 +8419,9 @@
                 <a:solidFill>
                   <a:srgbClr val="4A5C5A"/>
                 </a:solidFill>
+                <a:latin typeface="Calibri" pitchFamily="34" charset="0"/>
+                <a:ea typeface="Calibri" pitchFamily="34" charset="-122"/>
+                <a:cs typeface="Calibri" pitchFamily="34" charset="-120"/>
               </a:rPr>
               <a:t>Structured identifiers and validation rules improve data quality across tax types</a:t>
             </a:r>
@@ -9072,7 +8431,7 @@
       </p:sp>
       <p:sp>
         <p:nvSpPr>
-          <p:cNvPr id="34" name="Text 32"/>
+          <p:cNvPr id="31" name="Text 29"/>
           <p:cNvSpPr/>
           <p:nvPr/>
         </p:nvSpPr>
@@ -9099,6 +8458,9 @@
                 <a:solidFill>
                   <a:srgbClr val="FF6359"/>
                 </a:solidFill>
+                <a:latin typeface="Calibri" pitchFamily="34" charset="0"/>
+                <a:ea typeface="Calibri" pitchFamily="34" charset="-122"/>
+                <a:cs typeface="Calibri" pitchFamily="34" charset="-120"/>
               </a:rPr>
               <a:t>Estimated Effort by Feature Area</a:t>
             </a:r>
@@ -9108,7 +8470,7 @@
       </p:sp>
       <p:graphicFrame>
         <p:nvGraphicFramePr>
-          <p:cNvPr id="35" name="Chart 0" descr=""/>
+          <p:cNvPr id="32" name="Chart 0" descr=""/>
           <p:cNvGraphicFramePr/>
           <p:nvPr/>
         </p:nvGraphicFramePr>
@@ -9124,7 +8486,7 @@
       </p:graphicFrame>
       <p:sp>
         <p:nvSpPr>
-          <p:cNvPr id="36" name="Text 33"/>
+          <p:cNvPr id="33" name="Text 30"/>
           <p:cNvSpPr/>
           <p:nvPr/>
         </p:nvSpPr>
@@ -9151,6 +8513,9 @@
                 <a:solidFill>
                   <a:srgbClr val="FF6359"/>
                 </a:solidFill>
+                <a:latin typeface="Calibri" pitchFamily="34" charset="0"/>
+                <a:ea typeface="Calibri" pitchFamily="34" charset="-122"/>
+                <a:cs typeface="Calibri" pitchFamily="34" charset="-120"/>
               </a:rPr>
               <a:t>Priority Distribution</a:t>
             </a:r>
@@ -9160,7 +8525,7 @@
       </p:sp>
       <p:graphicFrame>
         <p:nvGraphicFramePr>
-          <p:cNvPr id="37" name="Chart 1" descr=""/>
+          <p:cNvPr id="34" name="Chart 1" descr=""/>
           <p:cNvGraphicFramePr/>
           <p:nvPr/>
         </p:nvGraphicFramePr>
@@ -9176,14 +8541,53 @@
       </p:graphicFrame>
       <p:sp>
         <p:nvSpPr>
-          <p:cNvPr id="38" name="Text 34"/>
+          <p:cNvPr id="35" name="Text 31"/>
+          <p:cNvSpPr/>
+          <p:nvPr/>
+        </p:nvSpPr>
+        <p:spPr>
+          <a:xfrm>
+            <a:off x="3108960" y="3931920"/>
+            <a:ext cx="3017520" cy="228600"/>
+          </a:xfrm>
+          <a:prstGeom prst="rect">
+            <a:avLst/>
+          </a:prstGeom>
+          <a:noFill/>
+          <a:ln/>
+        </p:spPr>
+        <p:txBody>
+          <a:bodyPr wrap="square" rtlCol="0" anchor="ctr"/>
+          <a:lstStyle/>
+          <a:p>
+            <a:pPr indent="0" marL="0">
+              <a:buNone/>
+            </a:pPr>
+            <a:r>
+              <a:rPr lang="en-US" sz="1000" b="1" dirty="0">
+                <a:solidFill>
+                  <a:srgbClr val="FF6359"/>
+                </a:solidFill>
+                <a:latin typeface="Calibri" pitchFamily="34" charset="0"/>
+                <a:ea typeface="Calibri" pitchFamily="34" charset="-122"/>
+                <a:cs typeface="Calibri" pitchFamily="34" charset="-120"/>
+              </a:rPr>
+              <a:t>Talking Points</a:t>
+            </a:r>
+            <a:endParaRPr lang="en-US" sz="1000" dirty="0"/>
+          </a:p>
+        </p:txBody>
+      </p:sp>
+      <p:sp>
+        <p:nvSpPr>
+          <p:cNvPr id="36" name="Text 32"/>
           <p:cNvSpPr/>
           <p:nvPr/>
         </p:nvSpPr>
         <p:spPr>
           <a:xfrm>
             <a:off x="228600" y="3886200"/>
-            <a:ext cx="914400" cy="201168"/>
+            <a:ext cx="8686800" cy="201168"/>
           </a:xfrm>
           <a:prstGeom prst="rect">
             <a:avLst/>
@@ -9203,6 +8607,9 @@
                 <a:solidFill>
                   <a:srgbClr val="FF6359"/>
                 </a:solidFill>
+                <a:latin typeface="Calibri" pitchFamily="34" charset="0"/>
+                <a:ea typeface="Calibri" pitchFamily="34" charset="-122"/>
+                <a:cs typeface="Calibri" pitchFamily="34" charset="-120"/>
               </a:rPr>
               <a:t>PI Planning</a:t>
             </a:r>
@@ -9212,14 +8619,14 @@
       </p:sp>
       <p:sp>
         <p:nvSpPr>
-          <p:cNvPr id="39" name="Shape 35"/>
+          <p:cNvPr id="37" name="Shape 33"/>
           <p:cNvSpPr/>
           <p:nvPr/>
         </p:nvSpPr>
         <p:spPr>
           <a:xfrm>
             <a:off x="228600" y="4114800"/>
-            <a:ext cx="2743200" cy="658368"/>
+            <a:ext cx="2898648" cy="658368"/>
           </a:xfrm>
           <a:prstGeom prst="rect">
             <a:avLst/>
@@ -9232,7 +8639,7 @@
       </p:sp>
       <p:sp>
         <p:nvSpPr>
-          <p:cNvPr id="40" name="Text 36"/>
+          <p:cNvPr id="38" name="Text 34"/>
           <p:cNvSpPr/>
           <p:nvPr/>
         </p:nvSpPr>
@@ -9259,6 +8666,9 @@
                 <a:solidFill>
                   <a:srgbClr val="FFD282"/>
                 </a:solidFill>
+                <a:latin typeface="Calibri" pitchFamily="34" charset="0"/>
+                <a:ea typeface="Calibri" pitchFamily="34" charset="-122"/>
+                <a:cs typeface="Calibri" pitchFamily="34" charset="-120"/>
               </a:rPr>
               <a:t>PI27</a:t>
             </a:r>
@@ -9268,14 +8678,14 @@
       </p:sp>
       <p:sp>
         <p:nvSpPr>
-          <p:cNvPr id="41" name="Text 37"/>
+          <p:cNvPr id="39" name="Text 35"/>
           <p:cNvSpPr/>
           <p:nvPr/>
         </p:nvSpPr>
         <p:spPr>
           <a:xfrm>
             <a:off x="850392" y="4133088"/>
-            <a:ext cx="2057400" cy="402336"/>
+            <a:ext cx="2276856" cy="402336"/>
           </a:xfrm>
           <a:prstGeom prst="rect">
             <a:avLst/>
@@ -9295,6 +8705,9 @@
                 <a:solidFill>
                   <a:srgbClr val="FFFFFF"/>
                 </a:solidFill>
+                <a:latin typeface="Calibri" pitchFamily="34" charset="0"/>
+                <a:ea typeface="Calibri" pitchFamily="34" charset="-122"/>
+                <a:cs typeface="Calibri" pitchFamily="34" charset="-120"/>
               </a:rPr>
               <a:t>Party Identifiers · Historical Data View · Additional Name Elements (3 features)</a:t>
             </a:r>
@@ -9304,14 +8717,14 @@
       </p:sp>
       <p:sp>
         <p:nvSpPr>
-          <p:cNvPr id="42" name="Shape 38"/>
+          <p:cNvPr id="40" name="Shape 36"/>
           <p:cNvSpPr/>
           <p:nvPr/>
         </p:nvSpPr>
         <p:spPr>
           <a:xfrm>
             <a:off x="3127248" y="4114800"/>
-            <a:ext cx="2743200" cy="658368"/>
+            <a:ext cx="2898648" cy="658368"/>
           </a:xfrm>
           <a:prstGeom prst="rect">
             <a:avLst/>
@@ -9324,7 +8737,7 @@
       </p:sp>
       <p:sp>
         <p:nvSpPr>
-          <p:cNvPr id="43" name="Text 39"/>
+          <p:cNvPr id="41" name="Text 37"/>
           <p:cNvSpPr/>
           <p:nvPr/>
         </p:nvSpPr>
@@ -9351,6 +8764,9 @@
                 <a:solidFill>
                   <a:srgbClr val="FFD282"/>
                 </a:solidFill>
+                <a:latin typeface="Calibri" pitchFamily="34" charset="0"/>
+                <a:ea typeface="Calibri" pitchFamily="34" charset="-122"/>
+                <a:cs typeface="Calibri" pitchFamily="34" charset="-120"/>
               </a:rPr>
               <a:t>PI28</a:t>
             </a:r>
@@ -9360,14 +8776,14 @@
       </p:sp>
       <p:sp>
         <p:nvSpPr>
-          <p:cNvPr id="44" name="Text 40"/>
+          <p:cNvPr id="42" name="Text 38"/>
           <p:cNvSpPr/>
           <p:nvPr/>
         </p:nvSpPr>
         <p:spPr>
           <a:xfrm>
             <a:off x="3749040" y="4133088"/>
-            <a:ext cx="2057400" cy="402336"/>
+            <a:ext cx="2276856" cy="402336"/>
           </a:xfrm>
           <a:prstGeom prst="rect">
             <a:avLst/>
@@ -9387,6 +8803,9 @@
                 <a:solidFill>
                   <a:srgbClr val="FFFFFF"/>
                 </a:solidFill>
+                <a:latin typeface="Calibri" pitchFamily="34" charset="0"/>
+                <a:ea typeface="Calibri" pitchFamily="34" charset="-122"/>
+                <a:cs typeface="Calibri" pitchFamily="34" charset="-120"/>
               </a:rPr>
               <a:t>Data Area Enhancements · Search Enhancements (2 features) — confirm capacity now</a:t>
             </a:r>
@@ -9396,14 +8815,14 @@
       </p:sp>
       <p:sp>
         <p:nvSpPr>
-          <p:cNvPr id="45" name="Shape 41"/>
+          <p:cNvPr id="43" name="Shape 39"/>
           <p:cNvSpPr/>
           <p:nvPr/>
         </p:nvSpPr>
         <p:spPr>
           <a:xfrm>
             <a:off x="6025896" y="4114800"/>
-            <a:ext cx="2743200" cy="658368"/>
+            <a:ext cx="2898648" cy="658368"/>
           </a:xfrm>
           <a:prstGeom prst="rect">
             <a:avLst/>
@@ -9416,7 +8835,7 @@
       </p:sp>
       <p:sp>
         <p:nvSpPr>
-          <p:cNvPr id="46" name="Text 42"/>
+          <p:cNvPr id="44" name="Text 40"/>
           <p:cNvSpPr/>
           <p:nvPr/>
         </p:nvSpPr>
@@ -9443,6 +8862,9 @@
                 <a:solidFill>
                   <a:srgbClr val="FFD282"/>
                 </a:solidFill>
+                <a:latin typeface="Calibri" pitchFamily="34" charset="0"/>
+                <a:ea typeface="Calibri" pitchFamily="34" charset="-122"/>
+                <a:cs typeface="Calibri" pitchFamily="34" charset="-120"/>
               </a:rPr>
               <a:t>PI29</a:t>
             </a:r>
@@ -9452,14 +8874,73 @@
       </p:sp>
       <p:sp>
         <p:nvSpPr>
+          <p:cNvPr id="45" name="Text 41"/>
+          <p:cNvSpPr/>
+          <p:nvPr/>
+        </p:nvSpPr>
+        <p:spPr>
+          <a:xfrm>
+            <a:off x="6647688" y="4133088"/>
+            <a:ext cx="2276856" cy="402336"/>
+          </a:xfrm>
+          <a:prstGeom prst="rect">
+            <a:avLst/>
+          </a:prstGeom>
+          <a:noFill/>
+          <a:ln/>
+        </p:spPr>
+        <p:txBody>
+          <a:bodyPr wrap="square" rtlCol="0" anchor="ctr"/>
+          <a:lstStyle/>
+          <a:p>
+            <a:pPr indent="0" marL="0">
+              <a:buNone/>
+            </a:pPr>
+            <a:r>
+              <a:rPr lang="en-US" sz="800" dirty="0">
+                <a:solidFill>
+                  <a:srgbClr val="FFFFFF"/>
+                </a:solidFill>
+                <a:latin typeface="Calibri" pitchFamily="34" charset="0"/>
+                <a:ea typeface="Calibri" pitchFamily="34" charset="-122"/>
+                <a:cs typeface="Calibri" pitchFamily="34" charset="-120"/>
+              </a:rPr>
+              <a:t>Organisational Hierarchy View — GRC team alignment required before scoping</a:t>
+            </a:r>
+            <a:endParaRPr lang="en-US" sz="800" dirty="0"/>
+          </a:p>
+        </p:txBody>
+      </p:sp>
+      <p:sp>
+        <p:nvSpPr>
+          <p:cNvPr id="46" name="Shape 42"/>
+          <p:cNvSpPr/>
+          <p:nvPr/>
+        </p:nvSpPr>
+        <p:spPr>
+          <a:xfrm>
+            <a:off x="0" y="4983480"/>
+            <a:ext cx="9144000" cy="160020"/>
+          </a:xfrm>
+          <a:prstGeom prst="rect">
+            <a:avLst/>
+          </a:prstGeom>
+          <a:solidFill>
+            <a:srgbClr val="123836"/>
+          </a:solidFill>
+          <a:ln/>
+        </p:spPr>
+      </p:sp>
+      <p:sp>
+        <p:nvSpPr>
           <p:cNvPr id="47" name="Text 43"/>
           <p:cNvSpPr/>
           <p:nvPr/>
         </p:nvSpPr>
         <p:spPr>
           <a:xfrm>
-            <a:off x="6647688" y="4133088"/>
-            <a:ext cx="2057400" cy="402336"/>
+            <a:off x="137160" y="4974336"/>
+            <a:ext cx="6400800" cy="164592"/>
           </a:xfrm>
           <a:prstGeom prst="rect">
             <a:avLst/>
@@ -9477,10 +8958,52 @@
             <a:r>
               <a:rPr lang="en-US" sz="800" dirty="0">
                 <a:solidFill>
-                  <a:srgbClr val="FFFFFF"/>
-                </a:solidFill>
-              </a:rPr>
-              <a:t>Organisational Hierarchy View — GRC team alignment required before scoping</a:t>
+                  <a:srgbClr val="D0D7D7"/>
+                </a:solidFill>
+                <a:latin typeface="Calibri" pitchFamily="34" charset="0"/>
+                <a:ea typeface="Calibri" pitchFamily="34" charset="-122"/>
+                <a:cs typeface="Calibri" pitchFamily="34" charset="-120"/>
+              </a:rPr>
+              <a:t>Solon Tax Product Roadmap 2026 | SteerCo</a:t>
+            </a:r>
+            <a:endParaRPr lang="en-US" sz="800" dirty="0"/>
+          </a:p>
+        </p:txBody>
+      </p:sp>
+      <p:sp>
+        <p:nvSpPr>
+          <p:cNvPr id="48" name="Text 44"/>
+          <p:cNvSpPr/>
+          <p:nvPr/>
+        </p:nvSpPr>
+        <p:spPr>
+          <a:xfrm>
+            <a:off x="8686800" y="4974336"/>
+            <a:ext cx="365760" cy="164592"/>
+          </a:xfrm>
+          <a:prstGeom prst="rect">
+            <a:avLst/>
+          </a:prstGeom>
+          <a:noFill/>
+          <a:ln/>
+        </p:spPr>
+        <p:txBody>
+          <a:bodyPr wrap="square" rtlCol="0" anchor="ctr"/>
+          <a:lstStyle/>
+          <a:p>
+            <a:pPr algn="r" indent="0" marL="0">
+              <a:buNone/>
+            </a:pPr>
+            <a:r>
+              <a:rPr lang="en-US" sz="800" dirty="0">
+                <a:solidFill>
+                  <a:srgbClr val="D0D7D7"/>
+                </a:solidFill>
+                <a:latin typeface="Calibri" pitchFamily="34" charset="0"/>
+                <a:ea typeface="Calibri" pitchFamily="34" charset="-122"/>
+                <a:cs typeface="Calibri" pitchFamily="34" charset="-120"/>
+              </a:rPr>
+              <a:t>4</a:t>
             </a:r>
             <a:endParaRPr lang="en-US" sz="800" dirty="0"/>
           </a:p>
@@ -9683,104 +9206,6 @@
         </p:nvSpPr>
         <p:spPr>
           <a:xfrm>
-            <a:off x="0" y="4983480"/>
-            <a:ext cx="9144000" cy="160020"/>
-          </a:xfrm>
-          <a:prstGeom prst="rect">
-            <a:avLst/>
-          </a:prstGeom>
-          <a:solidFill>
-            <a:srgbClr val="123836"/>
-          </a:solidFill>
-          <a:ln/>
-        </p:spPr>
-      </p:sp>
-      <p:sp>
-        <p:nvSpPr>
-          <p:cNvPr id="8" name="Text 6"/>
-          <p:cNvSpPr/>
-          <p:nvPr/>
-        </p:nvSpPr>
-        <p:spPr>
-          <a:xfrm>
-            <a:off x="137160" y="4974336"/>
-            <a:ext cx="6400800" cy="164592"/>
-          </a:xfrm>
-          <a:prstGeom prst="rect">
-            <a:avLst/>
-          </a:prstGeom>
-          <a:noFill/>
-          <a:ln/>
-        </p:spPr>
-        <p:txBody>
-          <a:bodyPr wrap="square" rtlCol="0" anchor="ctr"/>
-          <a:lstStyle/>
-          <a:p>
-            <a:pPr indent="0" marL="0">
-              <a:buNone/>
-            </a:pPr>
-            <a:r>
-              <a:rPr lang="en-US" sz="800" dirty="0">
-                <a:solidFill>
-                  <a:srgbClr val="D0D7D7"/>
-                </a:solidFill>
-                <a:latin typeface="Calibri" pitchFamily="34" charset="0"/>
-                <a:ea typeface="Calibri" pitchFamily="34" charset="-122"/>
-                <a:cs typeface="Calibri" pitchFamily="34" charset="-120"/>
-              </a:rPr>
-              <a:t>Solon Tax Product Roadmap 2026 | SteerCo</a:t>
-            </a:r>
-            <a:endParaRPr lang="en-US" sz="800" dirty="0"/>
-          </a:p>
-        </p:txBody>
-      </p:sp>
-      <p:sp>
-        <p:nvSpPr>
-          <p:cNvPr id="9" name="Text 7"/>
-          <p:cNvSpPr/>
-          <p:nvPr/>
-        </p:nvSpPr>
-        <p:spPr>
-          <a:xfrm>
-            <a:off x="8686800" y="4974336"/>
-            <a:ext cx="365760" cy="164592"/>
-          </a:xfrm>
-          <a:prstGeom prst="rect">
-            <a:avLst/>
-          </a:prstGeom>
-          <a:noFill/>
-          <a:ln/>
-        </p:spPr>
-        <p:txBody>
-          <a:bodyPr wrap="square" rtlCol="0" anchor="ctr"/>
-          <a:lstStyle/>
-          <a:p>
-            <a:pPr algn="r" indent="0" marL="0">
-              <a:buNone/>
-            </a:pPr>
-            <a:r>
-              <a:rPr lang="en-US" sz="800" dirty="0">
-                <a:solidFill>
-                  <a:srgbClr val="D0D7D7"/>
-                </a:solidFill>
-                <a:latin typeface="Calibri" pitchFamily="34" charset="0"/>
-                <a:ea typeface="Calibri" pitchFamily="34" charset="-122"/>
-                <a:cs typeface="Calibri" pitchFamily="34" charset="-120"/>
-              </a:rPr>
-              <a:t>5</a:t>
-            </a:r>
-            <a:endParaRPr lang="en-US" sz="800" dirty="0"/>
-          </a:p>
-        </p:txBody>
-      </p:sp>
-      <p:sp>
-        <p:nvSpPr>
-          <p:cNvPr id="10" name="Shape 8"/>
-          <p:cNvSpPr/>
-          <p:nvPr/>
-        </p:nvSpPr>
-        <p:spPr>
-          <a:xfrm>
             <a:off x="228600" y="1005840"/>
             <a:ext cx="2011680" cy="914400"/>
           </a:xfrm>
@@ -9807,14 +9232,14 @@
       </p:sp>
       <p:sp>
         <p:nvSpPr>
-          <p:cNvPr id="11" name="Shape 9"/>
+          <p:cNvPr id="8" name="Shape 6"/>
           <p:cNvSpPr/>
           <p:nvPr/>
         </p:nvSpPr>
         <p:spPr>
           <a:xfrm>
             <a:off x="228600" y="1005840"/>
-            <a:ext cx="2011680" cy="54864"/>
+            <a:ext cx="54864" cy="914400"/>
           </a:xfrm>
           <a:prstGeom prst="rect">
             <a:avLst/>
@@ -9827,7 +9252,7 @@
       </p:sp>
       <p:sp>
         <p:nvSpPr>
-          <p:cNvPr id="12" name="Text 10"/>
+          <p:cNvPr id="9" name="Text 7"/>
           <p:cNvSpPr/>
           <p:nvPr/>
         </p:nvSpPr>
@@ -9866,7 +9291,7 @@
       </p:sp>
       <p:sp>
         <p:nvSpPr>
-          <p:cNvPr id="13" name="Text 11"/>
+          <p:cNvPr id="10" name="Text 8"/>
           <p:cNvSpPr/>
           <p:nvPr/>
         </p:nvSpPr>
@@ -9905,7 +9330,7 @@
       </p:sp>
       <p:sp>
         <p:nvSpPr>
-          <p:cNvPr id="14" name="Text 12"/>
+          <p:cNvPr id="11" name="Text 9"/>
           <p:cNvSpPr/>
           <p:nvPr/>
         </p:nvSpPr>
@@ -9944,7 +9369,7 @@
       </p:sp>
       <p:sp>
         <p:nvSpPr>
-          <p:cNvPr id="15" name="Shape 13"/>
+          <p:cNvPr id="12" name="Shape 10"/>
           <p:cNvSpPr/>
           <p:nvPr/>
         </p:nvSpPr>
@@ -9976,14 +9401,14 @@
       </p:sp>
       <p:sp>
         <p:nvSpPr>
-          <p:cNvPr id="16" name="Shape 14"/>
+          <p:cNvPr id="13" name="Shape 11"/>
           <p:cNvSpPr/>
           <p:nvPr/>
         </p:nvSpPr>
         <p:spPr>
           <a:xfrm>
             <a:off x="2414016" y="1005840"/>
-            <a:ext cx="2011680" cy="54864"/>
+            <a:ext cx="54864" cy="914400"/>
           </a:xfrm>
           <a:prstGeom prst="rect">
             <a:avLst/>
@@ -9996,7 +9421,7 @@
       </p:sp>
       <p:sp>
         <p:nvSpPr>
-          <p:cNvPr id="17" name="Text 15"/>
+          <p:cNvPr id="14" name="Text 12"/>
           <p:cNvSpPr/>
           <p:nvPr/>
         </p:nvSpPr>
@@ -10035,7 +9460,7 @@
       </p:sp>
       <p:sp>
         <p:nvSpPr>
-          <p:cNvPr id="18" name="Text 16"/>
+          <p:cNvPr id="15" name="Text 13"/>
           <p:cNvSpPr/>
           <p:nvPr/>
         </p:nvSpPr>
@@ -10074,7 +9499,7 @@
       </p:sp>
       <p:sp>
         <p:nvSpPr>
-          <p:cNvPr id="19" name="Text 17"/>
+          <p:cNvPr id="16" name="Text 14"/>
           <p:cNvSpPr/>
           <p:nvPr/>
         </p:nvSpPr>
@@ -10113,7 +9538,7 @@
       </p:sp>
       <p:sp>
         <p:nvSpPr>
-          <p:cNvPr id="20" name="Shape 18"/>
+          <p:cNvPr id="17" name="Shape 15"/>
           <p:cNvSpPr/>
           <p:nvPr/>
         </p:nvSpPr>
@@ -10145,14 +9570,14 @@
       </p:sp>
       <p:sp>
         <p:nvSpPr>
-          <p:cNvPr id="21" name="Shape 19"/>
+          <p:cNvPr id="18" name="Shape 16"/>
           <p:cNvSpPr/>
           <p:nvPr/>
         </p:nvSpPr>
         <p:spPr>
           <a:xfrm>
             <a:off x="4599432" y="1005840"/>
-            <a:ext cx="2011680" cy="54864"/>
+            <a:ext cx="54864" cy="914400"/>
           </a:xfrm>
           <a:prstGeom prst="rect">
             <a:avLst/>
@@ -10165,7 +9590,7 @@
       </p:sp>
       <p:sp>
         <p:nvSpPr>
-          <p:cNvPr id="22" name="Text 20"/>
+          <p:cNvPr id="19" name="Text 17"/>
           <p:cNvSpPr/>
           <p:nvPr/>
         </p:nvSpPr>
@@ -10204,7 +9629,7 @@
       </p:sp>
       <p:sp>
         <p:nvSpPr>
-          <p:cNvPr id="23" name="Text 21"/>
+          <p:cNvPr id="20" name="Text 18"/>
           <p:cNvSpPr/>
           <p:nvPr/>
         </p:nvSpPr>
@@ -10243,7 +9668,7 @@
       </p:sp>
       <p:sp>
         <p:nvSpPr>
-          <p:cNvPr id="24" name="Text 22"/>
+          <p:cNvPr id="21" name="Text 19"/>
           <p:cNvSpPr/>
           <p:nvPr/>
         </p:nvSpPr>
@@ -10282,7 +9707,7 @@
       </p:sp>
       <p:sp>
         <p:nvSpPr>
-          <p:cNvPr id="25" name="Shape 23"/>
+          <p:cNvPr id="22" name="Shape 20"/>
           <p:cNvSpPr/>
           <p:nvPr/>
         </p:nvSpPr>
@@ -10314,14 +9739,14 @@
       </p:sp>
       <p:sp>
         <p:nvSpPr>
-          <p:cNvPr id="26" name="Shape 24"/>
+          <p:cNvPr id="23" name="Shape 21"/>
           <p:cNvSpPr/>
           <p:nvPr/>
         </p:nvSpPr>
         <p:spPr>
           <a:xfrm>
             <a:off x="6784848" y="1005840"/>
-            <a:ext cx="2011680" cy="54864"/>
+            <a:ext cx="54864" cy="914400"/>
           </a:xfrm>
           <a:prstGeom prst="rect">
             <a:avLst/>
@@ -10334,7 +9759,7 @@
       </p:sp>
       <p:sp>
         <p:nvSpPr>
-          <p:cNvPr id="27" name="Text 25"/>
+          <p:cNvPr id="24" name="Text 22"/>
           <p:cNvSpPr/>
           <p:nvPr/>
         </p:nvSpPr>
@@ -10373,7 +9798,7 @@
       </p:sp>
       <p:sp>
         <p:nvSpPr>
-          <p:cNvPr id="28" name="Text 26"/>
+          <p:cNvPr id="25" name="Text 23"/>
           <p:cNvSpPr/>
           <p:nvPr/>
         </p:nvSpPr>
@@ -10412,7 +9837,7 @@
       </p:sp>
       <p:sp>
         <p:nvSpPr>
-          <p:cNvPr id="29" name="Text 27"/>
+          <p:cNvPr id="26" name="Text 24"/>
           <p:cNvSpPr/>
           <p:nvPr/>
         </p:nvSpPr>
@@ -10451,7 +9876,7 @@
       </p:sp>
       <p:sp>
         <p:nvSpPr>
-          <p:cNvPr id="30" name="Text 28"/>
+          <p:cNvPr id="27" name="Text 25"/>
           <p:cNvSpPr/>
           <p:nvPr/>
         </p:nvSpPr>
@@ -10478,6 +9903,9 @@
                 <a:solidFill>
                   <a:srgbClr val="FF6359"/>
                 </a:solidFill>
+                <a:latin typeface="Calibri" pitchFamily="34" charset="0"/>
+                <a:ea typeface="Calibri" pitchFamily="34" charset="-122"/>
+                <a:cs typeface="Calibri" pitchFamily="34" charset="-120"/>
               </a:rPr>
               <a:t>Business Scope</a:t>
             </a:r>
@@ -10487,7 +9915,7 @@
       </p:sp>
       <p:sp>
         <p:nvSpPr>
-          <p:cNvPr id="31" name="Text 29"/>
+          <p:cNvPr id="28" name="Text 26"/>
           <p:cNvSpPr/>
           <p:nvPr/>
         </p:nvSpPr>
@@ -10514,6 +9942,9 @@
                 <a:solidFill>
                   <a:srgbClr val="141E1E"/>
                 </a:solidFill>
+                <a:latin typeface="Calibri" pitchFamily="34" charset="0"/>
+                <a:ea typeface="Calibri" pitchFamily="34" charset="-122"/>
+                <a:cs typeface="Calibri" pitchFamily="34" charset="-120"/>
               </a:rPr>
               <a:t>Provides tax authorities with a unified financial ledger for each taxpayer, recording all transactions including payments, credits, adjustments, and write-offs. Ensures accurate account balances and supports reconciliation across all tax types.</a:t>
             </a:r>
@@ -10523,13 +9954,13 @@
       </p:sp>
       <p:sp>
         <p:nvSpPr>
-          <p:cNvPr id="32" name="Text 30"/>
-          <p:cNvSpPr/>
-          <p:nvPr/>
-        </p:nvSpPr>
-        <p:spPr>
-          <a:xfrm>
-            <a:off x="228600" y="2944368"/>
+          <p:cNvPr id="29" name="Text 27"/>
+          <p:cNvSpPr/>
+          <p:nvPr/>
+        </p:nvSpPr>
+        <p:spPr>
+          <a:xfrm>
+            <a:off x="228600" y="2990088"/>
             <a:ext cx="2743200" cy="201168"/>
           </a:xfrm>
           <a:prstGeom prst="rect">
@@ -10550,6 +9981,9 @@
                 <a:solidFill>
                   <a:srgbClr val="FF6359"/>
                 </a:solidFill>
+                <a:latin typeface="Calibri" pitchFamily="34" charset="0"/>
+                <a:ea typeface="Calibri" pitchFamily="34" charset="-122"/>
+                <a:cs typeface="Calibri" pitchFamily="34" charset="-120"/>
               </a:rPr>
               <a:t>Key Investment Benefits</a:t>
             </a:r>
@@ -10559,13 +9993,13 @@
       </p:sp>
       <p:sp>
         <p:nvSpPr>
-          <p:cNvPr id="33" name="Text 31"/>
-          <p:cNvSpPr/>
-          <p:nvPr/>
-        </p:nvSpPr>
-        <p:spPr>
-          <a:xfrm>
-            <a:off x="228600" y="3172968"/>
+          <p:cNvPr id="30" name="Text 28"/>
+          <p:cNvSpPr/>
+          <p:nvPr/>
+        </p:nvSpPr>
+        <p:spPr>
+          <a:xfrm>
+            <a:off x="228600" y="3218688"/>
             <a:ext cx="2743200" cy="749808"/>
           </a:xfrm>
           <a:prstGeom prst="rect">
@@ -10587,6 +10021,9 @@
                 <a:solidFill>
                   <a:srgbClr val="4A5C5A"/>
                 </a:solidFill>
+                <a:latin typeface="Calibri" pitchFamily="34" charset="0"/>
+                <a:ea typeface="Calibri" pitchFamily="34" charset="-122"/>
+                <a:cs typeface="Calibri" pitchFamily="34" charset="-120"/>
               </a:rPr>
               <a:t>Real-time balance visibility reduces disputes and improves taxpayer trust</a:t>
             </a:r>
@@ -10602,6 +10039,9 @@
                 <a:solidFill>
                   <a:srgbClr val="4A5C5A"/>
                 </a:solidFill>
+                <a:latin typeface="Calibri" pitchFamily="34" charset="0"/>
+                <a:ea typeface="Calibri" pitchFamily="34" charset="-122"/>
+                <a:cs typeface="Calibri" pitchFamily="34" charset="-120"/>
               </a:rPr>
               <a:t>Automated reconciliation eliminates manual posting errors</a:t>
             </a:r>
@@ -10617,6 +10057,9 @@
                 <a:solidFill>
                   <a:srgbClr val="4A5C5A"/>
                 </a:solidFill>
+                <a:latin typeface="Calibri" pitchFamily="34" charset="0"/>
+                <a:ea typeface="Calibri" pitchFamily="34" charset="-122"/>
+                <a:cs typeface="Calibri" pitchFamily="34" charset="-120"/>
               </a:rPr>
               <a:t>Single ledger supports multi-tax-type accounting for all periods</a:t>
             </a:r>
@@ -10626,7 +10069,7 @@
       </p:sp>
       <p:sp>
         <p:nvSpPr>
-          <p:cNvPr id="34" name="Text 32"/>
+          <p:cNvPr id="31" name="Text 29"/>
           <p:cNvSpPr/>
           <p:nvPr/>
         </p:nvSpPr>
@@ -10653,6 +10096,9 @@
                 <a:solidFill>
                   <a:srgbClr val="FF6359"/>
                 </a:solidFill>
+                <a:latin typeface="Calibri" pitchFamily="34" charset="0"/>
+                <a:ea typeface="Calibri" pitchFamily="34" charset="-122"/>
+                <a:cs typeface="Calibri" pitchFamily="34" charset="-120"/>
               </a:rPr>
               <a:t>Estimated Effort by Feature Area</a:t>
             </a:r>
@@ -10662,7 +10108,7 @@
       </p:sp>
       <p:graphicFrame>
         <p:nvGraphicFramePr>
-          <p:cNvPr id="35" name="Chart 0" descr=""/>
+          <p:cNvPr id="32" name="Chart 0" descr=""/>
           <p:cNvGraphicFramePr/>
           <p:nvPr/>
         </p:nvGraphicFramePr>
@@ -10678,7 +10124,7 @@
       </p:graphicFrame>
       <p:sp>
         <p:nvSpPr>
-          <p:cNvPr id="36" name="Text 33"/>
+          <p:cNvPr id="33" name="Text 30"/>
           <p:cNvSpPr/>
           <p:nvPr/>
         </p:nvSpPr>
@@ -10705,6 +10151,9 @@
                 <a:solidFill>
                   <a:srgbClr val="FF6359"/>
                 </a:solidFill>
+                <a:latin typeface="Calibri" pitchFamily="34" charset="0"/>
+                <a:ea typeface="Calibri" pitchFamily="34" charset="-122"/>
+                <a:cs typeface="Calibri" pitchFamily="34" charset="-120"/>
               </a:rPr>
               <a:t>Priority Distribution</a:t>
             </a:r>
@@ -10714,7 +10163,7 @@
       </p:sp>
       <p:graphicFrame>
         <p:nvGraphicFramePr>
-          <p:cNvPr id="37" name="Chart 1" descr=""/>
+          <p:cNvPr id="34" name="Chart 1" descr=""/>
           <p:cNvGraphicFramePr/>
           <p:nvPr/>
         </p:nvGraphicFramePr>
@@ -10730,14 +10179,129 @@
       </p:graphicFrame>
       <p:sp>
         <p:nvSpPr>
-          <p:cNvPr id="38" name="Text 34"/>
+          <p:cNvPr id="35" name="Text 31"/>
+          <p:cNvSpPr/>
+          <p:nvPr/>
+        </p:nvSpPr>
+        <p:spPr>
+          <a:xfrm>
+            <a:off x="3108960" y="3931920"/>
+            <a:ext cx="3017520" cy="228600"/>
+          </a:xfrm>
+          <a:prstGeom prst="rect">
+            <a:avLst/>
+          </a:prstGeom>
+          <a:noFill/>
+          <a:ln/>
+        </p:spPr>
+        <p:txBody>
+          <a:bodyPr wrap="square" rtlCol="0" anchor="ctr"/>
+          <a:lstStyle/>
+          <a:p>
+            <a:pPr indent="0" marL="0">
+              <a:buNone/>
+            </a:pPr>
+            <a:r>
+              <a:rPr lang="en-US" sz="1000" b="1" dirty="0">
+                <a:solidFill>
+                  <a:srgbClr val="FF6359"/>
+                </a:solidFill>
+                <a:latin typeface="Calibri" pitchFamily="34" charset="0"/>
+                <a:ea typeface="Calibri" pitchFamily="34" charset="-122"/>
+                <a:cs typeface="Calibri" pitchFamily="34" charset="-120"/>
+              </a:rPr>
+              <a:t>Talking Points</a:t>
+            </a:r>
+            <a:endParaRPr lang="en-US" sz="1000" dirty="0"/>
+          </a:p>
+        </p:txBody>
+      </p:sp>
+      <p:sp>
+        <p:nvSpPr>
+          <p:cNvPr id="36" name="Text 32"/>
+          <p:cNvSpPr/>
+          <p:nvPr/>
+        </p:nvSpPr>
+        <p:spPr>
+          <a:xfrm>
+            <a:off x="3108960" y="4160520"/>
+            <a:ext cx="3017520" cy="640080"/>
+          </a:xfrm>
+          <a:prstGeom prst="rect">
+            <a:avLst/>
+          </a:prstGeom>
+          <a:noFill/>
+          <a:ln/>
+        </p:spPr>
+        <p:txBody>
+          <a:bodyPr wrap="square" rtlCol="0" anchor="ctr"/>
+          <a:lstStyle/>
+          <a:p>
+            <a:pPr marL="342900" indent="-342900">
+              <a:buSzPct val="100000"/>
+              <a:buChar char="•"/>
+            </a:pPr>
+            <a:r>
+              <a:rPr lang="en-US" sz="900" dirty="0">
+                <a:solidFill>
+                  <a:srgbClr val="4A5C5A"/>
+                </a:solidFill>
+                <a:latin typeface="Calibri" pitchFamily="34" charset="0"/>
+                <a:ea typeface="Calibri" pitchFamily="34" charset="-122"/>
+                <a:cs typeface="Calibri" pitchFamily="34" charset="-120"/>
+              </a:rPr>
+              <a:t>Second-largest investment — foundational to revenue assurance</a:t>
+            </a:r>
+            <a:endParaRPr lang="en-US" sz="900" dirty="0"/>
+          </a:p>
+          <a:p>
+            <a:pPr marL="342900" indent="-342900">
+              <a:buSzPct val="100000"/>
+              <a:buChar char="•"/>
+            </a:pPr>
+            <a:r>
+              <a:rPr lang="en-US" sz="900" dirty="0">
+                <a:solidFill>
+                  <a:srgbClr val="4A5C5A"/>
+                </a:solidFill>
+                <a:latin typeface="Calibri" pitchFamily="34" charset="0"/>
+                <a:ea typeface="Calibri" pitchFamily="34" charset="-122"/>
+                <a:cs typeface="Calibri" pitchFamily="34" charset="-120"/>
+              </a:rPr>
+              <a:t>PI28 delivery critical — capacity must be confirmed now</a:t>
+            </a:r>
+            <a:endParaRPr lang="en-US" sz="900" dirty="0"/>
+          </a:p>
+          <a:p>
+            <a:pPr marL="342900" indent="-342900">
+              <a:buSzPct val="100000"/>
+              <a:buChar char="•"/>
+            </a:pPr>
+            <a:r>
+              <a:rPr lang="en-US" sz="900" dirty="0">
+                <a:solidFill>
+                  <a:srgbClr val="4A5C5A"/>
+                </a:solidFill>
+                <a:latin typeface="Calibri" pitchFamily="34" charset="0"/>
+                <a:ea typeface="Calibri" pitchFamily="34" charset="-122"/>
+                <a:cs typeface="Calibri" pitchFamily="34" charset="-120"/>
+              </a:rPr>
+              <a:t>All P1/P2 — no descoping without revenue risk</a:t>
+            </a:r>
+            <a:endParaRPr lang="en-US" sz="900" dirty="0"/>
+          </a:p>
+        </p:txBody>
+      </p:sp>
+      <p:sp>
+        <p:nvSpPr>
+          <p:cNvPr id="37" name="Text 33"/>
           <p:cNvSpPr/>
           <p:nvPr/>
         </p:nvSpPr>
         <p:spPr>
           <a:xfrm>
             <a:off x="228600" y="3886200"/>
-            <a:ext cx="914400" cy="201168"/>
+            <a:ext cx="8686800" cy="201168"/>
           </a:xfrm>
           <a:prstGeom prst="rect">
             <a:avLst/>
@@ -10757,6 +10321,9 @@
                 <a:solidFill>
                   <a:srgbClr val="FF6359"/>
                 </a:solidFill>
+                <a:latin typeface="Calibri" pitchFamily="34" charset="0"/>
+                <a:ea typeface="Calibri" pitchFamily="34" charset="-122"/>
+                <a:cs typeface="Calibri" pitchFamily="34" charset="-120"/>
               </a:rPr>
               <a:t>PI Planning</a:t>
             </a:r>
@@ -10766,14 +10333,14 @@
       </p:sp>
       <p:sp>
         <p:nvSpPr>
-          <p:cNvPr id="39" name="Shape 35"/>
+          <p:cNvPr id="38" name="Shape 34"/>
           <p:cNvSpPr/>
           <p:nvPr/>
         </p:nvSpPr>
         <p:spPr>
           <a:xfrm>
             <a:off x="228600" y="4114800"/>
-            <a:ext cx="2743200" cy="658368"/>
+            <a:ext cx="2898648" cy="658368"/>
           </a:xfrm>
           <a:prstGeom prst="rect">
             <a:avLst/>
@@ -10786,7 +10353,7 @@
       </p:sp>
       <p:sp>
         <p:nvSpPr>
-          <p:cNvPr id="40" name="Text 36"/>
+          <p:cNvPr id="39" name="Text 35"/>
           <p:cNvSpPr/>
           <p:nvPr/>
         </p:nvSpPr>
@@ -10813,6 +10380,9 @@
                 <a:solidFill>
                   <a:srgbClr val="FFD282"/>
                 </a:solidFill>
+                <a:latin typeface="Calibri" pitchFamily="34" charset="0"/>
+                <a:ea typeface="Calibri" pitchFamily="34" charset="-122"/>
+                <a:cs typeface="Calibri" pitchFamily="34" charset="-120"/>
               </a:rPr>
               <a:t>PI27</a:t>
             </a:r>
@@ -10822,14 +10392,14 @@
       </p:sp>
       <p:sp>
         <p:nvSpPr>
-          <p:cNvPr id="41" name="Text 37"/>
+          <p:cNvPr id="40" name="Text 36"/>
           <p:cNvSpPr/>
           <p:nvPr/>
         </p:nvSpPr>
         <p:spPr>
           <a:xfrm>
             <a:off x="850392" y="4133088"/>
-            <a:ext cx="2057400" cy="402336"/>
+            <a:ext cx="2276856" cy="402336"/>
           </a:xfrm>
           <a:prstGeom prst="rect">
             <a:avLst/>
@@ -10849,6 +10419,9 @@
                 <a:solidFill>
                   <a:srgbClr val="FFFFFF"/>
                 </a:solidFill>
+                <a:latin typeface="Calibri" pitchFamily="34" charset="0"/>
+                <a:ea typeface="Calibri" pitchFamily="34" charset="-122"/>
+                <a:cs typeface="Calibri" pitchFamily="34" charset="-120"/>
               </a:rPr>
               <a:t>No features</a:t>
             </a:r>
@@ -10858,14 +10431,14 @@
       </p:sp>
       <p:sp>
         <p:nvSpPr>
-          <p:cNvPr id="42" name="Shape 38"/>
+          <p:cNvPr id="41" name="Shape 37"/>
           <p:cNvSpPr/>
           <p:nvPr/>
         </p:nvSpPr>
         <p:spPr>
           <a:xfrm>
             <a:off x="3127248" y="4114800"/>
-            <a:ext cx="2743200" cy="658368"/>
+            <a:ext cx="2898648" cy="658368"/>
           </a:xfrm>
           <a:prstGeom prst="rect">
             <a:avLst/>
@@ -10878,7 +10451,7 @@
       </p:sp>
       <p:sp>
         <p:nvSpPr>
-          <p:cNvPr id="43" name="Text 39"/>
+          <p:cNvPr id="42" name="Text 38"/>
           <p:cNvSpPr/>
           <p:nvPr/>
         </p:nvSpPr>
@@ -10905,6 +10478,9 @@
                 <a:solidFill>
                   <a:srgbClr val="FFD282"/>
                 </a:solidFill>
+                <a:latin typeface="Calibri" pitchFamily="34" charset="0"/>
+                <a:ea typeface="Calibri" pitchFamily="34" charset="-122"/>
+                <a:cs typeface="Calibri" pitchFamily="34" charset="-120"/>
               </a:rPr>
               <a:t>PI28</a:t>
             </a:r>
@@ -10914,14 +10490,14 @@
       </p:sp>
       <p:sp>
         <p:nvSpPr>
-          <p:cNvPr id="44" name="Text 40"/>
+          <p:cNvPr id="43" name="Text 39"/>
           <p:cNvSpPr/>
           <p:nvPr/>
         </p:nvSpPr>
         <p:spPr>
           <a:xfrm>
             <a:off x="3749040" y="4133088"/>
-            <a:ext cx="2057400" cy="402336"/>
+            <a:ext cx="2276856" cy="402336"/>
           </a:xfrm>
           <a:prstGeom prst="rect">
             <a:avLst/>
@@ -10941,6 +10517,9 @@
                 <a:solidFill>
                   <a:srgbClr val="FFFFFF"/>
                 </a:solidFill>
+                <a:latin typeface="Calibri" pitchFamily="34" charset="0"/>
+                <a:ea typeface="Calibri" pitchFamily="34" charset="-122"/>
+                <a:cs typeface="Calibri" pitchFamily="34" charset="-120"/>
               </a:rPr>
               <a:t>General Ledger Core · Transaction Processing</a:t>
             </a:r>
@@ -10950,14 +10529,14 @@
       </p:sp>
       <p:sp>
         <p:nvSpPr>
-          <p:cNvPr id="45" name="Shape 41"/>
+          <p:cNvPr id="44" name="Shape 40"/>
           <p:cNvSpPr/>
           <p:nvPr/>
         </p:nvSpPr>
         <p:spPr>
           <a:xfrm>
             <a:off x="6025896" y="4114800"/>
-            <a:ext cx="2743200" cy="658368"/>
+            <a:ext cx="2898648" cy="658368"/>
           </a:xfrm>
           <a:prstGeom prst="rect">
             <a:avLst/>
@@ -10970,7 +10549,7 @@
       </p:sp>
       <p:sp>
         <p:nvSpPr>
-          <p:cNvPr id="46" name="Text 42"/>
+          <p:cNvPr id="45" name="Text 41"/>
           <p:cNvSpPr/>
           <p:nvPr/>
         </p:nvSpPr>
@@ -10997,6 +10576,9 @@
                 <a:solidFill>
                   <a:srgbClr val="FFD282"/>
                 </a:solidFill>
+                <a:latin typeface="Calibri" pitchFamily="34" charset="0"/>
+                <a:ea typeface="Calibri" pitchFamily="34" charset="-122"/>
+                <a:cs typeface="Calibri" pitchFamily="34" charset="-120"/>
               </a:rPr>
               <a:t>PI29</a:t>
             </a:r>
@@ -11006,14 +10588,14 @@
       </p:sp>
       <p:sp>
         <p:nvSpPr>
-          <p:cNvPr id="47" name="Text 43"/>
+          <p:cNvPr id="46" name="Text 42"/>
           <p:cNvSpPr/>
           <p:nvPr/>
         </p:nvSpPr>
         <p:spPr>
           <a:xfrm>
             <a:off x="6647688" y="4133088"/>
-            <a:ext cx="2057400" cy="402336"/>
+            <a:ext cx="2276856" cy="402336"/>
           </a:xfrm>
           <a:prstGeom prst="rect">
             <a:avLst/>
@@ -11033,6 +10615,9 @@
                 <a:solidFill>
                   <a:srgbClr val="FFFFFF"/>
                 </a:solidFill>
+                <a:latin typeface="Calibri" pitchFamily="34" charset="0"/>
+                <a:ea typeface="Calibri" pitchFamily="34" charset="-122"/>
+                <a:cs typeface="Calibri" pitchFamily="34" charset="-120"/>
               </a:rPr>
               <a:t>Account Reconciliation · Balance Management</a:t>
             </a:r>
@@ -11042,7 +10627,7 @@
       </p:sp>
       <p:sp>
         <p:nvSpPr>
-          <p:cNvPr id="48" name="Shape 44"/>
+          <p:cNvPr id="47" name="Shape 43"/>
           <p:cNvSpPr/>
           <p:nvPr/>
         </p:nvSpPr>
@@ -11062,7 +10647,7 @@
       </p:sp>
       <p:sp>
         <p:nvSpPr>
-          <p:cNvPr id="49" name="Shape 45"/>
+          <p:cNvPr id="48" name="Shape 44"/>
           <p:cNvSpPr/>
           <p:nvPr/>
         </p:nvSpPr>
@@ -11082,14 +10667,14 @@
       </p:sp>
       <p:sp>
         <p:nvSpPr>
-          <p:cNvPr id="50" name="Text 46"/>
+          <p:cNvPr id="49" name="Text 45"/>
           <p:cNvSpPr/>
           <p:nvPr/>
         </p:nvSpPr>
         <p:spPr>
           <a:xfrm>
             <a:off x="137160" y="4617720"/>
-            <a:ext cx="8869680" cy="347472"/>
+            <a:ext cx="8915400" cy="347472"/>
           </a:xfrm>
           <a:prstGeom prst="rect">
             <a:avLst/>
@@ -11109,10 +10694,111 @@
                 <a:solidFill>
                   <a:srgbClr val="D0D7D7"/>
                 </a:solidFill>
+                <a:latin typeface="Calibri" pitchFamily="34" charset="0"/>
+                <a:ea typeface="Calibri" pitchFamily="34" charset="-122"/>
+                <a:cs typeface="Calibri" pitchFamily="34" charset="-120"/>
               </a:rPr>
               <a:t>Second-largest investment — foundational to revenue assurance   ·   PI28 delivery must be confirmed   ·   All features P1/P2 — no descoping without revenue risk</a:t>
             </a:r>
             <a:endParaRPr lang="en-US" sz="750" dirty="0"/>
+          </a:p>
+        </p:txBody>
+      </p:sp>
+      <p:sp>
+        <p:nvSpPr>
+          <p:cNvPr id="50" name="Shape 46"/>
+          <p:cNvSpPr/>
+          <p:nvPr/>
+        </p:nvSpPr>
+        <p:spPr>
+          <a:xfrm>
+            <a:off x="0" y="4983480"/>
+            <a:ext cx="9144000" cy="160020"/>
+          </a:xfrm>
+          <a:prstGeom prst="rect">
+            <a:avLst/>
+          </a:prstGeom>
+          <a:solidFill>
+            <a:srgbClr val="123836"/>
+          </a:solidFill>
+          <a:ln/>
+        </p:spPr>
+      </p:sp>
+      <p:sp>
+        <p:nvSpPr>
+          <p:cNvPr id="51" name="Text 47"/>
+          <p:cNvSpPr/>
+          <p:nvPr/>
+        </p:nvSpPr>
+        <p:spPr>
+          <a:xfrm>
+            <a:off x="137160" y="4974336"/>
+            <a:ext cx="6400800" cy="164592"/>
+          </a:xfrm>
+          <a:prstGeom prst="rect">
+            <a:avLst/>
+          </a:prstGeom>
+          <a:noFill/>
+          <a:ln/>
+        </p:spPr>
+        <p:txBody>
+          <a:bodyPr wrap="square" rtlCol="0" anchor="ctr"/>
+          <a:lstStyle/>
+          <a:p>
+            <a:pPr indent="0" marL="0">
+              <a:buNone/>
+            </a:pPr>
+            <a:r>
+              <a:rPr lang="en-US" sz="800" dirty="0">
+                <a:solidFill>
+                  <a:srgbClr val="D0D7D7"/>
+                </a:solidFill>
+                <a:latin typeface="Calibri" pitchFamily="34" charset="0"/>
+                <a:ea typeface="Calibri" pitchFamily="34" charset="-122"/>
+                <a:cs typeface="Calibri" pitchFamily="34" charset="-120"/>
+              </a:rPr>
+              <a:t>Solon Tax Product Roadmap 2026 | SteerCo</a:t>
+            </a:r>
+            <a:endParaRPr lang="en-US" sz="800" dirty="0"/>
+          </a:p>
+        </p:txBody>
+      </p:sp>
+      <p:sp>
+        <p:nvSpPr>
+          <p:cNvPr id="52" name="Text 48"/>
+          <p:cNvSpPr/>
+          <p:nvPr/>
+        </p:nvSpPr>
+        <p:spPr>
+          <a:xfrm>
+            <a:off x="8686800" y="4974336"/>
+            <a:ext cx="365760" cy="164592"/>
+          </a:xfrm>
+          <a:prstGeom prst="rect">
+            <a:avLst/>
+          </a:prstGeom>
+          <a:noFill/>
+          <a:ln/>
+        </p:spPr>
+        <p:txBody>
+          <a:bodyPr wrap="square" rtlCol="0" anchor="ctr"/>
+          <a:lstStyle/>
+          <a:p>
+            <a:pPr algn="r" indent="0" marL="0">
+              <a:buNone/>
+            </a:pPr>
+            <a:r>
+              <a:rPr lang="en-US" sz="800" dirty="0">
+                <a:solidFill>
+                  <a:srgbClr val="D0D7D7"/>
+                </a:solidFill>
+                <a:latin typeface="Calibri" pitchFamily="34" charset="0"/>
+                <a:ea typeface="Calibri" pitchFamily="34" charset="-122"/>
+                <a:cs typeface="Calibri" pitchFamily="34" charset="-120"/>
+              </a:rPr>
+              <a:t>5</a:t>
+            </a:r>
+            <a:endParaRPr lang="en-US" sz="800" dirty="0"/>
           </a:p>
         </p:txBody>
       </p:sp>
@@ -11313,104 +10999,6 @@
         </p:nvSpPr>
         <p:spPr>
           <a:xfrm>
-            <a:off x="0" y="4983480"/>
-            <a:ext cx="9144000" cy="160020"/>
-          </a:xfrm>
-          <a:prstGeom prst="rect">
-            <a:avLst/>
-          </a:prstGeom>
-          <a:solidFill>
-            <a:srgbClr val="123836"/>
-          </a:solidFill>
-          <a:ln/>
-        </p:spPr>
-      </p:sp>
-      <p:sp>
-        <p:nvSpPr>
-          <p:cNvPr id="8" name="Text 6"/>
-          <p:cNvSpPr/>
-          <p:nvPr/>
-        </p:nvSpPr>
-        <p:spPr>
-          <a:xfrm>
-            <a:off x="137160" y="4974336"/>
-            <a:ext cx="6400800" cy="164592"/>
-          </a:xfrm>
-          <a:prstGeom prst="rect">
-            <a:avLst/>
-          </a:prstGeom>
-          <a:noFill/>
-          <a:ln/>
-        </p:spPr>
-        <p:txBody>
-          <a:bodyPr wrap="square" rtlCol="0" anchor="ctr"/>
-          <a:lstStyle/>
-          <a:p>
-            <a:pPr indent="0" marL="0">
-              <a:buNone/>
-            </a:pPr>
-            <a:r>
-              <a:rPr lang="en-US" sz="800" dirty="0">
-                <a:solidFill>
-                  <a:srgbClr val="D0D7D7"/>
-                </a:solidFill>
-                <a:latin typeface="Calibri" pitchFamily="34" charset="0"/>
-                <a:ea typeface="Calibri" pitchFamily="34" charset="-122"/>
-                <a:cs typeface="Calibri" pitchFamily="34" charset="-120"/>
-              </a:rPr>
-              <a:t>Solon Tax Product Roadmap 2026 | SteerCo</a:t>
-            </a:r>
-            <a:endParaRPr lang="en-US" sz="800" dirty="0"/>
-          </a:p>
-        </p:txBody>
-      </p:sp>
-      <p:sp>
-        <p:nvSpPr>
-          <p:cNvPr id="9" name="Text 7"/>
-          <p:cNvSpPr/>
-          <p:nvPr/>
-        </p:nvSpPr>
-        <p:spPr>
-          <a:xfrm>
-            <a:off x="8686800" y="4974336"/>
-            <a:ext cx="365760" cy="164592"/>
-          </a:xfrm>
-          <a:prstGeom prst="rect">
-            <a:avLst/>
-          </a:prstGeom>
-          <a:noFill/>
-          <a:ln/>
-        </p:spPr>
-        <p:txBody>
-          <a:bodyPr wrap="square" rtlCol="0" anchor="ctr"/>
-          <a:lstStyle/>
-          <a:p>
-            <a:pPr algn="r" indent="0" marL="0">
-              <a:buNone/>
-            </a:pPr>
-            <a:r>
-              <a:rPr lang="en-US" sz="800" dirty="0">
-                <a:solidFill>
-                  <a:srgbClr val="D0D7D7"/>
-                </a:solidFill>
-                <a:latin typeface="Calibri" pitchFamily="34" charset="0"/>
-                <a:ea typeface="Calibri" pitchFamily="34" charset="-122"/>
-                <a:cs typeface="Calibri" pitchFamily="34" charset="-120"/>
-              </a:rPr>
-              <a:t>6</a:t>
-            </a:r>
-            <a:endParaRPr lang="en-US" sz="800" dirty="0"/>
-          </a:p>
-        </p:txBody>
-      </p:sp>
-      <p:sp>
-        <p:nvSpPr>
-          <p:cNvPr id="10" name="Shape 8"/>
-          <p:cNvSpPr/>
-          <p:nvPr/>
-        </p:nvSpPr>
-        <p:spPr>
-          <a:xfrm>
             <a:off x="228600" y="1005840"/>
             <a:ext cx="2011680" cy="914400"/>
           </a:xfrm>
@@ -11437,14 +11025,14 @@
       </p:sp>
       <p:sp>
         <p:nvSpPr>
-          <p:cNvPr id="11" name="Shape 9"/>
+          <p:cNvPr id="8" name="Shape 6"/>
           <p:cNvSpPr/>
           <p:nvPr/>
         </p:nvSpPr>
         <p:spPr>
           <a:xfrm>
             <a:off x="228600" y="1005840"/>
-            <a:ext cx="2011680" cy="54864"/>
+            <a:ext cx="54864" cy="914400"/>
           </a:xfrm>
           <a:prstGeom prst="rect">
             <a:avLst/>
@@ -11457,7 +11045,7 @@
       </p:sp>
       <p:sp>
         <p:nvSpPr>
-          <p:cNvPr id="12" name="Text 10"/>
+          <p:cNvPr id="9" name="Text 7"/>
           <p:cNvSpPr/>
           <p:nvPr/>
         </p:nvSpPr>
@@ -11496,7 +11084,7 @@
       </p:sp>
       <p:sp>
         <p:nvSpPr>
-          <p:cNvPr id="13" name="Text 11"/>
+          <p:cNvPr id="10" name="Text 8"/>
           <p:cNvSpPr/>
           <p:nvPr/>
         </p:nvSpPr>
@@ -11535,7 +11123,7 @@
       </p:sp>
       <p:sp>
         <p:nvSpPr>
-          <p:cNvPr id="14" name="Text 12"/>
+          <p:cNvPr id="11" name="Text 9"/>
           <p:cNvSpPr/>
           <p:nvPr/>
         </p:nvSpPr>
@@ -11574,7 +11162,7 @@
       </p:sp>
       <p:sp>
         <p:nvSpPr>
-          <p:cNvPr id="15" name="Shape 13"/>
+          <p:cNvPr id="12" name="Shape 10"/>
           <p:cNvSpPr/>
           <p:nvPr/>
         </p:nvSpPr>
@@ -11606,14 +11194,14 @@
       </p:sp>
       <p:sp>
         <p:nvSpPr>
-          <p:cNvPr id="16" name="Shape 14"/>
+          <p:cNvPr id="13" name="Shape 11"/>
           <p:cNvSpPr/>
           <p:nvPr/>
         </p:nvSpPr>
         <p:spPr>
           <a:xfrm>
             <a:off x="2414016" y="1005840"/>
-            <a:ext cx="2011680" cy="54864"/>
+            <a:ext cx="54864" cy="914400"/>
           </a:xfrm>
           <a:prstGeom prst="rect">
             <a:avLst/>
@@ -11626,7 +11214,7 @@
       </p:sp>
       <p:sp>
         <p:nvSpPr>
-          <p:cNvPr id="17" name="Text 15"/>
+          <p:cNvPr id="14" name="Text 12"/>
           <p:cNvSpPr/>
           <p:nvPr/>
         </p:nvSpPr>
@@ -11665,7 +11253,7 @@
       </p:sp>
       <p:sp>
         <p:nvSpPr>
-          <p:cNvPr id="18" name="Text 16"/>
+          <p:cNvPr id="15" name="Text 13"/>
           <p:cNvSpPr/>
           <p:nvPr/>
         </p:nvSpPr>
@@ -11704,7 +11292,7 @@
       </p:sp>
       <p:sp>
         <p:nvSpPr>
-          <p:cNvPr id="19" name="Text 17"/>
+          <p:cNvPr id="16" name="Text 14"/>
           <p:cNvSpPr/>
           <p:nvPr/>
         </p:nvSpPr>
@@ -11743,7 +11331,7 @@
       </p:sp>
       <p:sp>
         <p:nvSpPr>
-          <p:cNvPr id="20" name="Shape 18"/>
+          <p:cNvPr id="17" name="Shape 15"/>
           <p:cNvSpPr/>
           <p:nvPr/>
         </p:nvSpPr>
@@ -11775,14 +11363,14 @@
       </p:sp>
       <p:sp>
         <p:nvSpPr>
-          <p:cNvPr id="21" name="Shape 19"/>
+          <p:cNvPr id="18" name="Shape 16"/>
           <p:cNvSpPr/>
           <p:nvPr/>
         </p:nvSpPr>
         <p:spPr>
           <a:xfrm>
             <a:off x="4599432" y="1005840"/>
-            <a:ext cx="2011680" cy="54864"/>
+            <a:ext cx="54864" cy="914400"/>
           </a:xfrm>
           <a:prstGeom prst="rect">
             <a:avLst/>
@@ -11795,7 +11383,7 @@
       </p:sp>
       <p:sp>
         <p:nvSpPr>
-          <p:cNvPr id="22" name="Text 20"/>
+          <p:cNvPr id="19" name="Text 17"/>
           <p:cNvSpPr/>
           <p:nvPr/>
         </p:nvSpPr>
@@ -11834,7 +11422,7 @@
       </p:sp>
       <p:sp>
         <p:nvSpPr>
-          <p:cNvPr id="23" name="Text 21"/>
+          <p:cNvPr id="20" name="Text 18"/>
           <p:cNvSpPr/>
           <p:nvPr/>
         </p:nvSpPr>
@@ -11873,7 +11461,7 @@
       </p:sp>
       <p:sp>
         <p:nvSpPr>
-          <p:cNvPr id="24" name="Text 22"/>
+          <p:cNvPr id="21" name="Text 19"/>
           <p:cNvSpPr/>
           <p:nvPr/>
         </p:nvSpPr>
@@ -11912,7 +11500,7 @@
       </p:sp>
       <p:sp>
         <p:nvSpPr>
-          <p:cNvPr id="25" name="Shape 23"/>
+          <p:cNvPr id="22" name="Shape 20"/>
           <p:cNvSpPr/>
           <p:nvPr/>
         </p:nvSpPr>
@@ -11944,14 +11532,14 @@
       </p:sp>
       <p:sp>
         <p:nvSpPr>
-          <p:cNvPr id="26" name="Shape 24"/>
+          <p:cNvPr id="23" name="Shape 21"/>
           <p:cNvSpPr/>
           <p:nvPr/>
         </p:nvSpPr>
         <p:spPr>
           <a:xfrm>
             <a:off x="6784848" y="1005840"/>
-            <a:ext cx="2011680" cy="54864"/>
+            <a:ext cx="54864" cy="914400"/>
           </a:xfrm>
           <a:prstGeom prst="rect">
             <a:avLst/>
@@ -11964,7 +11552,7 @@
       </p:sp>
       <p:sp>
         <p:nvSpPr>
-          <p:cNvPr id="27" name="Text 25"/>
+          <p:cNvPr id="24" name="Text 22"/>
           <p:cNvSpPr/>
           <p:nvPr/>
         </p:nvSpPr>
@@ -12003,7 +11591,7 @@
       </p:sp>
       <p:sp>
         <p:nvSpPr>
-          <p:cNvPr id="28" name="Text 26"/>
+          <p:cNvPr id="25" name="Text 23"/>
           <p:cNvSpPr/>
           <p:nvPr/>
         </p:nvSpPr>
@@ -12042,7 +11630,7 @@
       </p:sp>
       <p:sp>
         <p:nvSpPr>
-          <p:cNvPr id="29" name="Text 27"/>
+          <p:cNvPr id="26" name="Text 24"/>
           <p:cNvSpPr/>
           <p:nvPr/>
         </p:nvSpPr>
@@ -12081,7 +11669,7 @@
       </p:sp>
       <p:sp>
         <p:nvSpPr>
-          <p:cNvPr id="30" name="Text 28"/>
+          <p:cNvPr id="27" name="Text 25"/>
           <p:cNvSpPr/>
           <p:nvPr/>
         </p:nvSpPr>
@@ -12108,6 +11696,9 @@
                 <a:solidFill>
                   <a:srgbClr val="FF6359"/>
                 </a:solidFill>
+                <a:latin typeface="Calibri" pitchFamily="34" charset="0"/>
+                <a:ea typeface="Calibri" pitchFamily="34" charset="-122"/>
+                <a:cs typeface="Calibri" pitchFamily="34" charset="-120"/>
               </a:rPr>
               <a:t>Business Scope</a:t>
             </a:r>
@@ -12117,7 +11708,7 @@
       </p:sp>
       <p:sp>
         <p:nvSpPr>
-          <p:cNvPr id="31" name="Text 29"/>
+          <p:cNvPr id="28" name="Text 26"/>
           <p:cNvSpPr/>
           <p:nvPr/>
         </p:nvSpPr>
@@ -12144,6 +11735,9 @@
                 <a:solidFill>
                   <a:srgbClr val="141E1E"/>
                 </a:solidFill>
+                <a:latin typeface="Calibri" pitchFamily="34" charset="0"/>
+                <a:ea typeface="Calibri" pitchFamily="34" charset="-122"/>
+                <a:cs typeface="Calibri" pitchFamily="34" charset="-120"/>
               </a:rPr>
               <a:t>Manages the generation, issuance, and tracking of tax bills and formal assessments, alongside configurable installment plan management. Enables revenue authorities to systematically collect outstanding liabilities while offering structured repayment arrangements to taxpayers.</a:t>
             </a:r>
@@ -12153,13 +11747,13 @@
       </p:sp>
       <p:sp>
         <p:nvSpPr>
-          <p:cNvPr id="32" name="Text 30"/>
-          <p:cNvSpPr/>
-          <p:nvPr/>
-        </p:nvSpPr>
-        <p:spPr>
-          <a:xfrm>
-            <a:off x="228600" y="2944368"/>
+          <p:cNvPr id="29" name="Text 27"/>
+          <p:cNvSpPr/>
+          <p:nvPr/>
+        </p:nvSpPr>
+        <p:spPr>
+          <a:xfrm>
+            <a:off x="228600" y="2990088"/>
             <a:ext cx="2743200" cy="201168"/>
           </a:xfrm>
           <a:prstGeom prst="rect">
@@ -12180,6 +11774,9 @@
                 <a:solidFill>
                   <a:srgbClr val="FF6359"/>
                 </a:solidFill>
+                <a:latin typeface="Calibri" pitchFamily="34" charset="0"/>
+                <a:ea typeface="Calibri" pitchFamily="34" charset="-122"/>
+                <a:cs typeface="Calibri" pitchFamily="34" charset="-120"/>
               </a:rPr>
               <a:t>Key Investment Benefits</a:t>
             </a:r>
@@ -12189,13 +11786,13 @@
       </p:sp>
       <p:sp>
         <p:nvSpPr>
-          <p:cNvPr id="33" name="Text 31"/>
-          <p:cNvSpPr/>
-          <p:nvPr/>
-        </p:nvSpPr>
-        <p:spPr>
-          <a:xfrm>
-            <a:off x="228600" y="3172968"/>
+          <p:cNvPr id="30" name="Text 28"/>
+          <p:cNvSpPr/>
+          <p:nvPr/>
+        </p:nvSpPr>
+        <p:spPr>
+          <a:xfrm>
+            <a:off x="228600" y="3218688"/>
             <a:ext cx="2743200" cy="749808"/>
           </a:xfrm>
           <a:prstGeom prst="rect">
@@ -12217,6 +11814,9 @@
                 <a:solidFill>
                   <a:srgbClr val="4A5C5A"/>
                 </a:solidFill>
+                <a:latin typeface="Calibri" pitchFamily="34" charset="0"/>
+                <a:ea typeface="Calibri" pitchFamily="34" charset="-122"/>
+                <a:cs typeface="Calibri" pitchFamily="34" charset="-120"/>
               </a:rPr>
               <a:t>Automated billing reduces manual officer workload and accelerates revenue collection cycles</a:t>
             </a:r>
@@ -12232,6 +11832,9 @@
                 <a:solidFill>
                   <a:srgbClr val="4A5C5A"/>
                 </a:solidFill>
+                <a:latin typeface="Calibri" pitchFamily="34" charset="0"/>
+                <a:ea typeface="Calibri" pitchFamily="34" charset="-122"/>
+                <a:cs typeface="Calibri" pitchFamily="34" charset="-120"/>
               </a:rPr>
               <a:t>Structured installment plans increase voluntary compliance and recovery rates</a:t>
             </a:r>
@@ -12247,6 +11850,9 @@
                 <a:solidFill>
                   <a:srgbClr val="4A5C5A"/>
                 </a:solidFill>
+                <a:latin typeface="Calibri" pitchFamily="34" charset="0"/>
+                <a:ea typeface="Calibri" pitchFamily="34" charset="-122"/>
+                <a:cs typeface="Calibri" pitchFamily="34" charset="-120"/>
               </a:rPr>
               <a:t>Formal assessment workflows create enforceable legal liability records</a:t>
             </a:r>
@@ -12262,6 +11868,9 @@
                 <a:solidFill>
                   <a:srgbClr val="4A5C5A"/>
                 </a:solidFill>
+                <a:latin typeface="Calibri" pitchFamily="34" charset="0"/>
+                <a:ea typeface="Calibri" pitchFamily="34" charset="-122"/>
+                <a:cs typeface="Calibri" pitchFamily="34" charset="-120"/>
               </a:rPr>
               <a:t>Reduces revenue leakage by ensuring all liabilities are captured and tracked</a:t>
             </a:r>
@@ -12271,14 +11880,14 @@
       </p:sp>
       <p:sp>
         <p:nvSpPr>
-          <p:cNvPr id="34" name="Text 32"/>
-          <p:cNvSpPr/>
-          <p:nvPr/>
-        </p:nvSpPr>
-        <p:spPr>
-          <a:xfrm>
-            <a:off x="3108960" y="1965960"/>
-            <a:ext cx="3017520" cy="228600"/>
+          <p:cNvPr id="31" name="Text 29"/>
+          <p:cNvSpPr/>
+          <p:nvPr/>
+        </p:nvSpPr>
+        <p:spPr>
+          <a:xfrm>
+            <a:off x="6263640" y="1965960"/>
+            <a:ext cx="2651760" cy="228600"/>
           </a:xfrm>
           <a:prstGeom prst="rect">
             <a:avLst/>
@@ -12298,8 +11907,11 @@
                 <a:solidFill>
                   <a:srgbClr val="FF6359"/>
                 </a:solidFill>
-              </a:rPr>
-              <a:t>Estimated Effort by Feature Area</a:t>
+                <a:latin typeface="Calibri" pitchFamily="34" charset="0"/>
+                <a:ea typeface="Calibri" pitchFamily="34" charset="-122"/>
+                <a:cs typeface="Calibri" pitchFamily="34" charset="-120"/>
+              </a:rPr>
+              <a:t>Priority Distribution</a:t>
             </a:r>
             <a:endParaRPr lang="en-US" sz="1000" dirty="0"/>
           </a:p>
@@ -12307,13 +11919,13 @@
       </p:sp>
       <p:graphicFrame>
         <p:nvGraphicFramePr>
-          <p:cNvPr id="35" name="Chart 0" descr=""/>
+          <p:cNvPr id="32" name="Chart 0" descr=""/>
           <p:cNvGraphicFramePr/>
           <p:nvPr/>
         </p:nvGraphicFramePr>
         <p:xfrm>
-          <a:off x="3108960" y="2212848"/>
-          <a:ext cx="3017520" cy="1828800"/>
+          <a:off x="6263640" y="2212848"/>
+          <a:ext cx="2651760" cy="914400"/>
         </p:xfrm>
         <a:graphic xmlns:a="http://schemas.openxmlformats.org/drawingml/2006/main">
           <a:graphicData uri="http://schemas.openxmlformats.org/drawingml/2006/chart">
@@ -12323,14 +11935,14 @@
       </p:graphicFrame>
       <p:sp>
         <p:nvSpPr>
-          <p:cNvPr id="36" name="Text 33"/>
-          <p:cNvSpPr/>
-          <p:nvPr/>
-        </p:nvSpPr>
-        <p:spPr>
-          <a:xfrm>
-            <a:off x="6263640" y="1965960"/>
-            <a:ext cx="2651760" cy="228600"/>
+          <p:cNvPr id="33" name="Text 30"/>
+          <p:cNvSpPr/>
+          <p:nvPr/>
+        </p:nvSpPr>
+        <p:spPr>
+          <a:xfrm>
+            <a:off x="3108960" y="3931920"/>
+            <a:ext cx="3017520" cy="228600"/>
           </a:xfrm>
           <a:prstGeom prst="rect">
             <a:avLst/>
@@ -12350,68 +11962,95 @@
                 <a:solidFill>
                   <a:srgbClr val="FF6359"/>
                 </a:solidFill>
-              </a:rPr>
-              <a:t>Priority Distribution</a:t>
+                <a:latin typeface="Calibri" pitchFamily="34" charset="0"/>
+                <a:ea typeface="Calibri" pitchFamily="34" charset="-122"/>
+                <a:cs typeface="Calibri" pitchFamily="34" charset="-120"/>
+              </a:rPr>
+              <a:t>Talking Points</a:t>
             </a:r>
             <a:endParaRPr lang="en-US" sz="1000" dirty="0"/>
           </a:p>
         </p:txBody>
       </p:sp>
-      <p:graphicFrame>
-        <p:nvGraphicFramePr>
-          <p:cNvPr id="37" name="Chart 1" descr=""/>
-          <p:cNvGraphicFramePr/>
-          <p:nvPr/>
-        </p:nvGraphicFramePr>
-        <p:xfrm>
-          <a:off x="6263640" y="2212848"/>
-          <a:ext cx="2651760" cy="914400"/>
-        </p:xfrm>
-        <a:graphic xmlns:a="http://schemas.openxmlformats.org/drawingml/2006/main">
-          <a:graphicData uri="http://schemas.openxmlformats.org/drawingml/2006/chart">
-            <c:chart xmlns:c="http://schemas.openxmlformats.org/drawingml/2006/chart" r:id="rId2"/>
-          </a:graphicData>
-        </a:graphic>
-      </p:graphicFrame>
-      <p:sp>
-        <p:nvSpPr>
-          <p:cNvPr id="38" name="Text 34"/>
-          <p:cNvSpPr/>
-          <p:nvPr/>
-        </p:nvSpPr>
-        <p:spPr>
-          <a:xfrm>
-            <a:off x="228600" y="3886200"/>
-            <a:ext cx="914400" cy="201168"/>
-          </a:xfrm>
-          <a:prstGeom prst="rect">
-            <a:avLst/>
-          </a:prstGeom>
-          <a:noFill/>
-          <a:ln/>
-        </p:spPr>
-        <p:txBody>
-          <a:bodyPr wrap="square" rtlCol="0" anchor="ctr"/>
-          <a:lstStyle/>
-          <a:p>
-            <a:pPr indent="0" marL="0">
-              <a:buNone/>
-            </a:pPr>
-            <a:r>
-              <a:rPr lang="en-US" sz="1000" b="1" dirty="0">
-                <a:solidFill>
-                  <a:srgbClr val="FF6359"/>
-                </a:solidFill>
-              </a:rPr>
-              <a:t>PI Planning</a:t>
-            </a:r>
-            <a:endParaRPr lang="en-US" sz="1000" dirty="0"/>
-          </a:p>
-        </p:txBody>
-      </p:sp>
-      <p:sp>
-        <p:nvSpPr>
-          <p:cNvPr id="39" name="Shape 35"/>
+      <p:sp>
+        <p:nvSpPr>
+          <p:cNvPr id="34" name="Text 31"/>
+          <p:cNvSpPr/>
+          <p:nvPr/>
+        </p:nvSpPr>
+        <p:spPr>
+          <a:xfrm>
+            <a:off x="3108960" y="4160520"/>
+            <a:ext cx="3017520" cy="640080"/>
+          </a:xfrm>
+          <a:prstGeom prst="rect">
+            <a:avLst/>
+          </a:prstGeom>
+          <a:noFill/>
+          <a:ln/>
+        </p:spPr>
+        <p:txBody>
+          <a:bodyPr wrap="square" rtlCol="0" anchor="ctr"/>
+          <a:lstStyle/>
+          <a:p>
+            <a:pPr marL="342900" indent="-342900">
+              <a:buSzPct val="100000"/>
+              <a:buChar char="•"/>
+            </a:pPr>
+            <a:r>
+              <a:rPr lang="en-US" sz="900" dirty="0">
+                <a:solidFill>
+                  <a:srgbClr val="4A5C5A"/>
+                </a:solidFill>
+                <a:latin typeface="Calibri" pitchFamily="34" charset="0"/>
+                <a:ea typeface="Calibri" pitchFamily="34" charset="-122"/>
+                <a:cs typeface="Calibri" pitchFamily="34" charset="-120"/>
+              </a:rPr>
+              <a:t>Billing and assessments are prerequisites for collections — sequence with Registration PI delivery</a:t>
+            </a:r>
+            <a:endParaRPr lang="en-US" sz="900" dirty="0"/>
+          </a:p>
+          <a:p>
+            <a:pPr marL="342900" indent="-342900">
+              <a:buSzPct val="100000"/>
+              <a:buChar char="•"/>
+            </a:pPr>
+            <a:r>
+              <a:rPr lang="en-US" sz="900" dirty="0">
+                <a:solidFill>
+                  <a:srgbClr val="4A5C5A"/>
+                </a:solidFill>
+                <a:latin typeface="Calibri" pitchFamily="34" charset="0"/>
+                <a:ea typeface="Calibri" pitchFamily="34" charset="-122"/>
+                <a:cs typeface="Calibri" pitchFamily="34" charset="-120"/>
+              </a:rPr>
+              <a:t>Installment plan scope is small and can provide quick win value in PI29</a:t>
+            </a:r>
+            <a:endParaRPr lang="en-US" sz="900" dirty="0"/>
+          </a:p>
+          <a:p>
+            <a:pPr marL="342900" indent="-342900">
+              <a:buSzPct val="100000"/>
+              <a:buChar char="•"/>
+            </a:pPr>
+            <a:r>
+              <a:rPr lang="en-US" sz="900" dirty="0">
+                <a:solidFill>
+                  <a:srgbClr val="4A5C5A"/>
+                </a:solidFill>
+                <a:latin typeface="Calibri" pitchFamily="34" charset="0"/>
+                <a:ea typeface="Calibri" pitchFamily="34" charset="-122"/>
+                <a:cs typeface="Calibri" pitchFamily="34" charset="-120"/>
+              </a:rPr>
+              <a:t>No features currently started — PI28 kickoff planning required immediately</a:t>
+            </a:r>
+            <a:endParaRPr lang="en-US" sz="900" dirty="0"/>
+          </a:p>
+        </p:txBody>
+      </p:sp>
+      <p:sp>
+        <p:nvSpPr>
+          <p:cNvPr id="35" name="Shape 32"/>
           <p:cNvSpPr/>
           <p:nvPr/>
         </p:nvSpPr>
@@ -12431,7 +12070,7 @@
       </p:sp>
       <p:sp>
         <p:nvSpPr>
-          <p:cNvPr id="40" name="Shape 36"/>
+          <p:cNvPr id="36" name="Shape 33"/>
           <p:cNvSpPr/>
           <p:nvPr/>
         </p:nvSpPr>
@@ -12451,14 +12090,14 @@
       </p:sp>
       <p:sp>
         <p:nvSpPr>
-          <p:cNvPr id="41" name="Text 37"/>
+          <p:cNvPr id="37" name="Text 34"/>
           <p:cNvSpPr/>
           <p:nvPr/>
         </p:nvSpPr>
         <p:spPr>
           <a:xfrm>
             <a:off x="137160" y="4617720"/>
-            <a:ext cx="8869680" cy="347472"/>
+            <a:ext cx="8915400" cy="347472"/>
           </a:xfrm>
           <a:prstGeom prst="rect">
             <a:avLst/>
@@ -12478,10 +12117,111 @@
                 <a:solidFill>
                   <a:srgbClr val="D0D7D7"/>
                 </a:solidFill>
+                <a:latin typeface="Calibri" pitchFamily="34" charset="0"/>
+                <a:ea typeface="Calibri" pitchFamily="34" charset="-122"/>
+                <a:cs typeface="Calibri" pitchFamily="34" charset="-120"/>
               </a:rPr>
               <a:t>Prerequisite for collections — sequence with Registration   ·   Installment plans = quick win in PI29   ·   No work started — PI28 kickoff required now</a:t>
             </a:r>
             <a:endParaRPr lang="en-US" sz="750" dirty="0"/>
+          </a:p>
+        </p:txBody>
+      </p:sp>
+      <p:sp>
+        <p:nvSpPr>
+          <p:cNvPr id="38" name="Shape 35"/>
+          <p:cNvSpPr/>
+          <p:nvPr/>
+        </p:nvSpPr>
+        <p:spPr>
+          <a:xfrm>
+            <a:off x="0" y="4983480"/>
+            <a:ext cx="9144000" cy="160020"/>
+          </a:xfrm>
+          <a:prstGeom prst="rect">
+            <a:avLst/>
+          </a:prstGeom>
+          <a:solidFill>
+            <a:srgbClr val="123836"/>
+          </a:solidFill>
+          <a:ln/>
+        </p:spPr>
+      </p:sp>
+      <p:sp>
+        <p:nvSpPr>
+          <p:cNvPr id="39" name="Text 36"/>
+          <p:cNvSpPr/>
+          <p:nvPr/>
+        </p:nvSpPr>
+        <p:spPr>
+          <a:xfrm>
+            <a:off x="137160" y="4974336"/>
+            <a:ext cx="6400800" cy="164592"/>
+          </a:xfrm>
+          <a:prstGeom prst="rect">
+            <a:avLst/>
+          </a:prstGeom>
+          <a:noFill/>
+          <a:ln/>
+        </p:spPr>
+        <p:txBody>
+          <a:bodyPr wrap="square" rtlCol="0" anchor="ctr"/>
+          <a:lstStyle/>
+          <a:p>
+            <a:pPr indent="0" marL="0">
+              <a:buNone/>
+            </a:pPr>
+            <a:r>
+              <a:rPr lang="en-US" sz="800" dirty="0">
+                <a:solidFill>
+                  <a:srgbClr val="D0D7D7"/>
+                </a:solidFill>
+                <a:latin typeface="Calibri" pitchFamily="34" charset="0"/>
+                <a:ea typeface="Calibri" pitchFamily="34" charset="-122"/>
+                <a:cs typeface="Calibri" pitchFamily="34" charset="-120"/>
+              </a:rPr>
+              <a:t>Solon Tax Product Roadmap 2026 | SteerCo</a:t>
+            </a:r>
+            <a:endParaRPr lang="en-US" sz="800" dirty="0"/>
+          </a:p>
+        </p:txBody>
+      </p:sp>
+      <p:sp>
+        <p:nvSpPr>
+          <p:cNvPr id="40" name="Text 37"/>
+          <p:cNvSpPr/>
+          <p:nvPr/>
+        </p:nvSpPr>
+        <p:spPr>
+          <a:xfrm>
+            <a:off x="8686800" y="4974336"/>
+            <a:ext cx="365760" cy="164592"/>
+          </a:xfrm>
+          <a:prstGeom prst="rect">
+            <a:avLst/>
+          </a:prstGeom>
+          <a:noFill/>
+          <a:ln/>
+        </p:spPr>
+        <p:txBody>
+          <a:bodyPr wrap="square" rtlCol="0" anchor="ctr"/>
+          <a:lstStyle/>
+          <a:p>
+            <a:pPr algn="r" indent="0" marL="0">
+              <a:buNone/>
+            </a:pPr>
+            <a:r>
+              <a:rPr lang="en-US" sz="800" dirty="0">
+                <a:solidFill>
+                  <a:srgbClr val="D0D7D7"/>
+                </a:solidFill>
+                <a:latin typeface="Calibri" pitchFamily="34" charset="0"/>
+                <a:ea typeface="Calibri" pitchFamily="34" charset="-122"/>
+                <a:cs typeface="Calibri" pitchFamily="34" charset="-120"/>
+              </a:rPr>
+              <a:t>6</a:t>
+            </a:r>
+            <a:endParaRPr lang="en-US" sz="800" dirty="0"/>
           </a:p>
         </p:txBody>
       </p:sp>
@@ -12496,2354 +12236,6 @@
 <file path=ppt/slides/slide7.xml><?xml version="1.0" encoding="utf-8"?>
 <p:sld xmlns:a="http://schemas.openxmlformats.org/drawingml/2006/main" xmlns:r="http://schemas.openxmlformats.org/officeDocument/2006/relationships" xmlns:p="http://schemas.openxmlformats.org/presentationml/2006/main">
   <p:cSld name="Slide 7">
-    <p:bg>
-      <p:bgPr>
-        <a:solidFill>
-          <a:srgbClr val="F4F6F6"/>
-        </a:solidFill>
-      </p:bgPr>
-    </p:bg>
-    <p:spTree>
-      <p:nvGrpSpPr>
-        <p:cNvPr id="1" name=""/>
-        <p:cNvGrpSpPr/>
-        <p:nvPr/>
-      </p:nvGrpSpPr>
-      <p:grpSpPr>
-        <a:xfrm>
-          <a:off x="0" y="0"/>
-          <a:ext cx="0" cy="0"/>
-          <a:chOff x="0" y="0"/>
-          <a:chExt cx="0" cy="0"/>
-        </a:xfrm>
-      </p:grpSpPr>
-      <p:sp>
-        <p:nvSpPr>
-          <p:cNvPr id="2" name="Shape 0"/>
-          <p:cNvSpPr/>
-          <p:nvPr/>
-        </p:nvSpPr>
-        <p:spPr>
-          <a:xfrm>
-            <a:off x="0" y="0"/>
-            <a:ext cx="9144000" cy="960120"/>
-          </a:xfrm>
-          <a:prstGeom prst="rect">
-            <a:avLst/>
-          </a:prstGeom>
-          <a:solidFill>
-            <a:srgbClr val="123836"/>
-          </a:solidFill>
-          <a:ln/>
-        </p:spPr>
-      </p:sp>
-      <p:sp>
-        <p:nvSpPr>
-          <p:cNvPr id="3" name="Shape 1"/>
-          <p:cNvSpPr/>
-          <p:nvPr/>
-        </p:nvSpPr>
-        <p:spPr>
-          <a:xfrm>
-            <a:off x="0" y="0"/>
-            <a:ext cx="73152" cy="960120"/>
-          </a:xfrm>
-          <a:prstGeom prst="rect">
-            <a:avLst/>
-          </a:prstGeom>
-          <a:solidFill>
-            <a:srgbClr val="FF6359"/>
-          </a:solidFill>
-          <a:ln/>
-        </p:spPr>
-      </p:sp>
-      <p:sp>
-        <p:nvSpPr>
-          <p:cNvPr id="4" name="Text 2"/>
-          <p:cNvSpPr/>
-          <p:nvPr/>
-        </p:nvSpPr>
-        <p:spPr>
-          <a:xfrm>
-            <a:off x="182880" y="64008"/>
-            <a:ext cx="6400800" cy="502920"/>
-          </a:xfrm>
-          <a:prstGeom prst="rect">
-            <a:avLst/>
-          </a:prstGeom>
-          <a:noFill/>
-          <a:ln/>
-        </p:spPr>
-        <p:txBody>
-          <a:bodyPr wrap="square" rtlCol="0" anchor="ctr"/>
-          <a:lstStyle/>
-          <a:p>
-            <a:pPr indent="0" marL="0">
-              <a:buNone/>
-            </a:pPr>
-            <a:r>
-              <a:rPr lang="en-US" sz="2000" b="1" dirty="0">
-                <a:solidFill>
-                  <a:srgbClr val="FFFFFF"/>
-                </a:solidFill>
-                <a:latin typeface="Calibri" pitchFamily="34" charset="0"/>
-                <a:ea typeface="Calibri" pitchFamily="34" charset="-122"/>
-                <a:cs typeface="Calibri" pitchFamily="34" charset="-120"/>
-              </a:rPr>
-              <a:t>Remaining Initiatives — Core Revenue Management</a:t>
-            </a:r>
-            <a:endParaRPr lang="en-US" sz="2000" dirty="0"/>
-          </a:p>
-        </p:txBody>
-      </p:sp>
-      <p:sp>
-        <p:nvSpPr>
-          <p:cNvPr id="5" name="Text 3"/>
-          <p:cNvSpPr/>
-          <p:nvPr/>
-        </p:nvSpPr>
-        <p:spPr>
-          <a:xfrm>
-            <a:off x="182880" y="548640"/>
-            <a:ext cx="8229600" cy="347472"/>
-          </a:xfrm>
-          <a:prstGeom prst="rect">
-            <a:avLst/>
-          </a:prstGeom>
-          <a:noFill/>
-          <a:ln/>
-        </p:spPr>
-        <p:txBody>
-          <a:bodyPr wrap="square" rtlCol="0" anchor="ctr"/>
-          <a:lstStyle/>
-          <a:p>
-            <a:pPr indent="0" marL="0">
-              <a:buNone/>
-            </a:pPr>
-            <a:r>
-              <a:rPr lang="en-US" sz="1100" dirty="0">
-                <a:solidFill>
-                  <a:srgbClr val="73AA87"/>
-                </a:solidFill>
-                <a:latin typeface="Calibri" pitchFamily="34" charset="0"/>
-                <a:ea typeface="Calibri" pitchFamily="34" charset="-122"/>
-                <a:cs typeface="Calibri" pitchFamily="34" charset="-120"/>
-              </a:rPr>
-              <a:t>Exemptions | Penalty &amp; Interest | Tax Accounts</a:t>
-            </a:r>
-            <a:endParaRPr lang="en-US" sz="1100" dirty="0"/>
-          </a:p>
-        </p:txBody>
-      </p:sp>
-      <p:sp>
-        <p:nvSpPr>
-          <p:cNvPr id="6" name="Text 4"/>
-          <p:cNvSpPr/>
-          <p:nvPr/>
-        </p:nvSpPr>
-        <p:spPr>
-          <a:xfrm>
-            <a:off x="6858000" y="73152"/>
-            <a:ext cx="2103120" cy="365760"/>
-          </a:xfrm>
-          <a:prstGeom prst="rect">
-            <a:avLst/>
-          </a:prstGeom>
-          <a:noFill/>
-          <a:ln/>
-        </p:spPr>
-        <p:txBody>
-          <a:bodyPr wrap="square" rtlCol="0" anchor="ctr"/>
-          <a:lstStyle/>
-          <a:p>
-            <a:pPr algn="r" indent="0" marL="0">
-              <a:buNone/>
-            </a:pPr>
-            <a:r>
-              <a:rPr lang="en-US" sz="1200" b="1" dirty="0">
-                <a:solidFill>
-                  <a:srgbClr val="73AA87"/>
-                </a:solidFill>
-                <a:latin typeface="Calibri" pitchFamily="34" charset="0"/>
-                <a:ea typeface="Calibri" pitchFamily="34" charset="-122"/>
-                <a:cs typeface="Calibri" pitchFamily="34" charset="-120"/>
-              </a:rPr>
-              <a:t>Netcompany</a:t>
-            </a:r>
-            <a:endParaRPr lang="en-US" sz="1200" dirty="0"/>
-          </a:p>
-        </p:txBody>
-      </p:sp>
-      <p:sp>
-        <p:nvSpPr>
-          <p:cNvPr id="7" name="Shape 5"/>
-          <p:cNvSpPr/>
-          <p:nvPr/>
-        </p:nvSpPr>
-        <p:spPr>
-          <a:xfrm>
-            <a:off x="0" y="4983480"/>
-            <a:ext cx="9144000" cy="160020"/>
-          </a:xfrm>
-          <a:prstGeom prst="rect">
-            <a:avLst/>
-          </a:prstGeom>
-          <a:solidFill>
-            <a:srgbClr val="123836"/>
-          </a:solidFill>
-          <a:ln/>
-        </p:spPr>
-      </p:sp>
-      <p:sp>
-        <p:nvSpPr>
-          <p:cNvPr id="8" name="Text 6"/>
-          <p:cNvSpPr/>
-          <p:nvPr/>
-        </p:nvSpPr>
-        <p:spPr>
-          <a:xfrm>
-            <a:off x="137160" y="4974336"/>
-            <a:ext cx="6400800" cy="164592"/>
-          </a:xfrm>
-          <a:prstGeom prst="rect">
-            <a:avLst/>
-          </a:prstGeom>
-          <a:noFill/>
-          <a:ln/>
-        </p:spPr>
-        <p:txBody>
-          <a:bodyPr wrap="square" rtlCol="0" anchor="ctr"/>
-          <a:lstStyle/>
-          <a:p>
-            <a:pPr indent="0" marL="0">
-              <a:buNone/>
-            </a:pPr>
-            <a:r>
-              <a:rPr lang="en-US" sz="800" dirty="0">
-                <a:solidFill>
-                  <a:srgbClr val="D0D7D7"/>
-                </a:solidFill>
-                <a:latin typeface="Calibri" pitchFamily="34" charset="0"/>
-                <a:ea typeface="Calibri" pitchFamily="34" charset="-122"/>
-                <a:cs typeface="Calibri" pitchFamily="34" charset="-120"/>
-              </a:rPr>
-              <a:t>Solon Tax Product Roadmap 2026 | SteerCo</a:t>
-            </a:r>
-            <a:endParaRPr lang="en-US" sz="800" dirty="0"/>
-          </a:p>
-        </p:txBody>
-      </p:sp>
-      <p:sp>
-        <p:nvSpPr>
-          <p:cNvPr id="9" name="Text 7"/>
-          <p:cNvSpPr/>
-          <p:nvPr/>
-        </p:nvSpPr>
-        <p:spPr>
-          <a:xfrm>
-            <a:off x="8686800" y="4974336"/>
-            <a:ext cx="365760" cy="164592"/>
-          </a:xfrm>
-          <a:prstGeom prst="rect">
-            <a:avLst/>
-          </a:prstGeom>
-          <a:noFill/>
-          <a:ln/>
-        </p:spPr>
-        <p:txBody>
-          <a:bodyPr wrap="square" rtlCol="0" anchor="ctr"/>
-          <a:lstStyle/>
-          <a:p>
-            <a:pPr algn="r" indent="0" marL="0">
-              <a:buNone/>
-            </a:pPr>
-            <a:r>
-              <a:rPr lang="en-US" sz="800" dirty="0">
-                <a:solidFill>
-                  <a:srgbClr val="D0D7D7"/>
-                </a:solidFill>
-                <a:latin typeface="Calibri" pitchFamily="34" charset="0"/>
-                <a:ea typeface="Calibri" pitchFamily="34" charset="-122"/>
-                <a:cs typeface="Calibri" pitchFamily="34" charset="-120"/>
-              </a:rPr>
-              <a:t>7</a:t>
-            </a:r>
-            <a:endParaRPr lang="en-US" sz="800" dirty="0"/>
-          </a:p>
-        </p:txBody>
-      </p:sp>
-      <p:sp>
-        <p:nvSpPr>
-          <p:cNvPr id="10" name="Shape 8"/>
-          <p:cNvSpPr/>
-          <p:nvPr/>
-        </p:nvSpPr>
-        <p:spPr>
-          <a:xfrm>
-            <a:off x="182880" y="1024128"/>
-            <a:ext cx="2834640" cy="3858768"/>
-          </a:xfrm>
-          <a:prstGeom prst="rect">
-            <a:avLst/>
-          </a:prstGeom>
-          <a:solidFill>
-            <a:srgbClr val="FFFFFF"/>
-          </a:solidFill>
-          <a:ln w="12700">
-            <a:solidFill>
-              <a:srgbClr val="D0D7D7"/>
-            </a:solidFill>
-            <a:prstDash val="solid"/>
-          </a:ln>
-          <a:effectLst>
-            <a:outerShdw sx="100000" sy="100000" kx="0" ky="0" algn="bl" rotWithShape="0" blurRad="50800" dist="25400" dir="8100000">
-              <a:srgbClr val="000000">
-                <a:alpha val="12000"/>
-              </a:srgbClr>
-            </a:outerShdw>
-          </a:effectLst>
-        </p:spPr>
-      </p:sp>
-      <p:sp>
-        <p:nvSpPr>
-          <p:cNvPr id="11" name="Shape 9"/>
-          <p:cNvSpPr/>
-          <p:nvPr/>
-        </p:nvSpPr>
-        <p:spPr>
-          <a:xfrm>
-            <a:off x="182880" y="1024128"/>
-            <a:ext cx="2834640" cy="54864"/>
-          </a:xfrm>
-          <a:prstGeom prst="rect">
-            <a:avLst/>
-          </a:prstGeom>
-          <a:solidFill>
-            <a:srgbClr val="FF6359"/>
-          </a:solidFill>
-          <a:ln/>
-        </p:spPr>
-      </p:sp>
-      <p:sp>
-        <p:nvSpPr>
-          <p:cNvPr id="12" name="Text 10"/>
-          <p:cNvSpPr/>
-          <p:nvPr/>
-        </p:nvSpPr>
-        <p:spPr>
-          <a:xfrm>
-            <a:off x="292608" y="1115568"/>
-            <a:ext cx="2615184" cy="320040"/>
-          </a:xfrm>
-          <a:prstGeom prst="rect">
-            <a:avLst/>
-          </a:prstGeom>
-          <a:noFill/>
-          <a:ln/>
-        </p:spPr>
-        <p:txBody>
-          <a:bodyPr wrap="square" rtlCol="0" anchor="ctr"/>
-          <a:lstStyle/>
-          <a:p>
-            <a:pPr indent="0" marL="0">
-              <a:buNone/>
-            </a:pPr>
-            <a:r>
-              <a:rPr lang="en-US" sz="1300" b="1" dirty="0">
-                <a:solidFill>
-                  <a:srgbClr val="123836"/>
-                </a:solidFill>
-              </a:rPr>
-              <a:t>Exemptions</a:t>
-            </a:r>
-            <a:endParaRPr lang="en-US" sz="1300" dirty="0"/>
-          </a:p>
-        </p:txBody>
-      </p:sp>
-      <p:sp>
-        <p:nvSpPr>
-          <p:cNvPr id="13" name="Shape 11"/>
-          <p:cNvSpPr/>
-          <p:nvPr/>
-        </p:nvSpPr>
-        <p:spPr>
-          <a:xfrm>
-            <a:off x="246888" y="1481328"/>
-            <a:ext cx="640080" cy="548640"/>
-          </a:xfrm>
-          <a:prstGeom prst="rect">
-            <a:avLst/>
-          </a:prstGeom>
-          <a:solidFill>
-            <a:srgbClr val="123836"/>
-          </a:solidFill>
-          <a:ln/>
-        </p:spPr>
-      </p:sp>
-      <p:sp>
-        <p:nvSpPr>
-          <p:cNvPr id="14" name="Text 12"/>
-          <p:cNvSpPr/>
-          <p:nvPr/>
-        </p:nvSpPr>
-        <p:spPr>
-          <a:xfrm>
-            <a:off x="246888" y="1481328"/>
-            <a:ext cx="640080" cy="338328"/>
-          </a:xfrm>
-          <a:prstGeom prst="rect">
-            <a:avLst/>
-          </a:prstGeom>
-          <a:noFill/>
-          <a:ln/>
-        </p:spPr>
-        <p:txBody>
-          <a:bodyPr wrap="square" rtlCol="0" anchor="b"/>
-          <a:lstStyle/>
-          <a:p>
-            <a:pPr algn="ctr" indent="0" marL="0">
-              <a:buNone/>
-            </a:pPr>
-            <a:r>
-              <a:rPr lang="en-US" sz="750" b="1" dirty="0">
-                <a:solidFill>
-                  <a:srgbClr val="FFFFFF"/>
-                </a:solidFill>
-              </a:rPr>
-              <a:t>~390H</a:t>
-            </a:r>
-            <a:endParaRPr lang="en-US" sz="750" dirty="0"/>
-          </a:p>
-        </p:txBody>
-      </p:sp>
-      <p:sp>
-        <p:nvSpPr>
-          <p:cNvPr id="15" name="Text 13"/>
-          <p:cNvSpPr/>
-          <p:nvPr/>
-        </p:nvSpPr>
-        <p:spPr>
-          <a:xfrm>
-            <a:off x="246888" y="1819656"/>
-            <a:ext cx="640080" cy="201168"/>
-          </a:xfrm>
-          <a:prstGeom prst="rect">
-            <a:avLst/>
-          </a:prstGeom>
-          <a:noFill/>
-          <a:ln/>
-        </p:spPr>
-        <p:txBody>
-          <a:bodyPr wrap="square" rtlCol="0" anchor="ctr"/>
-          <a:lstStyle/>
-          <a:p>
-            <a:pPr algn="ctr" indent="0" marL="0">
-              <a:buNone/>
-            </a:pPr>
-            <a:r>
-              <a:rPr lang="en-US" sz="650" dirty="0">
-                <a:solidFill>
-                  <a:srgbClr val="FFD282"/>
-                </a:solidFill>
-              </a:rPr>
-              <a:t>Effort</a:t>
-            </a:r>
-            <a:endParaRPr lang="en-US" sz="650" dirty="0"/>
-          </a:p>
-        </p:txBody>
-      </p:sp>
-      <p:sp>
-        <p:nvSpPr>
-          <p:cNvPr id="16" name="Shape 14"/>
-          <p:cNvSpPr/>
-          <p:nvPr/>
-        </p:nvSpPr>
-        <p:spPr>
-          <a:xfrm>
-            <a:off x="941832" y="1481328"/>
-            <a:ext cx="640080" cy="548640"/>
-          </a:xfrm>
-          <a:prstGeom prst="rect">
-            <a:avLst/>
-          </a:prstGeom>
-          <a:solidFill>
-            <a:srgbClr val="123836"/>
-          </a:solidFill>
-          <a:ln/>
-        </p:spPr>
-      </p:sp>
-      <p:sp>
-        <p:nvSpPr>
-          <p:cNvPr id="17" name="Text 15"/>
-          <p:cNvSpPr/>
-          <p:nvPr/>
-        </p:nvSpPr>
-        <p:spPr>
-          <a:xfrm>
-            <a:off x="941832" y="1481328"/>
-            <a:ext cx="640080" cy="338328"/>
-          </a:xfrm>
-          <a:prstGeom prst="rect">
-            <a:avLst/>
-          </a:prstGeom>
-          <a:noFill/>
-          <a:ln/>
-        </p:spPr>
-        <p:txBody>
-          <a:bodyPr wrap="square" rtlCol="0" anchor="b"/>
-          <a:lstStyle/>
-          <a:p>
-            <a:pPr algn="ctr" indent="0" marL="0">
-              <a:buNone/>
-            </a:pPr>
-            <a:r>
-              <a:rPr lang="en-US" sz="750" b="1" dirty="0">
-                <a:solidFill>
-                  <a:srgbClr val="FFFFFF"/>
-                </a:solidFill>
-              </a:rPr>
-              <a:t>1</a:t>
-            </a:r>
-            <a:endParaRPr lang="en-US" sz="750" dirty="0"/>
-          </a:p>
-        </p:txBody>
-      </p:sp>
-      <p:sp>
-        <p:nvSpPr>
-          <p:cNvPr id="18" name="Text 16"/>
-          <p:cNvSpPr/>
-          <p:nvPr/>
-        </p:nvSpPr>
-        <p:spPr>
-          <a:xfrm>
-            <a:off x="941832" y="1819656"/>
-            <a:ext cx="640080" cy="201168"/>
-          </a:xfrm>
-          <a:prstGeom prst="rect">
-            <a:avLst/>
-          </a:prstGeom>
-          <a:noFill/>
-          <a:ln/>
-        </p:spPr>
-        <p:txBody>
-          <a:bodyPr wrap="square" rtlCol="0" anchor="ctr"/>
-          <a:lstStyle/>
-          <a:p>
-            <a:pPr algn="ctr" indent="0" marL="0">
-              <a:buNone/>
-            </a:pPr>
-            <a:r>
-              <a:rPr lang="en-US" sz="650" dirty="0">
-                <a:solidFill>
-                  <a:srgbClr val="FFD282"/>
-                </a:solidFill>
-              </a:rPr>
-              <a:t>Features</a:t>
-            </a:r>
-            <a:endParaRPr lang="en-US" sz="650" dirty="0"/>
-          </a:p>
-        </p:txBody>
-      </p:sp>
-      <p:sp>
-        <p:nvSpPr>
-          <p:cNvPr id="19" name="Shape 17"/>
-          <p:cNvSpPr/>
-          <p:nvPr/>
-        </p:nvSpPr>
-        <p:spPr>
-          <a:xfrm>
-            <a:off x="1636776" y="1481328"/>
-            <a:ext cx="640080" cy="548640"/>
-          </a:xfrm>
-          <a:prstGeom prst="rect">
-            <a:avLst/>
-          </a:prstGeom>
-          <a:solidFill>
-            <a:srgbClr val="123836"/>
-          </a:solidFill>
-          <a:ln/>
-        </p:spPr>
-      </p:sp>
-      <p:sp>
-        <p:nvSpPr>
-          <p:cNvPr id="20" name="Text 18"/>
-          <p:cNvSpPr/>
-          <p:nvPr/>
-        </p:nvSpPr>
-        <p:spPr>
-          <a:xfrm>
-            <a:off x="1636776" y="1481328"/>
-            <a:ext cx="640080" cy="338328"/>
-          </a:xfrm>
-          <a:prstGeom prst="rect">
-            <a:avLst/>
-          </a:prstGeom>
-          <a:noFill/>
-          <a:ln/>
-        </p:spPr>
-        <p:txBody>
-          <a:bodyPr wrap="square" rtlCol="0" anchor="b"/>
-          <a:lstStyle/>
-          <a:p>
-            <a:pPr algn="ctr" indent="0" marL="0">
-              <a:buNone/>
-            </a:pPr>
-            <a:r>
-              <a:rPr lang="en-US" sz="750" b="1" dirty="0">
-                <a:solidFill>
-                  <a:srgbClr val="FFFFFF"/>
-                </a:solidFill>
-              </a:rPr>
-              <a:t>P2</a:t>
-            </a:r>
-            <a:endParaRPr lang="en-US" sz="750" dirty="0"/>
-          </a:p>
-        </p:txBody>
-      </p:sp>
-      <p:sp>
-        <p:nvSpPr>
-          <p:cNvPr id="21" name="Text 19"/>
-          <p:cNvSpPr/>
-          <p:nvPr/>
-        </p:nvSpPr>
-        <p:spPr>
-          <a:xfrm>
-            <a:off x="1636776" y="1819656"/>
-            <a:ext cx="640080" cy="201168"/>
-          </a:xfrm>
-          <a:prstGeom prst="rect">
-            <a:avLst/>
-          </a:prstGeom>
-          <a:noFill/>
-          <a:ln/>
-        </p:spPr>
-        <p:txBody>
-          <a:bodyPr wrap="square" rtlCol="0" anchor="ctr"/>
-          <a:lstStyle/>
-          <a:p>
-            <a:pPr algn="ctr" indent="0" marL="0">
-              <a:buNone/>
-            </a:pPr>
-            <a:r>
-              <a:rPr lang="en-US" sz="650" dirty="0">
-                <a:solidFill>
-                  <a:srgbClr val="FFD282"/>
-                </a:solidFill>
-              </a:rPr>
-              <a:t>Priority</a:t>
-            </a:r>
-            <a:endParaRPr lang="en-US" sz="650" dirty="0"/>
-          </a:p>
-        </p:txBody>
-      </p:sp>
-      <p:sp>
-        <p:nvSpPr>
-          <p:cNvPr id="22" name="Shape 20"/>
-          <p:cNvSpPr/>
-          <p:nvPr/>
-        </p:nvSpPr>
-        <p:spPr>
-          <a:xfrm>
-            <a:off x="2331720" y="1481328"/>
-            <a:ext cx="640080" cy="548640"/>
-          </a:xfrm>
-          <a:prstGeom prst="rect">
-            <a:avLst/>
-          </a:prstGeom>
-          <a:solidFill>
-            <a:srgbClr val="123836"/>
-          </a:solidFill>
-          <a:ln/>
-        </p:spPr>
-      </p:sp>
-      <p:sp>
-        <p:nvSpPr>
-          <p:cNvPr id="23" name="Text 21"/>
-          <p:cNvSpPr/>
-          <p:nvPr/>
-        </p:nvSpPr>
-        <p:spPr>
-          <a:xfrm>
-            <a:off x="2331720" y="1481328"/>
-            <a:ext cx="640080" cy="338328"/>
-          </a:xfrm>
-          <a:prstGeom prst="rect">
-            <a:avLst/>
-          </a:prstGeom>
-          <a:noFill/>
-          <a:ln/>
-        </p:spPr>
-        <p:txBody>
-          <a:bodyPr wrap="square" rtlCol="0" anchor="b"/>
-          <a:lstStyle/>
-          <a:p>
-            <a:pPr algn="ctr" indent="0" marL="0">
-              <a:buNone/>
-            </a:pPr>
-            <a:r>
-              <a:rPr lang="en-US" sz="750" b="1" dirty="0">
-                <a:solidFill>
-                  <a:srgbClr val="FFFFFF"/>
-                </a:solidFill>
-              </a:rPr>
-              <a:t>PI28</a:t>
-            </a:r>
-            <a:endParaRPr lang="en-US" sz="750" dirty="0"/>
-          </a:p>
-        </p:txBody>
-      </p:sp>
-      <p:sp>
-        <p:nvSpPr>
-          <p:cNvPr id="24" name="Text 22"/>
-          <p:cNvSpPr/>
-          <p:nvPr/>
-        </p:nvSpPr>
-        <p:spPr>
-          <a:xfrm>
-            <a:off x="2331720" y="1819656"/>
-            <a:ext cx="640080" cy="201168"/>
-          </a:xfrm>
-          <a:prstGeom prst="rect">
-            <a:avLst/>
-          </a:prstGeom>
-          <a:noFill/>
-          <a:ln/>
-        </p:spPr>
-        <p:txBody>
-          <a:bodyPr wrap="square" rtlCol="0" anchor="ctr"/>
-          <a:lstStyle/>
-          <a:p>
-            <a:pPr algn="ctr" indent="0" marL="0">
-              <a:buNone/>
-            </a:pPr>
-            <a:r>
-              <a:rPr lang="en-US" sz="650" dirty="0">
-                <a:solidFill>
-                  <a:srgbClr val="FFD282"/>
-                </a:solidFill>
-              </a:rPr>
-              <a:t>PI</a:t>
-            </a:r>
-            <a:endParaRPr lang="en-US" sz="650" dirty="0"/>
-          </a:p>
-        </p:txBody>
-      </p:sp>
-      <p:sp>
-        <p:nvSpPr>
-          <p:cNvPr id="25" name="Text 23"/>
-          <p:cNvSpPr/>
-          <p:nvPr/>
-        </p:nvSpPr>
-        <p:spPr>
-          <a:xfrm>
-            <a:off x="292608" y="2103120"/>
-            <a:ext cx="2615184" cy="201168"/>
-          </a:xfrm>
-          <a:prstGeom prst="rect">
-            <a:avLst/>
-          </a:prstGeom>
-          <a:noFill/>
-          <a:ln/>
-        </p:spPr>
-        <p:txBody>
-          <a:bodyPr wrap="square" rtlCol="0" anchor="ctr"/>
-          <a:lstStyle/>
-          <a:p>
-            <a:pPr indent="0" marL="0">
-              <a:buNone/>
-            </a:pPr>
-            <a:r>
-              <a:rPr lang="en-US" sz="900" b="1" dirty="0">
-                <a:solidFill>
-                  <a:srgbClr val="FF6359"/>
-                </a:solidFill>
-              </a:rPr>
-              <a:t>Scope</a:t>
-            </a:r>
-            <a:endParaRPr lang="en-US" sz="900" dirty="0"/>
-          </a:p>
-        </p:txBody>
-      </p:sp>
-      <p:sp>
-        <p:nvSpPr>
-          <p:cNvPr id="26" name="Text 24"/>
-          <p:cNvSpPr/>
-          <p:nvPr/>
-        </p:nvSpPr>
-        <p:spPr>
-          <a:xfrm>
-            <a:off x="292608" y="2304288"/>
-            <a:ext cx="2615184" cy="822960"/>
-          </a:xfrm>
-          <a:prstGeom prst="rect">
-            <a:avLst/>
-          </a:prstGeom>
-          <a:noFill/>
-          <a:ln/>
-        </p:spPr>
-        <p:txBody>
-          <a:bodyPr wrap="square" rtlCol="0" anchor="ctr"/>
-          <a:lstStyle/>
-          <a:p>
-            <a:pPr indent="0" marL="0">
-              <a:buNone/>
-            </a:pPr>
-            <a:r>
-              <a:rPr lang="en-US" sz="850" dirty="0">
-                <a:solidFill>
-                  <a:srgbClr val="141E1E"/>
-                </a:solidFill>
-              </a:rPr>
-              <a:t>Manages the application, approval, and recording of tax exemptions for qualifying taxpayers or transactions. Ensures audit-traceable decisions and supports statutory compliance for exemption schemes.</a:t>
-            </a:r>
-            <a:endParaRPr lang="en-US" sz="850" dirty="0"/>
-          </a:p>
-        </p:txBody>
-      </p:sp>
-      <p:sp>
-        <p:nvSpPr>
-          <p:cNvPr id="27" name="Text 25"/>
-          <p:cNvSpPr/>
-          <p:nvPr/>
-        </p:nvSpPr>
-        <p:spPr>
-          <a:xfrm>
-            <a:off x="292608" y="3172968"/>
-            <a:ext cx="2615184" cy="201168"/>
-          </a:xfrm>
-          <a:prstGeom prst="rect">
-            <a:avLst/>
-          </a:prstGeom>
-          <a:noFill/>
-          <a:ln/>
-        </p:spPr>
-        <p:txBody>
-          <a:bodyPr wrap="square" rtlCol="0" anchor="ctr"/>
-          <a:lstStyle/>
-          <a:p>
-            <a:pPr indent="0" marL="0">
-              <a:buNone/>
-            </a:pPr>
-            <a:r>
-              <a:rPr lang="en-US" sz="900" b="1" dirty="0">
-                <a:solidFill>
-                  <a:srgbClr val="FF6359"/>
-                </a:solidFill>
-              </a:rPr>
-              <a:t>Benefits</a:t>
-            </a:r>
-            <a:endParaRPr lang="en-US" sz="900" dirty="0"/>
-          </a:p>
-        </p:txBody>
-      </p:sp>
-      <p:sp>
-        <p:nvSpPr>
-          <p:cNvPr id="28" name="Text 26"/>
-          <p:cNvSpPr/>
-          <p:nvPr/>
-        </p:nvSpPr>
-        <p:spPr>
-          <a:xfrm>
-            <a:off x="292608" y="3383280"/>
-            <a:ext cx="2615184" cy="822960"/>
-          </a:xfrm>
-          <a:prstGeom prst="rect">
-            <a:avLst/>
-          </a:prstGeom>
-          <a:noFill/>
-          <a:ln/>
-        </p:spPr>
-        <p:txBody>
-          <a:bodyPr wrap="square" rtlCol="0" anchor="ctr"/>
-          <a:lstStyle/>
-          <a:p>
-            <a:pPr marL="342900" indent="-342900">
-              <a:buSzPct val="100000"/>
-              <a:buChar char="•"/>
-            </a:pPr>
-            <a:r>
-              <a:rPr lang="en-US" sz="800" dirty="0">
-                <a:solidFill>
-                  <a:srgbClr val="4A5C5A"/>
-                </a:solidFill>
-              </a:rPr>
-              <a:t>Reduces manual exemption handling and processing backlogs</a:t>
-            </a:r>
-            <a:endParaRPr lang="en-US" sz="800" dirty="0"/>
-          </a:p>
-          <a:p>
-            <a:pPr marL="342900" indent="-342900">
-              <a:buSzPct val="100000"/>
-              <a:buChar char="•"/>
-            </a:pPr>
-            <a:r>
-              <a:rPr lang="en-US" sz="800" dirty="0">
-                <a:solidFill>
-                  <a:srgbClr val="4A5C5A"/>
-                </a:solidFill>
-              </a:rPr>
-              <a:t>Audit-ready exemption records reduce compliance risk</a:t>
-            </a:r>
-            <a:endParaRPr lang="en-US" sz="800" dirty="0"/>
-          </a:p>
-          <a:p>
-            <a:pPr marL="342900" indent="-342900">
-              <a:buSzPct val="100000"/>
-              <a:buChar char="•"/>
-            </a:pPr>
-            <a:r>
-              <a:rPr lang="en-US" sz="800" dirty="0">
-                <a:solidFill>
-                  <a:srgbClr val="4A5C5A"/>
-                </a:solidFill>
-              </a:rPr>
-              <a:t>Configurable exemption rules support multiple tax types</a:t>
-            </a:r>
-            <a:endParaRPr lang="en-US" sz="800" dirty="0"/>
-          </a:p>
-        </p:txBody>
-      </p:sp>
-      <p:sp>
-        <p:nvSpPr>
-          <p:cNvPr id="29" name="Shape 27"/>
-          <p:cNvSpPr/>
-          <p:nvPr/>
-        </p:nvSpPr>
-        <p:spPr>
-          <a:xfrm>
-            <a:off x="292608" y="4261104"/>
-            <a:ext cx="2615184" cy="530352"/>
-          </a:xfrm>
-          <a:prstGeom prst="rect">
-            <a:avLst/>
-          </a:prstGeom>
-          <a:solidFill>
-            <a:srgbClr val="EEF3F2"/>
-          </a:solidFill>
-          <a:ln/>
-        </p:spPr>
-      </p:sp>
-      <p:sp>
-        <p:nvSpPr>
-          <p:cNvPr id="30" name="Text 28"/>
-          <p:cNvSpPr/>
-          <p:nvPr/>
-        </p:nvSpPr>
-        <p:spPr>
-          <a:xfrm>
-            <a:off x="347472" y="4288536"/>
-            <a:ext cx="2505456" cy="475488"/>
-          </a:xfrm>
-          <a:prstGeom prst="rect">
-            <a:avLst/>
-          </a:prstGeom>
-          <a:noFill/>
-          <a:ln/>
-        </p:spPr>
-        <p:txBody>
-          <a:bodyPr wrap="square" rtlCol="0" anchor="ctr"/>
-          <a:lstStyle/>
-          <a:p>
-            <a:pPr indent="0" marL="0">
-              <a:buNone/>
-            </a:pPr>
-            <a:r>
-              <a:rPr lang="en-US" sz="800" i="1" dirty="0">
-                <a:solidFill>
-                  <a:srgbClr val="123836"/>
-                </a:solidFill>
-              </a:rPr>
-              <a:t>Small scope — good candidate for early delivery to demonstrate value to GRC stakeholders in PI28.</a:t>
-            </a:r>
-            <a:endParaRPr lang="en-US" sz="800" dirty="0"/>
-          </a:p>
-        </p:txBody>
-      </p:sp>
-      <p:sp>
-        <p:nvSpPr>
-          <p:cNvPr id="31" name="Shape 29"/>
-          <p:cNvSpPr/>
-          <p:nvPr/>
-        </p:nvSpPr>
-        <p:spPr>
-          <a:xfrm>
-            <a:off x="3172968" y="1024128"/>
-            <a:ext cx="2834640" cy="3858768"/>
-          </a:xfrm>
-          <a:prstGeom prst="rect">
-            <a:avLst/>
-          </a:prstGeom>
-          <a:solidFill>
-            <a:srgbClr val="FFFFFF"/>
-          </a:solidFill>
-          <a:ln w="12700">
-            <a:solidFill>
-              <a:srgbClr val="D0D7D7"/>
-            </a:solidFill>
-            <a:prstDash val="solid"/>
-          </a:ln>
-          <a:effectLst>
-            <a:outerShdw sx="100000" sy="100000" kx="0" ky="0" algn="bl" rotWithShape="0" blurRad="50800" dist="25400" dir="8100000">
-              <a:srgbClr val="000000">
-                <a:alpha val="12000"/>
-              </a:srgbClr>
-            </a:outerShdw>
-          </a:effectLst>
-        </p:spPr>
-      </p:sp>
-      <p:sp>
-        <p:nvSpPr>
-          <p:cNvPr id="32" name="Shape 30"/>
-          <p:cNvSpPr/>
-          <p:nvPr/>
-        </p:nvSpPr>
-        <p:spPr>
-          <a:xfrm>
-            <a:off x="3172968" y="1024128"/>
-            <a:ext cx="2834640" cy="54864"/>
-          </a:xfrm>
-          <a:prstGeom prst="rect">
-            <a:avLst/>
-          </a:prstGeom>
-          <a:solidFill>
-            <a:srgbClr val="FF6359"/>
-          </a:solidFill>
-          <a:ln/>
-        </p:spPr>
-      </p:sp>
-      <p:sp>
-        <p:nvSpPr>
-          <p:cNvPr id="33" name="Text 31"/>
-          <p:cNvSpPr/>
-          <p:nvPr/>
-        </p:nvSpPr>
-        <p:spPr>
-          <a:xfrm>
-            <a:off x="3282696" y="1115568"/>
-            <a:ext cx="2615184" cy="320040"/>
-          </a:xfrm>
-          <a:prstGeom prst="rect">
-            <a:avLst/>
-          </a:prstGeom>
-          <a:noFill/>
-          <a:ln/>
-        </p:spPr>
-        <p:txBody>
-          <a:bodyPr wrap="square" rtlCol="0" anchor="ctr"/>
-          <a:lstStyle/>
-          <a:p>
-            <a:pPr indent="0" marL="0">
-              <a:buNone/>
-            </a:pPr>
-            <a:r>
-              <a:rPr lang="en-US" sz="1300" b="1" dirty="0">
-                <a:solidFill>
-                  <a:srgbClr val="123836"/>
-                </a:solidFill>
-              </a:rPr>
-              <a:t>Penalty &amp; Interest</a:t>
-            </a:r>
-            <a:endParaRPr lang="en-US" sz="1300" dirty="0"/>
-          </a:p>
-        </p:txBody>
-      </p:sp>
-      <p:sp>
-        <p:nvSpPr>
-          <p:cNvPr id="34" name="Shape 32"/>
-          <p:cNvSpPr/>
-          <p:nvPr/>
-        </p:nvSpPr>
-        <p:spPr>
-          <a:xfrm>
-            <a:off x="3236976" y="1481328"/>
-            <a:ext cx="640080" cy="548640"/>
-          </a:xfrm>
-          <a:prstGeom prst="rect">
-            <a:avLst/>
-          </a:prstGeom>
-          <a:solidFill>
-            <a:srgbClr val="123836"/>
-          </a:solidFill>
-          <a:ln/>
-        </p:spPr>
-      </p:sp>
-      <p:sp>
-        <p:nvSpPr>
-          <p:cNvPr id="35" name="Text 33"/>
-          <p:cNvSpPr/>
-          <p:nvPr/>
-        </p:nvSpPr>
-        <p:spPr>
-          <a:xfrm>
-            <a:off x="3236976" y="1481328"/>
-            <a:ext cx="640080" cy="338328"/>
-          </a:xfrm>
-          <a:prstGeom prst="rect">
-            <a:avLst/>
-          </a:prstGeom>
-          <a:noFill/>
-          <a:ln/>
-        </p:spPr>
-        <p:txBody>
-          <a:bodyPr wrap="square" rtlCol="0" anchor="b"/>
-          <a:lstStyle/>
-          <a:p>
-            <a:pPr algn="ctr" indent="0" marL="0">
-              <a:buNone/>
-            </a:pPr>
-            <a:r>
-              <a:rPr lang="en-US" sz="750" b="1" dirty="0">
-                <a:solidFill>
-                  <a:srgbClr val="FFFFFF"/>
-                </a:solidFill>
-              </a:rPr>
-              <a:t>TBD</a:t>
-            </a:r>
-            <a:endParaRPr lang="en-US" sz="750" dirty="0"/>
-          </a:p>
-        </p:txBody>
-      </p:sp>
-      <p:sp>
-        <p:nvSpPr>
-          <p:cNvPr id="36" name="Text 34"/>
-          <p:cNvSpPr/>
-          <p:nvPr/>
-        </p:nvSpPr>
-        <p:spPr>
-          <a:xfrm>
-            <a:off x="3236976" y="1819656"/>
-            <a:ext cx="640080" cy="201168"/>
-          </a:xfrm>
-          <a:prstGeom prst="rect">
-            <a:avLst/>
-          </a:prstGeom>
-          <a:noFill/>
-          <a:ln/>
-        </p:spPr>
-        <p:txBody>
-          <a:bodyPr wrap="square" rtlCol="0" anchor="ctr"/>
-          <a:lstStyle/>
-          <a:p>
-            <a:pPr algn="ctr" indent="0" marL="0">
-              <a:buNone/>
-            </a:pPr>
-            <a:r>
-              <a:rPr lang="en-US" sz="650" dirty="0">
-                <a:solidFill>
-                  <a:srgbClr val="FFD282"/>
-                </a:solidFill>
-              </a:rPr>
-              <a:t>Effort</a:t>
-            </a:r>
-            <a:endParaRPr lang="en-US" sz="650" dirty="0"/>
-          </a:p>
-        </p:txBody>
-      </p:sp>
-      <p:sp>
-        <p:nvSpPr>
-          <p:cNvPr id="37" name="Shape 35"/>
-          <p:cNvSpPr/>
-          <p:nvPr/>
-        </p:nvSpPr>
-        <p:spPr>
-          <a:xfrm>
-            <a:off x="3931920" y="1481328"/>
-            <a:ext cx="640080" cy="548640"/>
-          </a:xfrm>
-          <a:prstGeom prst="rect">
-            <a:avLst/>
-          </a:prstGeom>
-          <a:solidFill>
-            <a:srgbClr val="123836"/>
-          </a:solidFill>
-          <a:ln/>
-        </p:spPr>
-      </p:sp>
-      <p:sp>
-        <p:nvSpPr>
-          <p:cNvPr id="38" name="Text 36"/>
-          <p:cNvSpPr/>
-          <p:nvPr/>
-        </p:nvSpPr>
-        <p:spPr>
-          <a:xfrm>
-            <a:off x="3931920" y="1481328"/>
-            <a:ext cx="640080" cy="338328"/>
-          </a:xfrm>
-          <a:prstGeom prst="rect">
-            <a:avLst/>
-          </a:prstGeom>
-          <a:noFill/>
-          <a:ln/>
-        </p:spPr>
-        <p:txBody>
-          <a:bodyPr wrap="square" rtlCol="0" anchor="b"/>
-          <a:lstStyle/>
-          <a:p>
-            <a:pPr algn="ctr" indent="0" marL="0">
-              <a:buNone/>
-            </a:pPr>
-            <a:r>
-              <a:rPr lang="en-US" sz="750" b="1" dirty="0">
-                <a:solidFill>
-                  <a:srgbClr val="FFFFFF"/>
-                </a:solidFill>
-              </a:rPr>
-              <a:t>1</a:t>
-            </a:r>
-            <a:endParaRPr lang="en-US" sz="750" dirty="0"/>
-          </a:p>
-        </p:txBody>
-      </p:sp>
-      <p:sp>
-        <p:nvSpPr>
-          <p:cNvPr id="39" name="Text 37"/>
-          <p:cNvSpPr/>
-          <p:nvPr/>
-        </p:nvSpPr>
-        <p:spPr>
-          <a:xfrm>
-            <a:off x="3931920" y="1819656"/>
-            <a:ext cx="640080" cy="201168"/>
-          </a:xfrm>
-          <a:prstGeom prst="rect">
-            <a:avLst/>
-          </a:prstGeom>
-          <a:noFill/>
-          <a:ln/>
-        </p:spPr>
-        <p:txBody>
-          <a:bodyPr wrap="square" rtlCol="0" anchor="ctr"/>
-          <a:lstStyle/>
-          <a:p>
-            <a:pPr algn="ctr" indent="0" marL="0">
-              <a:buNone/>
-            </a:pPr>
-            <a:r>
-              <a:rPr lang="en-US" sz="650" dirty="0">
-                <a:solidFill>
-                  <a:srgbClr val="FFD282"/>
-                </a:solidFill>
-              </a:rPr>
-              <a:t>Features</a:t>
-            </a:r>
-            <a:endParaRPr lang="en-US" sz="650" dirty="0"/>
-          </a:p>
-        </p:txBody>
-      </p:sp>
-      <p:sp>
-        <p:nvSpPr>
-          <p:cNvPr id="40" name="Shape 38"/>
-          <p:cNvSpPr/>
-          <p:nvPr/>
-        </p:nvSpPr>
-        <p:spPr>
-          <a:xfrm>
-            <a:off x="4626864" y="1481328"/>
-            <a:ext cx="640080" cy="548640"/>
-          </a:xfrm>
-          <a:prstGeom prst="rect">
-            <a:avLst/>
-          </a:prstGeom>
-          <a:solidFill>
-            <a:srgbClr val="123836"/>
-          </a:solidFill>
-          <a:ln/>
-        </p:spPr>
-      </p:sp>
-      <p:sp>
-        <p:nvSpPr>
-          <p:cNvPr id="41" name="Text 39"/>
-          <p:cNvSpPr/>
-          <p:nvPr/>
-        </p:nvSpPr>
-        <p:spPr>
-          <a:xfrm>
-            <a:off x="4626864" y="1481328"/>
-            <a:ext cx="640080" cy="338328"/>
-          </a:xfrm>
-          <a:prstGeom prst="rect">
-            <a:avLst/>
-          </a:prstGeom>
-          <a:noFill/>
-          <a:ln/>
-        </p:spPr>
-        <p:txBody>
-          <a:bodyPr wrap="square" rtlCol="0" anchor="b"/>
-          <a:lstStyle/>
-          <a:p>
-            <a:pPr algn="ctr" indent="0" marL="0">
-              <a:buNone/>
-            </a:pPr>
-            <a:r>
-              <a:rPr lang="en-US" sz="750" b="1" dirty="0">
-                <a:solidFill>
-                  <a:srgbClr val="FFFFFF"/>
-                </a:solidFill>
-              </a:rPr>
-              <a:t>P2</a:t>
-            </a:r>
-            <a:endParaRPr lang="en-US" sz="750" dirty="0"/>
-          </a:p>
-        </p:txBody>
-      </p:sp>
-      <p:sp>
-        <p:nvSpPr>
-          <p:cNvPr id="42" name="Text 40"/>
-          <p:cNvSpPr/>
-          <p:nvPr/>
-        </p:nvSpPr>
-        <p:spPr>
-          <a:xfrm>
-            <a:off x="4626864" y="1819656"/>
-            <a:ext cx="640080" cy="201168"/>
-          </a:xfrm>
-          <a:prstGeom prst="rect">
-            <a:avLst/>
-          </a:prstGeom>
-          <a:noFill/>
-          <a:ln/>
-        </p:spPr>
-        <p:txBody>
-          <a:bodyPr wrap="square" rtlCol="0" anchor="ctr"/>
-          <a:lstStyle/>
-          <a:p>
-            <a:pPr algn="ctr" indent="0" marL="0">
-              <a:buNone/>
-            </a:pPr>
-            <a:r>
-              <a:rPr lang="en-US" sz="650" dirty="0">
-                <a:solidFill>
-                  <a:srgbClr val="FFD282"/>
-                </a:solidFill>
-              </a:rPr>
-              <a:t>Priority</a:t>
-            </a:r>
-            <a:endParaRPr lang="en-US" sz="650" dirty="0"/>
-          </a:p>
-        </p:txBody>
-      </p:sp>
-      <p:sp>
-        <p:nvSpPr>
-          <p:cNvPr id="43" name="Shape 41"/>
-          <p:cNvSpPr/>
-          <p:nvPr/>
-        </p:nvSpPr>
-        <p:spPr>
-          <a:xfrm>
-            <a:off x="5321808" y="1481328"/>
-            <a:ext cx="640080" cy="548640"/>
-          </a:xfrm>
-          <a:prstGeom prst="rect">
-            <a:avLst/>
-          </a:prstGeom>
-          <a:solidFill>
-            <a:srgbClr val="123836"/>
-          </a:solidFill>
-          <a:ln/>
-        </p:spPr>
-      </p:sp>
-      <p:sp>
-        <p:nvSpPr>
-          <p:cNvPr id="44" name="Text 42"/>
-          <p:cNvSpPr/>
-          <p:nvPr/>
-        </p:nvSpPr>
-        <p:spPr>
-          <a:xfrm>
-            <a:off x="5321808" y="1481328"/>
-            <a:ext cx="640080" cy="338328"/>
-          </a:xfrm>
-          <a:prstGeom prst="rect">
-            <a:avLst/>
-          </a:prstGeom>
-          <a:noFill/>
-          <a:ln/>
-        </p:spPr>
-        <p:txBody>
-          <a:bodyPr wrap="square" rtlCol="0" anchor="b"/>
-          <a:lstStyle/>
-          <a:p>
-            <a:pPr algn="ctr" indent="0" marL="0">
-              <a:buNone/>
-            </a:pPr>
-            <a:r>
-              <a:rPr lang="en-US" sz="750" b="1" dirty="0">
-                <a:solidFill>
-                  <a:srgbClr val="FFFFFF"/>
-                </a:solidFill>
-              </a:rPr>
-              <a:t>PI28–PI29</a:t>
-            </a:r>
-            <a:endParaRPr lang="en-US" sz="750" dirty="0"/>
-          </a:p>
-        </p:txBody>
-      </p:sp>
-      <p:sp>
-        <p:nvSpPr>
-          <p:cNvPr id="45" name="Text 43"/>
-          <p:cNvSpPr/>
-          <p:nvPr/>
-        </p:nvSpPr>
-        <p:spPr>
-          <a:xfrm>
-            <a:off x="5321808" y="1819656"/>
-            <a:ext cx="640080" cy="201168"/>
-          </a:xfrm>
-          <a:prstGeom prst="rect">
-            <a:avLst/>
-          </a:prstGeom>
-          <a:noFill/>
-          <a:ln/>
-        </p:spPr>
-        <p:txBody>
-          <a:bodyPr wrap="square" rtlCol="0" anchor="ctr"/>
-          <a:lstStyle/>
-          <a:p>
-            <a:pPr algn="ctr" indent="0" marL="0">
-              <a:buNone/>
-            </a:pPr>
-            <a:r>
-              <a:rPr lang="en-US" sz="650" dirty="0">
-                <a:solidFill>
-                  <a:srgbClr val="FFD282"/>
-                </a:solidFill>
-              </a:rPr>
-              <a:t>PI</a:t>
-            </a:r>
-            <a:endParaRPr lang="en-US" sz="650" dirty="0"/>
-          </a:p>
-        </p:txBody>
-      </p:sp>
-      <p:sp>
-        <p:nvSpPr>
-          <p:cNvPr id="46" name="Text 44"/>
-          <p:cNvSpPr/>
-          <p:nvPr/>
-        </p:nvSpPr>
-        <p:spPr>
-          <a:xfrm>
-            <a:off x="3282696" y="2103120"/>
-            <a:ext cx="2615184" cy="201168"/>
-          </a:xfrm>
-          <a:prstGeom prst="rect">
-            <a:avLst/>
-          </a:prstGeom>
-          <a:noFill/>
-          <a:ln/>
-        </p:spPr>
-        <p:txBody>
-          <a:bodyPr wrap="square" rtlCol="0" anchor="ctr"/>
-          <a:lstStyle/>
-          <a:p>
-            <a:pPr indent="0" marL="0">
-              <a:buNone/>
-            </a:pPr>
-            <a:r>
-              <a:rPr lang="en-US" sz="900" b="1" dirty="0">
-                <a:solidFill>
-                  <a:srgbClr val="FF6359"/>
-                </a:solidFill>
-              </a:rPr>
-              <a:t>Scope</a:t>
-            </a:r>
-            <a:endParaRPr lang="en-US" sz="900" dirty="0"/>
-          </a:p>
-        </p:txBody>
-      </p:sp>
-      <p:sp>
-        <p:nvSpPr>
-          <p:cNvPr id="47" name="Text 45"/>
-          <p:cNvSpPr/>
-          <p:nvPr/>
-        </p:nvSpPr>
-        <p:spPr>
-          <a:xfrm>
-            <a:off x="3282696" y="2304288"/>
-            <a:ext cx="2615184" cy="822960"/>
-          </a:xfrm>
-          <a:prstGeom prst="rect">
-            <a:avLst/>
-          </a:prstGeom>
-          <a:noFill/>
-          <a:ln/>
-        </p:spPr>
-        <p:txBody>
-          <a:bodyPr wrap="square" rtlCol="0" anchor="ctr"/>
-          <a:lstStyle/>
-          <a:p>
-            <a:pPr indent="0" marL="0">
-              <a:buNone/>
-            </a:pPr>
-            <a:r>
-              <a:rPr lang="en-US" sz="850" dirty="0">
-                <a:solidFill>
-                  <a:srgbClr val="141E1E"/>
-                </a:solidFill>
-              </a:rPr>
-              <a:t>Automates the calculation and application of statutory penalties and interest charges on overdue tax liabilities. Ensures accurate and consistent enforcement of late payment rules across all tax types.</a:t>
-            </a:r>
-            <a:endParaRPr lang="en-US" sz="850" dirty="0"/>
-          </a:p>
-        </p:txBody>
-      </p:sp>
-      <p:sp>
-        <p:nvSpPr>
-          <p:cNvPr id="48" name="Text 46"/>
-          <p:cNvSpPr/>
-          <p:nvPr/>
-        </p:nvSpPr>
-        <p:spPr>
-          <a:xfrm>
-            <a:off x="3282696" y="3172968"/>
-            <a:ext cx="2615184" cy="201168"/>
-          </a:xfrm>
-          <a:prstGeom prst="rect">
-            <a:avLst/>
-          </a:prstGeom>
-          <a:noFill/>
-          <a:ln/>
-        </p:spPr>
-        <p:txBody>
-          <a:bodyPr wrap="square" rtlCol="0" anchor="ctr"/>
-          <a:lstStyle/>
-          <a:p>
-            <a:pPr indent="0" marL="0">
-              <a:buNone/>
-            </a:pPr>
-            <a:r>
-              <a:rPr lang="en-US" sz="900" b="1" dirty="0">
-                <a:solidFill>
-                  <a:srgbClr val="FF6359"/>
-                </a:solidFill>
-              </a:rPr>
-              <a:t>Benefits</a:t>
-            </a:r>
-            <a:endParaRPr lang="en-US" sz="900" dirty="0"/>
-          </a:p>
-        </p:txBody>
-      </p:sp>
-      <p:sp>
-        <p:nvSpPr>
-          <p:cNvPr id="49" name="Text 47"/>
-          <p:cNvSpPr/>
-          <p:nvPr/>
-        </p:nvSpPr>
-        <p:spPr>
-          <a:xfrm>
-            <a:off x="3282696" y="3383280"/>
-            <a:ext cx="2615184" cy="822960"/>
-          </a:xfrm>
-          <a:prstGeom prst="rect">
-            <a:avLst/>
-          </a:prstGeom>
-          <a:noFill/>
-          <a:ln/>
-        </p:spPr>
-        <p:txBody>
-          <a:bodyPr wrap="square" rtlCol="0" anchor="ctr"/>
-          <a:lstStyle/>
-          <a:p>
-            <a:pPr marL="342900" indent="-342900">
-              <a:buSzPct val="100000"/>
-              <a:buChar char="•"/>
-            </a:pPr>
-            <a:r>
-              <a:rPr lang="en-US" sz="800" dirty="0">
-                <a:solidFill>
-                  <a:srgbClr val="4A5C5A"/>
-                </a:solidFill>
-              </a:rPr>
-              <a:t>Automated calculations eliminate manual errors and officer inconsistency</a:t>
-            </a:r>
-            <a:endParaRPr lang="en-US" sz="800" dirty="0"/>
-          </a:p>
-          <a:p>
-            <a:pPr marL="342900" indent="-342900">
-              <a:buSzPct val="100000"/>
-              <a:buChar char="•"/>
-            </a:pPr>
-            <a:r>
-              <a:rPr lang="en-US" sz="800" dirty="0">
-                <a:solidFill>
-                  <a:srgbClr val="4A5C5A"/>
-                </a:solidFill>
-              </a:rPr>
-              <a:t>Increases voluntary compliance by ensuring consistent enforcement</a:t>
-            </a:r>
-            <a:endParaRPr lang="en-US" sz="800" dirty="0"/>
-          </a:p>
-          <a:p>
-            <a:pPr marL="342900" indent="-342900">
-              <a:buSzPct val="100000"/>
-              <a:buChar char="•"/>
-            </a:pPr>
-            <a:r>
-              <a:rPr lang="en-US" sz="800" dirty="0">
-                <a:solidFill>
-                  <a:srgbClr val="4A5C5A"/>
-                </a:solidFill>
-              </a:rPr>
-              <a:t>Supports configurable penalty schedules per tax type and jurisdiction</a:t>
-            </a:r>
-            <a:endParaRPr lang="en-US" sz="800" dirty="0"/>
-          </a:p>
-        </p:txBody>
-      </p:sp>
-      <p:sp>
-        <p:nvSpPr>
-          <p:cNvPr id="50" name="Shape 48"/>
-          <p:cNvSpPr/>
-          <p:nvPr/>
-        </p:nvSpPr>
-        <p:spPr>
-          <a:xfrm>
-            <a:off x="3282696" y="4261104"/>
-            <a:ext cx="2615184" cy="530352"/>
-          </a:xfrm>
-          <a:prstGeom prst="rect">
-            <a:avLst/>
-          </a:prstGeom>
-          <a:solidFill>
-            <a:srgbClr val="EEF3F2"/>
-          </a:solidFill>
-          <a:ln/>
-        </p:spPr>
-      </p:sp>
-      <p:sp>
-        <p:nvSpPr>
-          <p:cNvPr id="51" name="Text 49"/>
-          <p:cNvSpPr/>
-          <p:nvPr/>
-        </p:nvSpPr>
-        <p:spPr>
-          <a:xfrm>
-            <a:off x="3337560" y="4288536"/>
-            <a:ext cx="2505456" cy="475488"/>
-          </a:xfrm>
-          <a:prstGeom prst="rect">
-            <a:avLst/>
-          </a:prstGeom>
-          <a:noFill/>
-          <a:ln/>
-        </p:spPr>
-        <p:txBody>
-          <a:bodyPr wrap="square" rtlCol="0" anchor="ctr"/>
-          <a:lstStyle/>
-          <a:p>
-            <a:pPr indent="0" marL="0">
-              <a:buNone/>
-            </a:pPr>
-            <a:r>
-              <a:rPr lang="en-US" sz="800" i="1" dirty="0">
-                <a:solidFill>
-                  <a:srgbClr val="123836"/>
-                </a:solidFill>
-              </a:rPr>
-              <a:t>Effort not yet estimated — scope clarification required before PI28 planning can be confirmed.</a:t>
-            </a:r>
-            <a:endParaRPr lang="en-US" sz="800" dirty="0"/>
-          </a:p>
-        </p:txBody>
-      </p:sp>
-      <p:sp>
-        <p:nvSpPr>
-          <p:cNvPr id="52" name="Shape 50"/>
-          <p:cNvSpPr/>
-          <p:nvPr/>
-        </p:nvSpPr>
-        <p:spPr>
-          <a:xfrm>
-            <a:off x="6163056" y="1024128"/>
-            <a:ext cx="2834640" cy="3858768"/>
-          </a:xfrm>
-          <a:prstGeom prst="rect">
-            <a:avLst/>
-          </a:prstGeom>
-          <a:solidFill>
-            <a:srgbClr val="FFFFFF"/>
-          </a:solidFill>
-          <a:ln w="12700">
-            <a:solidFill>
-              <a:srgbClr val="D0D7D7"/>
-            </a:solidFill>
-            <a:prstDash val="solid"/>
-          </a:ln>
-          <a:effectLst>
-            <a:outerShdw sx="100000" sy="100000" kx="0" ky="0" algn="bl" rotWithShape="0" blurRad="50800" dist="25400" dir="8100000">
-              <a:srgbClr val="000000">
-                <a:alpha val="12000"/>
-              </a:srgbClr>
-            </a:outerShdw>
-          </a:effectLst>
-        </p:spPr>
-      </p:sp>
-      <p:sp>
-        <p:nvSpPr>
-          <p:cNvPr id="53" name="Shape 51"/>
-          <p:cNvSpPr/>
-          <p:nvPr/>
-        </p:nvSpPr>
-        <p:spPr>
-          <a:xfrm>
-            <a:off x="6163056" y="1024128"/>
-            <a:ext cx="2834640" cy="54864"/>
-          </a:xfrm>
-          <a:prstGeom prst="rect">
-            <a:avLst/>
-          </a:prstGeom>
-          <a:solidFill>
-            <a:srgbClr val="FF6359"/>
-          </a:solidFill>
-          <a:ln/>
-        </p:spPr>
-      </p:sp>
-      <p:sp>
-        <p:nvSpPr>
-          <p:cNvPr id="54" name="Text 52"/>
-          <p:cNvSpPr/>
-          <p:nvPr/>
-        </p:nvSpPr>
-        <p:spPr>
-          <a:xfrm>
-            <a:off x="6272784" y="1115568"/>
-            <a:ext cx="2615184" cy="320040"/>
-          </a:xfrm>
-          <a:prstGeom prst="rect">
-            <a:avLst/>
-          </a:prstGeom>
-          <a:noFill/>
-          <a:ln/>
-        </p:spPr>
-        <p:txBody>
-          <a:bodyPr wrap="square" rtlCol="0" anchor="ctr"/>
-          <a:lstStyle/>
-          <a:p>
-            <a:pPr indent="0" marL="0">
-              <a:buNone/>
-            </a:pPr>
-            <a:r>
-              <a:rPr lang="en-US" sz="1300" b="1" dirty="0">
-                <a:solidFill>
-                  <a:srgbClr val="123836"/>
-                </a:solidFill>
-              </a:rPr>
-              <a:t>Tax Accounts</a:t>
-            </a:r>
-            <a:endParaRPr lang="en-US" sz="1300" dirty="0"/>
-          </a:p>
-        </p:txBody>
-      </p:sp>
-      <p:sp>
-        <p:nvSpPr>
-          <p:cNvPr id="55" name="Shape 53"/>
-          <p:cNvSpPr/>
-          <p:nvPr/>
-        </p:nvSpPr>
-        <p:spPr>
-          <a:xfrm>
-            <a:off x="6227064" y="1481328"/>
-            <a:ext cx="640080" cy="548640"/>
-          </a:xfrm>
-          <a:prstGeom prst="rect">
-            <a:avLst/>
-          </a:prstGeom>
-          <a:solidFill>
-            <a:srgbClr val="123836"/>
-          </a:solidFill>
-          <a:ln/>
-        </p:spPr>
-      </p:sp>
-      <p:sp>
-        <p:nvSpPr>
-          <p:cNvPr id="56" name="Text 54"/>
-          <p:cNvSpPr/>
-          <p:nvPr/>
-        </p:nvSpPr>
-        <p:spPr>
-          <a:xfrm>
-            <a:off x="6227064" y="1481328"/>
-            <a:ext cx="640080" cy="338328"/>
-          </a:xfrm>
-          <a:prstGeom prst="rect">
-            <a:avLst/>
-          </a:prstGeom>
-          <a:noFill/>
-          <a:ln/>
-        </p:spPr>
-        <p:txBody>
-          <a:bodyPr wrap="square" rtlCol="0" anchor="b"/>
-          <a:lstStyle/>
-          <a:p>
-            <a:pPr algn="ctr" indent="0" marL="0">
-              <a:buNone/>
-            </a:pPr>
-            <a:r>
-              <a:rPr lang="en-US" sz="750" b="1" dirty="0">
-                <a:solidFill>
-                  <a:srgbClr val="FFFFFF"/>
-                </a:solidFill>
-              </a:rPr>
-              <a:t>TBD</a:t>
-            </a:r>
-            <a:endParaRPr lang="en-US" sz="750" dirty="0"/>
-          </a:p>
-        </p:txBody>
-      </p:sp>
-      <p:sp>
-        <p:nvSpPr>
-          <p:cNvPr id="57" name="Text 55"/>
-          <p:cNvSpPr/>
-          <p:nvPr/>
-        </p:nvSpPr>
-        <p:spPr>
-          <a:xfrm>
-            <a:off x="6227064" y="1819656"/>
-            <a:ext cx="640080" cy="201168"/>
-          </a:xfrm>
-          <a:prstGeom prst="rect">
-            <a:avLst/>
-          </a:prstGeom>
-          <a:noFill/>
-          <a:ln/>
-        </p:spPr>
-        <p:txBody>
-          <a:bodyPr wrap="square" rtlCol="0" anchor="ctr"/>
-          <a:lstStyle/>
-          <a:p>
-            <a:pPr algn="ctr" indent="0" marL="0">
-              <a:buNone/>
-            </a:pPr>
-            <a:r>
-              <a:rPr lang="en-US" sz="650" dirty="0">
-                <a:solidFill>
-                  <a:srgbClr val="FFD282"/>
-                </a:solidFill>
-              </a:rPr>
-              <a:t>Effort</a:t>
-            </a:r>
-            <a:endParaRPr lang="en-US" sz="650" dirty="0"/>
-          </a:p>
-        </p:txBody>
-      </p:sp>
-      <p:sp>
-        <p:nvSpPr>
-          <p:cNvPr id="58" name="Shape 56"/>
-          <p:cNvSpPr/>
-          <p:nvPr/>
-        </p:nvSpPr>
-        <p:spPr>
-          <a:xfrm>
-            <a:off x="6922008" y="1481328"/>
-            <a:ext cx="640080" cy="548640"/>
-          </a:xfrm>
-          <a:prstGeom prst="rect">
-            <a:avLst/>
-          </a:prstGeom>
-          <a:solidFill>
-            <a:srgbClr val="123836"/>
-          </a:solidFill>
-          <a:ln/>
-        </p:spPr>
-      </p:sp>
-      <p:sp>
-        <p:nvSpPr>
-          <p:cNvPr id="59" name="Text 57"/>
-          <p:cNvSpPr/>
-          <p:nvPr/>
-        </p:nvSpPr>
-        <p:spPr>
-          <a:xfrm>
-            <a:off x="6922008" y="1481328"/>
-            <a:ext cx="640080" cy="338328"/>
-          </a:xfrm>
-          <a:prstGeom prst="rect">
-            <a:avLst/>
-          </a:prstGeom>
-          <a:noFill/>
-          <a:ln/>
-        </p:spPr>
-        <p:txBody>
-          <a:bodyPr wrap="square" rtlCol="0" anchor="b"/>
-          <a:lstStyle/>
-          <a:p>
-            <a:pPr algn="ctr" indent="0" marL="0">
-              <a:buNone/>
-            </a:pPr>
-            <a:r>
-              <a:rPr lang="en-US" sz="750" b="1" dirty="0">
-                <a:solidFill>
-                  <a:srgbClr val="FFFFFF"/>
-                </a:solidFill>
-              </a:rPr>
-              <a:t>1</a:t>
-            </a:r>
-            <a:endParaRPr lang="en-US" sz="750" dirty="0"/>
-          </a:p>
-        </p:txBody>
-      </p:sp>
-      <p:sp>
-        <p:nvSpPr>
-          <p:cNvPr id="60" name="Text 58"/>
-          <p:cNvSpPr/>
-          <p:nvPr/>
-        </p:nvSpPr>
-        <p:spPr>
-          <a:xfrm>
-            <a:off x="6922008" y="1819656"/>
-            <a:ext cx="640080" cy="201168"/>
-          </a:xfrm>
-          <a:prstGeom prst="rect">
-            <a:avLst/>
-          </a:prstGeom>
-          <a:noFill/>
-          <a:ln/>
-        </p:spPr>
-        <p:txBody>
-          <a:bodyPr wrap="square" rtlCol="0" anchor="ctr"/>
-          <a:lstStyle/>
-          <a:p>
-            <a:pPr algn="ctr" indent="0" marL="0">
-              <a:buNone/>
-            </a:pPr>
-            <a:r>
-              <a:rPr lang="en-US" sz="650" dirty="0">
-                <a:solidFill>
-                  <a:srgbClr val="FFD282"/>
-                </a:solidFill>
-              </a:rPr>
-              <a:t>Features</a:t>
-            </a:r>
-            <a:endParaRPr lang="en-US" sz="650" dirty="0"/>
-          </a:p>
-        </p:txBody>
-      </p:sp>
-      <p:sp>
-        <p:nvSpPr>
-          <p:cNvPr id="61" name="Shape 59"/>
-          <p:cNvSpPr/>
-          <p:nvPr/>
-        </p:nvSpPr>
-        <p:spPr>
-          <a:xfrm>
-            <a:off x="7616952" y="1481328"/>
-            <a:ext cx="640080" cy="548640"/>
-          </a:xfrm>
-          <a:prstGeom prst="rect">
-            <a:avLst/>
-          </a:prstGeom>
-          <a:solidFill>
-            <a:srgbClr val="123836"/>
-          </a:solidFill>
-          <a:ln/>
-        </p:spPr>
-      </p:sp>
-      <p:sp>
-        <p:nvSpPr>
-          <p:cNvPr id="62" name="Text 60"/>
-          <p:cNvSpPr/>
-          <p:nvPr/>
-        </p:nvSpPr>
-        <p:spPr>
-          <a:xfrm>
-            <a:off x="7616952" y="1481328"/>
-            <a:ext cx="640080" cy="338328"/>
-          </a:xfrm>
-          <a:prstGeom prst="rect">
-            <a:avLst/>
-          </a:prstGeom>
-          <a:noFill/>
-          <a:ln/>
-        </p:spPr>
-        <p:txBody>
-          <a:bodyPr wrap="square" rtlCol="0" anchor="b"/>
-          <a:lstStyle/>
-          <a:p>
-            <a:pPr algn="ctr" indent="0" marL="0">
-              <a:buNone/>
-            </a:pPr>
-            <a:r>
-              <a:rPr lang="en-US" sz="750" b="1" dirty="0">
-                <a:solidFill>
-                  <a:srgbClr val="FFFFFF"/>
-                </a:solidFill>
-              </a:rPr>
-              <a:t>P1</a:t>
-            </a:r>
-            <a:endParaRPr lang="en-US" sz="750" dirty="0"/>
-          </a:p>
-        </p:txBody>
-      </p:sp>
-      <p:sp>
-        <p:nvSpPr>
-          <p:cNvPr id="63" name="Text 61"/>
-          <p:cNvSpPr/>
-          <p:nvPr/>
-        </p:nvSpPr>
-        <p:spPr>
-          <a:xfrm>
-            <a:off x="7616952" y="1819656"/>
-            <a:ext cx="640080" cy="201168"/>
-          </a:xfrm>
-          <a:prstGeom prst="rect">
-            <a:avLst/>
-          </a:prstGeom>
-          <a:noFill/>
-          <a:ln/>
-        </p:spPr>
-        <p:txBody>
-          <a:bodyPr wrap="square" rtlCol="0" anchor="ctr"/>
-          <a:lstStyle/>
-          <a:p>
-            <a:pPr algn="ctr" indent="0" marL="0">
-              <a:buNone/>
-            </a:pPr>
-            <a:r>
-              <a:rPr lang="en-US" sz="650" dirty="0">
-                <a:solidFill>
-                  <a:srgbClr val="FFD282"/>
-                </a:solidFill>
-              </a:rPr>
-              <a:t>Priority</a:t>
-            </a:r>
-            <a:endParaRPr lang="en-US" sz="650" dirty="0"/>
-          </a:p>
-        </p:txBody>
-      </p:sp>
-      <p:sp>
-        <p:nvSpPr>
-          <p:cNvPr id="64" name="Shape 62"/>
-          <p:cNvSpPr/>
-          <p:nvPr/>
-        </p:nvSpPr>
-        <p:spPr>
-          <a:xfrm>
-            <a:off x="8311896" y="1481328"/>
-            <a:ext cx="640080" cy="548640"/>
-          </a:xfrm>
-          <a:prstGeom prst="rect">
-            <a:avLst/>
-          </a:prstGeom>
-          <a:solidFill>
-            <a:srgbClr val="123836"/>
-          </a:solidFill>
-          <a:ln/>
-        </p:spPr>
-      </p:sp>
-      <p:sp>
-        <p:nvSpPr>
-          <p:cNvPr id="65" name="Text 63"/>
-          <p:cNvSpPr/>
-          <p:nvPr/>
-        </p:nvSpPr>
-        <p:spPr>
-          <a:xfrm>
-            <a:off x="8311896" y="1481328"/>
-            <a:ext cx="640080" cy="338328"/>
-          </a:xfrm>
-          <a:prstGeom prst="rect">
-            <a:avLst/>
-          </a:prstGeom>
-          <a:noFill/>
-          <a:ln/>
-        </p:spPr>
-        <p:txBody>
-          <a:bodyPr wrap="square" rtlCol="0" anchor="b"/>
-          <a:lstStyle/>
-          <a:p>
-            <a:pPr algn="ctr" indent="0" marL="0">
-              <a:buNone/>
-            </a:pPr>
-            <a:r>
-              <a:rPr lang="en-US" sz="750" b="1" dirty="0">
-                <a:solidFill>
-                  <a:srgbClr val="FFFFFF"/>
-                </a:solidFill>
-              </a:rPr>
-              <a:t>PI28–PI29</a:t>
-            </a:r>
-            <a:endParaRPr lang="en-US" sz="750" dirty="0"/>
-          </a:p>
-        </p:txBody>
-      </p:sp>
-      <p:sp>
-        <p:nvSpPr>
-          <p:cNvPr id="66" name="Text 64"/>
-          <p:cNvSpPr/>
-          <p:nvPr/>
-        </p:nvSpPr>
-        <p:spPr>
-          <a:xfrm>
-            <a:off x="8311896" y="1819656"/>
-            <a:ext cx="640080" cy="201168"/>
-          </a:xfrm>
-          <a:prstGeom prst="rect">
-            <a:avLst/>
-          </a:prstGeom>
-          <a:noFill/>
-          <a:ln/>
-        </p:spPr>
-        <p:txBody>
-          <a:bodyPr wrap="square" rtlCol="0" anchor="ctr"/>
-          <a:lstStyle/>
-          <a:p>
-            <a:pPr algn="ctr" indent="0" marL="0">
-              <a:buNone/>
-            </a:pPr>
-            <a:r>
-              <a:rPr lang="en-US" sz="650" dirty="0">
-                <a:solidFill>
-                  <a:srgbClr val="FFD282"/>
-                </a:solidFill>
-              </a:rPr>
-              <a:t>PI</a:t>
-            </a:r>
-            <a:endParaRPr lang="en-US" sz="650" dirty="0"/>
-          </a:p>
-        </p:txBody>
-      </p:sp>
-      <p:sp>
-        <p:nvSpPr>
-          <p:cNvPr id="67" name="Text 65"/>
-          <p:cNvSpPr/>
-          <p:nvPr/>
-        </p:nvSpPr>
-        <p:spPr>
-          <a:xfrm>
-            <a:off x="6272784" y="2103120"/>
-            <a:ext cx="2615184" cy="201168"/>
-          </a:xfrm>
-          <a:prstGeom prst="rect">
-            <a:avLst/>
-          </a:prstGeom>
-          <a:noFill/>
-          <a:ln/>
-        </p:spPr>
-        <p:txBody>
-          <a:bodyPr wrap="square" rtlCol="0" anchor="ctr"/>
-          <a:lstStyle/>
-          <a:p>
-            <a:pPr indent="0" marL="0">
-              <a:buNone/>
-            </a:pPr>
-            <a:r>
-              <a:rPr lang="en-US" sz="900" b="1" dirty="0">
-                <a:solidFill>
-                  <a:srgbClr val="FF6359"/>
-                </a:solidFill>
-              </a:rPr>
-              <a:t>Scope</a:t>
-            </a:r>
-            <a:endParaRPr lang="en-US" sz="900" dirty="0"/>
-          </a:p>
-        </p:txBody>
-      </p:sp>
-      <p:sp>
-        <p:nvSpPr>
-          <p:cNvPr id="68" name="Text 66"/>
-          <p:cNvSpPr/>
-          <p:nvPr/>
-        </p:nvSpPr>
-        <p:spPr>
-          <a:xfrm>
-            <a:off x="6272784" y="2304288"/>
-            <a:ext cx="2615184" cy="822960"/>
-          </a:xfrm>
-          <a:prstGeom prst="rect">
-            <a:avLst/>
-          </a:prstGeom>
-          <a:noFill/>
-          <a:ln/>
-        </p:spPr>
-        <p:txBody>
-          <a:bodyPr wrap="square" rtlCol="0" anchor="ctr"/>
-          <a:lstStyle/>
-          <a:p>
-            <a:pPr indent="0" marL="0">
-              <a:buNone/>
-            </a:pPr>
-            <a:r>
-              <a:rPr lang="en-US" sz="850" dirty="0">
-                <a:solidFill>
-                  <a:srgbClr val="141E1E"/>
-                </a:solidFill>
-              </a:rPr>
-              <a:t>Provides a structured account management layer for individual tax obligations, enabling authorities to track, manage, and report on each taxpayer's account position across multiple tax types and periods.</a:t>
-            </a:r>
-            <a:endParaRPr lang="en-US" sz="850" dirty="0"/>
-          </a:p>
-        </p:txBody>
-      </p:sp>
-      <p:sp>
-        <p:nvSpPr>
-          <p:cNvPr id="69" name="Text 67"/>
-          <p:cNvSpPr/>
-          <p:nvPr/>
-        </p:nvSpPr>
-        <p:spPr>
-          <a:xfrm>
-            <a:off x="6272784" y="3172968"/>
-            <a:ext cx="2615184" cy="201168"/>
-          </a:xfrm>
-          <a:prstGeom prst="rect">
-            <a:avLst/>
-          </a:prstGeom>
-          <a:noFill/>
-          <a:ln/>
-        </p:spPr>
-        <p:txBody>
-          <a:bodyPr wrap="square" rtlCol="0" anchor="ctr"/>
-          <a:lstStyle/>
-          <a:p>
-            <a:pPr indent="0" marL="0">
-              <a:buNone/>
-            </a:pPr>
-            <a:r>
-              <a:rPr lang="en-US" sz="900" b="1" dirty="0">
-                <a:solidFill>
-                  <a:srgbClr val="FF6359"/>
-                </a:solidFill>
-              </a:rPr>
-              <a:t>Benefits</a:t>
-            </a:r>
-            <a:endParaRPr lang="en-US" sz="900" dirty="0"/>
-          </a:p>
-        </p:txBody>
-      </p:sp>
-      <p:sp>
-        <p:nvSpPr>
-          <p:cNvPr id="70" name="Text 68"/>
-          <p:cNvSpPr/>
-          <p:nvPr/>
-        </p:nvSpPr>
-        <p:spPr>
-          <a:xfrm>
-            <a:off x="6272784" y="3383280"/>
-            <a:ext cx="2615184" cy="822960"/>
-          </a:xfrm>
-          <a:prstGeom prst="rect">
-            <a:avLst/>
-          </a:prstGeom>
-          <a:noFill/>
-          <a:ln/>
-        </p:spPr>
-        <p:txBody>
-          <a:bodyPr wrap="square" rtlCol="0" anchor="ctr"/>
-          <a:lstStyle/>
-          <a:p>
-            <a:pPr marL="342900" indent="-342900">
-              <a:buSzPct val="100000"/>
-              <a:buChar char="•"/>
-            </a:pPr>
-            <a:r>
-              <a:rPr lang="en-US" sz="800" dirty="0">
-                <a:solidFill>
-                  <a:srgbClr val="4A5C5A"/>
-                </a:solidFill>
-              </a:rPr>
-              <a:t>Unified account view simplifies officer case management and reduces error rates</a:t>
-            </a:r>
-            <a:endParaRPr lang="en-US" sz="800" dirty="0"/>
-          </a:p>
-          <a:p>
-            <a:pPr marL="342900" indent="-342900">
-              <a:buSzPct val="100000"/>
-              <a:buChar char="•"/>
-            </a:pPr>
-            <a:r>
-              <a:rPr lang="en-US" sz="800" dirty="0">
-                <a:solidFill>
-                  <a:srgbClr val="4A5C5A"/>
-                </a:solidFill>
-              </a:rPr>
-              <a:t>Supports multi-period and multi-tax-type account tracking in a single view</a:t>
-            </a:r>
-            <a:endParaRPr lang="en-US" sz="800" dirty="0"/>
-          </a:p>
-          <a:p>
-            <a:pPr marL="342900" indent="-342900">
-              <a:buSzPct val="100000"/>
-              <a:buChar char="•"/>
-            </a:pPr>
-            <a:r>
-              <a:rPr lang="en-US" sz="800" dirty="0">
-                <a:solidFill>
-                  <a:srgbClr val="4A5C5A"/>
-                </a:solidFill>
-              </a:rPr>
-              <a:t>Foundation for advanced debt management and compliance analytics</a:t>
-            </a:r>
-            <a:endParaRPr lang="en-US" sz="800" dirty="0"/>
-          </a:p>
-        </p:txBody>
-      </p:sp>
-      <p:sp>
-        <p:nvSpPr>
-          <p:cNvPr id="71" name="Shape 69"/>
-          <p:cNvSpPr/>
-          <p:nvPr/>
-        </p:nvSpPr>
-        <p:spPr>
-          <a:xfrm>
-            <a:off x="6272784" y="4261104"/>
-            <a:ext cx="2615184" cy="530352"/>
-          </a:xfrm>
-          <a:prstGeom prst="rect">
-            <a:avLst/>
-          </a:prstGeom>
-          <a:solidFill>
-            <a:srgbClr val="EEF3F2"/>
-          </a:solidFill>
-          <a:ln/>
-        </p:spPr>
-      </p:sp>
-      <p:sp>
-        <p:nvSpPr>
-          <p:cNvPr id="72" name="Text 70"/>
-          <p:cNvSpPr/>
-          <p:nvPr/>
-        </p:nvSpPr>
-        <p:spPr>
-          <a:xfrm>
-            <a:off x="6327648" y="4288536"/>
-            <a:ext cx="2505456" cy="475488"/>
-          </a:xfrm>
-          <a:prstGeom prst="rect">
-            <a:avLst/>
-          </a:prstGeom>
-          <a:noFill/>
-          <a:ln/>
-        </p:spPr>
-        <p:txBody>
-          <a:bodyPr wrap="square" rtlCol="0" anchor="ctr"/>
-          <a:lstStyle/>
-          <a:p>
-            <a:pPr indent="0" marL="0">
-              <a:buNone/>
-            </a:pPr>
-            <a:r>
-              <a:rPr lang="en-US" sz="800" i="1" dirty="0">
-                <a:solidFill>
-                  <a:srgbClr val="123836"/>
-                </a:solidFill>
-              </a:rPr>
-              <a:t>P1 priority but effort TBD — requires immediate scoping to avoid PI28 planning risk.</a:t>
-            </a:r>
-            <a:endParaRPr lang="en-US" sz="800" dirty="0"/>
-          </a:p>
-        </p:txBody>
-      </p:sp>
-    </p:spTree>
-  </p:cSld>
-  <p:clrMapOvr>
-    <a:masterClrMapping/>
-  </p:clrMapOvr>
-</p:sld>
-</file>
-
-<file path=ppt/slides/slide8.xml><?xml version="1.0" encoding="utf-8"?>
-<p:sld xmlns:a="http://schemas.openxmlformats.org/drawingml/2006/main" xmlns:r="http://schemas.openxmlformats.org/officeDocument/2006/relationships" xmlns:p="http://schemas.openxmlformats.org/presentationml/2006/main">
-  <p:cSld name="Slide 8">
     <p:bg>
       <p:bgPr>
         <a:solidFill>
@@ -14934,6 +12326,9 @@
                 <a:solidFill>
                   <a:srgbClr val="FFFFFF"/>
                 </a:solidFill>
+                <a:latin typeface="Calibri" pitchFamily="34" charset="0"/>
+                <a:ea typeface="Calibri" pitchFamily="34" charset="-122"/>
+                <a:cs typeface="Calibri" pitchFamily="34" charset="-120"/>
               </a:rPr>
               <a:t>Next Steps &amp; Decision Points</a:t>
             </a:r>
@@ -14970,6 +12365,9 @@
                 <a:solidFill>
                   <a:srgbClr val="73AA87"/>
                 </a:solidFill>
+                <a:latin typeface="Calibri" pitchFamily="34" charset="0"/>
+                <a:ea typeface="Calibri" pitchFamily="34" charset="-122"/>
+                <a:cs typeface="Calibri" pitchFamily="34" charset="-120"/>
               </a:rPr>
               <a:t>Solon Tax Product Roadmap 2026 | SteerCo Session — 29 April 2026</a:t>
             </a:r>
@@ -15062,7 +12460,7 @@
         <p:spPr>
           <a:xfrm>
             <a:off x="822960" y="1417320"/>
-            <a:ext cx="7772400" cy="256032"/>
+            <a:ext cx="7955280" cy="256032"/>
           </a:xfrm>
           <a:prstGeom prst="rect">
             <a:avLst/>
@@ -15098,7 +12496,7 @@
         <p:spPr>
           <a:xfrm>
             <a:off x="822960" y="1691640"/>
-            <a:ext cx="7772400" cy="256032"/>
+            <a:ext cx="7955280" cy="256032"/>
           </a:xfrm>
           <a:prstGeom prst="rect">
             <a:avLst/>
@@ -15210,7 +12608,7 @@
         <p:spPr>
           <a:xfrm>
             <a:off x="822960" y="2167128"/>
-            <a:ext cx="7772400" cy="256032"/>
+            <a:ext cx="7955280" cy="256032"/>
           </a:xfrm>
           <a:prstGeom prst="rect">
             <a:avLst/>
@@ -15246,7 +12644,7 @@
         <p:spPr>
           <a:xfrm>
             <a:off x="822960" y="2441448"/>
-            <a:ext cx="7772400" cy="256032"/>
+            <a:ext cx="7955280" cy="256032"/>
           </a:xfrm>
           <a:prstGeom prst="rect">
             <a:avLst/>
@@ -15358,7 +12756,7 @@
         <p:spPr>
           <a:xfrm>
             <a:off x="822960" y="2916936"/>
-            <a:ext cx="7772400" cy="256032"/>
+            <a:ext cx="7955280" cy="256032"/>
           </a:xfrm>
           <a:prstGeom prst="rect">
             <a:avLst/>
@@ -15394,7 +12792,7 @@
         <p:spPr>
           <a:xfrm>
             <a:off x="822960" y="3191256"/>
-            <a:ext cx="7772400" cy="256032"/>
+            <a:ext cx="7955280" cy="256032"/>
           </a:xfrm>
           <a:prstGeom prst="rect">
             <a:avLst/>
@@ -15506,7 +12904,7 @@
         <p:spPr>
           <a:xfrm>
             <a:off x="822960" y="3666744"/>
-            <a:ext cx="7772400" cy="256032"/>
+            <a:ext cx="7955280" cy="256032"/>
           </a:xfrm>
           <a:prstGeom prst="rect">
             <a:avLst/>
@@ -15542,7 +12940,7 @@
         <p:spPr>
           <a:xfrm>
             <a:off x="822960" y="3941064"/>
-            <a:ext cx="7772400" cy="256032"/>
+            <a:ext cx="7955280" cy="256032"/>
           </a:xfrm>
           <a:prstGeom prst="rect">
             <a:avLst/>
